--- a/slides/12 - Schema registry.pptx
+++ b/slides/12 - Schema registry.pptx
@@ -6,28 +6,40 @@
     <p:sldMasterId id="2147483657" r:id="rId2"/>
   </p:sldMasterIdLst>
   <p:notesMasterIdLst>
-    <p:notesMasterId r:id="rId9"/>
+    <p:notesMasterId r:id="rId14"/>
   </p:notesMasterIdLst>
   <p:handoutMasterIdLst>
-    <p:handoutMasterId r:id="rId10"/>
+    <p:handoutMasterId r:id="rId15"/>
   </p:handoutMasterIdLst>
   <p:sldIdLst>
     <p:sldId id="260" r:id="rId3"/>
     <p:sldId id="319" r:id="rId4"/>
     <p:sldId id="320" r:id="rId5"/>
-    <p:sldId id="323" r:id="rId6"/>
-    <p:sldId id="321" r:id="rId7"/>
-    <p:sldId id="322" r:id="rId8"/>
+    <p:sldId id="324" r:id="rId6"/>
+    <p:sldId id="325" r:id="rId7"/>
+    <p:sldId id="326" r:id="rId8"/>
+    <p:sldId id="327" r:id="rId9"/>
+    <p:sldId id="328" r:id="rId10"/>
+    <p:sldId id="323" r:id="rId11"/>
+    <p:sldId id="321" r:id="rId12"/>
+    <p:sldId id="322" r:id="rId13"/>
   </p:sldIdLst>
   <p:sldSz cx="10080625" cy="6858000"/>
   <p:notesSz cx="6888163" cy="10020300"/>
   <p:embeddedFontLst>
     <p:embeddedFont>
       <p:font typeface="Arial Narrow" panose="020B0606020202030204" pitchFamily="34" charset="0"/>
-      <p:regular r:id="rId11"/>
-      <p:bold r:id="rId12"/>
-      <p:italic r:id="rId13"/>
-      <p:boldItalic r:id="rId14"/>
+      <p:regular r:id="rId16"/>
+      <p:bold r:id="rId17"/>
+      <p:italic r:id="rId18"/>
+      <p:boldItalic r:id="rId19"/>
+    </p:embeddedFont>
+    <p:embeddedFont>
+      <p:font typeface="Consolas" panose="020B0609020204030204" pitchFamily="49" charset="0"/>
+      <p:regular r:id="rId20"/>
+      <p:bold r:id="rId21"/>
+      <p:italic r:id="rId22"/>
+      <p:boldItalic r:id="rId23"/>
     </p:embeddedFont>
   </p:embeddedFontLst>
   <p:defaultTextStyle>
@@ -394,7 +406,7 @@
           <a:p>
             <a:fld id="{2FBFE939-5EC3-4D08-AE9D-032279A81FC9}" type="datetimeFigureOut">
               <a:rPr lang="da-DK" smtClean="0"/>
-              <a:t>05-04-2024</a:t>
+              <a:t>06-04-2024</a:t>
             </a:fld>
             <a:endParaRPr lang="da-DK"/>
           </a:p>
@@ -4366,405 +4378,7 @@
 </p:sld>
 </file>
 
-<file path=ppt/slides/slide2.xml><?xml version="1.0" encoding="utf-8"?>
-<p:sld xmlns:a="http://schemas.openxmlformats.org/drawingml/2006/main" xmlns:r="http://schemas.openxmlformats.org/officeDocument/2006/relationships" xmlns:p="http://schemas.openxmlformats.org/presentationml/2006/main">
-  <p:cSld>
-    <p:spTree>
-      <p:nvGrpSpPr>
-        <p:cNvPr id="1" name=""/>
-        <p:cNvGrpSpPr/>
-        <p:nvPr/>
-      </p:nvGrpSpPr>
-      <p:grpSpPr>
-        <a:xfrm>
-          <a:off x="0" y="0"/>
-          <a:ext cx="0" cy="0"/>
-          <a:chOff x="0" y="0"/>
-          <a:chExt cx="0" cy="0"/>
-        </a:xfrm>
-      </p:grpSpPr>
-      <p:sp>
-        <p:nvSpPr>
-          <p:cNvPr id="2" name="Titel 1">
-            <a:extLst>
-              <a:ext uri="{FF2B5EF4-FFF2-40B4-BE49-F238E27FC236}">
-                <a16:creationId xmlns:a16="http://schemas.microsoft.com/office/drawing/2014/main" id="{D921EA28-74D7-33B5-C555-50355A95DB0C}"/>
-              </a:ext>
-            </a:extLst>
-          </p:cNvPr>
-          <p:cNvSpPr>
-            <a:spLocks noGrp="1"/>
-          </p:cNvSpPr>
-          <p:nvPr>
-            <p:ph type="title"/>
-          </p:nvPr>
-        </p:nvSpPr>
-        <p:spPr/>
-        <p:txBody>
-          <a:bodyPr/>
-          <a:lstStyle/>
-          <a:p>
-            <a:r>
-              <a:rPr lang="da-DK" dirty="0" err="1"/>
-              <a:t>Without</a:t>
-            </a:r>
-            <a:r>
-              <a:rPr lang="da-DK" dirty="0"/>
-              <a:t> </a:t>
-            </a:r>
-            <a:r>
-              <a:rPr lang="da-DK" dirty="0" err="1"/>
-              <a:t>schema</a:t>
-            </a:r>
-            <a:r>
-              <a:rPr lang="da-DK" dirty="0"/>
-              <a:t> </a:t>
-            </a:r>
-            <a:r>
-              <a:rPr lang="da-DK" dirty="0" err="1"/>
-              <a:t>registry</a:t>
-            </a:r>
-            <a:endParaRPr lang="en-US" dirty="0"/>
-          </a:p>
-        </p:txBody>
-      </p:sp>
-      <p:pic>
-        <p:nvPicPr>
-          <p:cNvPr id="3" name="Picture 2">
-            <a:extLst>
-              <a:ext uri="{FF2B5EF4-FFF2-40B4-BE49-F238E27FC236}">
-                <a16:creationId xmlns:a16="http://schemas.microsoft.com/office/drawing/2014/main" id="{3ACB651C-4AB1-F4C1-1D3A-67837C80BB16}"/>
-              </a:ext>
-            </a:extLst>
-          </p:cNvPr>
-          <p:cNvPicPr>
-            <a:picLocks noChangeAspect="1" noChangeArrowheads="1"/>
-          </p:cNvPicPr>
-          <p:nvPr/>
-        </p:nvPicPr>
-        <p:blipFill>
-          <a:blip r:embed="rId2">
-            <a:extLst>
-              <a:ext uri="{28A0092B-C50C-407E-A947-70E740481C1C}">
-                <a14:useLocalDpi xmlns:a14="http://schemas.microsoft.com/office/drawing/2010/main" val="0"/>
-              </a:ext>
-            </a:extLst>
-          </a:blip>
-          <a:srcRect/>
-          <a:stretch>
-            <a:fillRect/>
-          </a:stretch>
-        </p:blipFill>
-        <p:spPr bwMode="auto">
-          <a:xfrm>
-            <a:off x="1459189" y="2524608"/>
-            <a:ext cx="6667500" cy="2162175"/>
-          </a:xfrm>
-          <a:prstGeom prst="rect">
-            <a:avLst/>
-          </a:prstGeom>
-          <a:noFill/>
-          <a:extLst>
-            <a:ext uri="{909E8E84-426E-40DD-AFC4-6F175D3DCCD1}">
-              <a14:hiddenFill xmlns:a14="http://schemas.microsoft.com/office/drawing/2010/main">
-                <a:solidFill>
-                  <a:srgbClr val="FFFFFF"/>
-                </a:solidFill>
-              </a14:hiddenFill>
-            </a:ext>
-          </a:extLst>
-        </p:spPr>
-      </p:pic>
-    </p:spTree>
-    <p:extLst>
-      <p:ext uri="{BB962C8B-B14F-4D97-AF65-F5344CB8AC3E}">
-        <p14:creationId xmlns:p14="http://schemas.microsoft.com/office/powerpoint/2010/main" val="2625883798"/>
-      </p:ext>
-    </p:extLst>
-  </p:cSld>
-  <p:clrMapOvr>
-    <a:masterClrMapping/>
-  </p:clrMapOvr>
-</p:sld>
-</file>
-
-<file path=ppt/slides/slide3.xml><?xml version="1.0" encoding="utf-8"?>
-<p:sld xmlns:a="http://schemas.openxmlformats.org/drawingml/2006/main" xmlns:r="http://schemas.openxmlformats.org/officeDocument/2006/relationships" xmlns:p="http://schemas.openxmlformats.org/presentationml/2006/main">
-  <p:cSld>
-    <p:spTree>
-      <p:nvGrpSpPr>
-        <p:cNvPr id="1" name=""/>
-        <p:cNvGrpSpPr/>
-        <p:nvPr/>
-      </p:nvGrpSpPr>
-      <p:grpSpPr>
-        <a:xfrm>
-          <a:off x="0" y="0"/>
-          <a:ext cx="0" cy="0"/>
-          <a:chOff x="0" y="0"/>
-          <a:chExt cx="0" cy="0"/>
-        </a:xfrm>
-      </p:grpSpPr>
-      <p:sp>
-        <p:nvSpPr>
-          <p:cNvPr id="2" name="Titel 1">
-            <a:extLst>
-              <a:ext uri="{FF2B5EF4-FFF2-40B4-BE49-F238E27FC236}">
-                <a16:creationId xmlns:a16="http://schemas.microsoft.com/office/drawing/2014/main" id="{D921EA28-74D7-33B5-C555-50355A95DB0C}"/>
-              </a:ext>
-            </a:extLst>
-          </p:cNvPr>
-          <p:cNvSpPr>
-            <a:spLocks noGrp="1"/>
-          </p:cNvSpPr>
-          <p:nvPr>
-            <p:ph type="title"/>
-          </p:nvPr>
-        </p:nvSpPr>
-        <p:spPr/>
-        <p:txBody>
-          <a:bodyPr/>
-          <a:lstStyle/>
-          <a:p>
-            <a:r>
-              <a:rPr lang="da-DK" dirty="0"/>
-              <a:t>With </a:t>
-            </a:r>
-            <a:r>
-              <a:rPr lang="da-DK" dirty="0" err="1"/>
-              <a:t>schema</a:t>
-            </a:r>
-            <a:r>
-              <a:rPr lang="da-DK" dirty="0"/>
-              <a:t> </a:t>
-            </a:r>
-            <a:r>
-              <a:rPr lang="da-DK" dirty="0" err="1"/>
-              <a:t>registry</a:t>
-            </a:r>
-            <a:endParaRPr lang="en-US" dirty="0"/>
-          </a:p>
-        </p:txBody>
-      </p:sp>
-      <p:pic>
-        <p:nvPicPr>
-          <p:cNvPr id="2050" name="Picture 2">
-            <a:extLst>
-              <a:ext uri="{FF2B5EF4-FFF2-40B4-BE49-F238E27FC236}">
-                <a16:creationId xmlns:a16="http://schemas.microsoft.com/office/drawing/2014/main" id="{8384B039-F901-D00A-5EED-F6AA60FA71C5}"/>
-              </a:ext>
-            </a:extLst>
-          </p:cNvPr>
-          <p:cNvPicPr>
-            <a:picLocks noChangeAspect="1" noChangeArrowheads="1"/>
-          </p:cNvPicPr>
-          <p:nvPr/>
-        </p:nvPicPr>
-        <p:blipFill>
-          <a:blip r:embed="rId2">
-            <a:extLst>
-              <a:ext uri="{28A0092B-C50C-407E-A947-70E740481C1C}">
-                <a14:useLocalDpi xmlns:a14="http://schemas.microsoft.com/office/drawing/2010/main" val="0"/>
-              </a:ext>
-            </a:extLst>
-          </a:blip>
-          <a:srcRect/>
-          <a:stretch>
-            <a:fillRect/>
-          </a:stretch>
-        </p:blipFill>
-        <p:spPr bwMode="auto">
-          <a:xfrm>
-            <a:off x="1706563" y="1700213"/>
-            <a:ext cx="6667500" cy="3457575"/>
-          </a:xfrm>
-          <a:prstGeom prst="rect">
-            <a:avLst/>
-          </a:prstGeom>
-          <a:noFill/>
-          <a:extLst>
-            <a:ext uri="{909E8E84-426E-40DD-AFC4-6F175D3DCCD1}">
-              <a14:hiddenFill xmlns:a14="http://schemas.microsoft.com/office/drawing/2010/main">
-                <a:solidFill>
-                  <a:srgbClr val="FFFFFF"/>
-                </a:solidFill>
-              </a14:hiddenFill>
-            </a:ext>
-          </a:extLst>
-        </p:spPr>
-      </p:pic>
-    </p:spTree>
-    <p:extLst>
-      <p:ext uri="{BB962C8B-B14F-4D97-AF65-F5344CB8AC3E}">
-        <p14:creationId xmlns:p14="http://schemas.microsoft.com/office/powerpoint/2010/main" val="576345979"/>
-      </p:ext>
-    </p:extLst>
-  </p:cSld>
-  <p:clrMapOvr>
-    <a:masterClrMapping/>
-  </p:clrMapOvr>
-</p:sld>
-</file>
-
-<file path=ppt/slides/slide4.xml><?xml version="1.0" encoding="utf-8"?>
-<p:sld xmlns:a="http://schemas.openxmlformats.org/drawingml/2006/main" xmlns:r="http://schemas.openxmlformats.org/officeDocument/2006/relationships" xmlns:p="http://schemas.openxmlformats.org/presentationml/2006/main">
-  <p:cSld>
-    <p:spTree>
-      <p:nvGrpSpPr>
-        <p:cNvPr id="1" name=""/>
-        <p:cNvGrpSpPr/>
-        <p:nvPr/>
-      </p:nvGrpSpPr>
-      <p:grpSpPr>
-        <a:xfrm>
-          <a:off x="0" y="0"/>
-          <a:ext cx="0" cy="0"/>
-          <a:chOff x="0" y="0"/>
-          <a:chExt cx="0" cy="0"/>
-        </a:xfrm>
-      </p:grpSpPr>
-      <p:sp>
-        <p:nvSpPr>
-          <p:cNvPr id="2" name="Titel 1">
-            <a:extLst>
-              <a:ext uri="{FF2B5EF4-FFF2-40B4-BE49-F238E27FC236}">
-                <a16:creationId xmlns:a16="http://schemas.microsoft.com/office/drawing/2014/main" id="{D921EA28-74D7-33B5-C555-50355A95DB0C}"/>
-              </a:ext>
-            </a:extLst>
-          </p:cNvPr>
-          <p:cNvSpPr>
-            <a:spLocks noGrp="1"/>
-          </p:cNvSpPr>
-          <p:nvPr>
-            <p:ph type="title"/>
-          </p:nvPr>
-        </p:nvSpPr>
-        <p:spPr/>
-        <p:txBody>
-          <a:bodyPr/>
-          <a:lstStyle/>
-          <a:p>
-            <a:r>
-              <a:rPr lang="da-DK" dirty="0"/>
-              <a:t>With </a:t>
-            </a:r>
-            <a:r>
-              <a:rPr lang="da-DK" dirty="0" err="1"/>
-              <a:t>schema</a:t>
-            </a:r>
-            <a:r>
-              <a:rPr lang="da-DK" dirty="0"/>
-              <a:t> </a:t>
-            </a:r>
-            <a:r>
-              <a:rPr lang="da-DK" dirty="0" err="1"/>
-              <a:t>registry</a:t>
-            </a:r>
-            <a:endParaRPr lang="en-US" dirty="0"/>
-          </a:p>
-        </p:txBody>
-      </p:sp>
-      <p:sp>
-        <p:nvSpPr>
-          <p:cNvPr id="3" name="Tekstfelt 2">
-            <a:extLst>
-              <a:ext uri="{FF2B5EF4-FFF2-40B4-BE49-F238E27FC236}">
-                <a16:creationId xmlns:a16="http://schemas.microsoft.com/office/drawing/2014/main" id="{6568A9F9-8086-4AE7-454C-8D98E61F8898}"/>
-              </a:ext>
-            </a:extLst>
-          </p:cNvPr>
-          <p:cNvSpPr txBox="1"/>
-          <p:nvPr/>
-        </p:nvSpPr>
-        <p:spPr>
-          <a:xfrm>
-            <a:off x="2968487" y="1762539"/>
-            <a:ext cx="4740400" cy="2031325"/>
-          </a:xfrm>
-          <a:prstGeom prst="rect">
-            <a:avLst/>
-          </a:prstGeom>
-          <a:noFill/>
-        </p:spPr>
-        <p:txBody>
-          <a:bodyPr wrap="none" rtlCol="0">
-            <a:spAutoFit/>
-          </a:bodyPr>
-          <a:lstStyle/>
-          <a:p>
-            <a:r>
-              <a:rPr lang="en-US" dirty="0">
-                <a:hlinkClick r:id="rId2"/>
-              </a:rPr>
-              <a:t>http://localhost:8085/subjects</a:t>
-            </a:r>
-            <a:endParaRPr lang="en-US" dirty="0"/>
-          </a:p>
-          <a:p>
-            <a:endParaRPr lang="en-US" dirty="0">
-              <a:hlinkClick r:id="rId3"/>
-            </a:endParaRPr>
-          </a:p>
-          <a:p>
-            <a:r>
-              <a:rPr lang="en-US" dirty="0">
-                <a:hlinkClick r:id="rId3"/>
-              </a:rPr>
-              <a:t>http://localhost:8085/subjects/proto-topic-value/versions</a:t>
-            </a:r>
-            <a:endParaRPr lang="en-US" dirty="0"/>
-          </a:p>
-          <a:p>
-            <a:endParaRPr lang="en-US" dirty="0"/>
-          </a:p>
-          <a:p>
-            <a:r>
-              <a:rPr lang="en-US" dirty="0">
-                <a:hlinkClick r:id="rId4"/>
-              </a:rPr>
-              <a:t>http://localhost:8085/subjects/proto-topic-value/versions/1</a:t>
-            </a:r>
-            <a:endParaRPr lang="en-US" dirty="0"/>
-          </a:p>
-          <a:p>
-            <a:endParaRPr lang="en-US" dirty="0"/>
-          </a:p>
-          <a:p>
-            <a:endParaRPr lang="en-US" dirty="0"/>
-          </a:p>
-          <a:p>
-            <a:r>
-              <a:rPr lang="en-US" dirty="0"/>
-              <a:t>Check </a:t>
-            </a:r>
-            <a:r>
-              <a:rPr lang="en-US"/>
-              <a:t>Top-level compatibility</a:t>
-            </a:r>
-            <a:endParaRPr lang="en-US" dirty="0"/>
-          </a:p>
-          <a:p>
-            <a:r>
-              <a:rPr lang="en-US" dirty="0"/>
-              <a:t>http://localhost:8085/config</a:t>
-            </a:r>
-          </a:p>
-        </p:txBody>
-      </p:sp>
-    </p:spTree>
-    <p:extLst>
-      <p:ext uri="{BB962C8B-B14F-4D97-AF65-F5344CB8AC3E}">
-        <p14:creationId xmlns:p14="http://schemas.microsoft.com/office/powerpoint/2010/main" val="942320509"/>
-      </p:ext>
-    </p:extLst>
-  </p:cSld>
-  <p:clrMapOvr>
-    <a:masterClrMapping/>
-  </p:clrMapOvr>
-</p:sld>
-</file>
-
-<file path=ppt/slides/slide5.xml><?xml version="1.0" encoding="utf-8"?>
+<file path=ppt/slides/slide10.xml><?xml version="1.0" encoding="utf-8"?>
 <p:sld xmlns:a="http://schemas.openxmlformats.org/drawingml/2006/main" xmlns:r="http://schemas.openxmlformats.org/officeDocument/2006/relationships" xmlns:p="http://schemas.openxmlformats.org/presentationml/2006/main">
   <p:cSld>
     <p:spTree>
@@ -4878,7 +4492,7 @@
 </p:sld>
 </file>
 
-<file path=ppt/slides/slide6.xml><?xml version="1.0" encoding="utf-8"?>
+<file path=ppt/slides/slide11.xml><?xml version="1.0" encoding="utf-8"?>
 <p:sld xmlns:a="http://schemas.openxmlformats.org/drawingml/2006/main" xmlns:r="http://schemas.openxmlformats.org/officeDocument/2006/relationships" xmlns:p="http://schemas.openxmlformats.org/presentationml/2006/main">
   <p:cSld>
     <p:spTree>
@@ -4979,6 +4593,6657 @@
     <p:extLst>
       <p:ext uri="{BB962C8B-B14F-4D97-AF65-F5344CB8AC3E}">
         <p14:creationId xmlns:p14="http://schemas.microsoft.com/office/powerpoint/2010/main" val="100181980"/>
+      </p:ext>
+    </p:extLst>
+  </p:cSld>
+  <p:clrMapOvr>
+    <a:masterClrMapping/>
+  </p:clrMapOvr>
+</p:sld>
+</file>
+
+<file path=ppt/slides/slide2.xml><?xml version="1.0" encoding="utf-8"?>
+<p:sld xmlns:a="http://schemas.openxmlformats.org/drawingml/2006/main" xmlns:r="http://schemas.openxmlformats.org/officeDocument/2006/relationships" xmlns:p="http://schemas.openxmlformats.org/presentationml/2006/main">
+  <p:cSld>
+    <p:spTree>
+      <p:nvGrpSpPr>
+        <p:cNvPr id="1" name=""/>
+        <p:cNvGrpSpPr/>
+        <p:nvPr/>
+      </p:nvGrpSpPr>
+      <p:grpSpPr>
+        <a:xfrm>
+          <a:off x="0" y="0"/>
+          <a:ext cx="0" cy="0"/>
+          <a:chOff x="0" y="0"/>
+          <a:chExt cx="0" cy="0"/>
+        </a:xfrm>
+      </p:grpSpPr>
+      <p:sp>
+        <p:nvSpPr>
+          <p:cNvPr id="2" name="Titel 1">
+            <a:extLst>
+              <a:ext uri="{FF2B5EF4-FFF2-40B4-BE49-F238E27FC236}">
+                <a16:creationId xmlns:a16="http://schemas.microsoft.com/office/drawing/2014/main" id="{D921EA28-74D7-33B5-C555-50355A95DB0C}"/>
+              </a:ext>
+            </a:extLst>
+          </p:cNvPr>
+          <p:cNvSpPr>
+            <a:spLocks noGrp="1"/>
+          </p:cNvSpPr>
+          <p:nvPr>
+            <p:ph type="title"/>
+          </p:nvPr>
+        </p:nvSpPr>
+        <p:spPr/>
+        <p:txBody>
+          <a:bodyPr/>
+          <a:lstStyle/>
+          <a:p>
+            <a:r>
+              <a:rPr lang="da-DK" dirty="0" err="1"/>
+              <a:t>Without</a:t>
+            </a:r>
+            <a:r>
+              <a:rPr lang="da-DK" dirty="0"/>
+              <a:t> </a:t>
+            </a:r>
+            <a:r>
+              <a:rPr lang="da-DK" dirty="0" err="1"/>
+              <a:t>schema</a:t>
+            </a:r>
+            <a:r>
+              <a:rPr lang="da-DK" dirty="0"/>
+              <a:t> </a:t>
+            </a:r>
+            <a:r>
+              <a:rPr lang="da-DK" dirty="0" err="1"/>
+              <a:t>registry</a:t>
+            </a:r>
+            <a:endParaRPr lang="en-US" dirty="0"/>
+          </a:p>
+        </p:txBody>
+      </p:sp>
+      <p:pic>
+        <p:nvPicPr>
+          <p:cNvPr id="3" name="Picture 2">
+            <a:extLst>
+              <a:ext uri="{FF2B5EF4-FFF2-40B4-BE49-F238E27FC236}">
+                <a16:creationId xmlns:a16="http://schemas.microsoft.com/office/drawing/2014/main" id="{3ACB651C-4AB1-F4C1-1D3A-67837C80BB16}"/>
+              </a:ext>
+            </a:extLst>
+          </p:cNvPr>
+          <p:cNvPicPr>
+            <a:picLocks noChangeAspect="1" noChangeArrowheads="1"/>
+          </p:cNvPicPr>
+          <p:nvPr/>
+        </p:nvPicPr>
+        <p:blipFill>
+          <a:blip r:embed="rId2">
+            <a:extLst>
+              <a:ext uri="{28A0092B-C50C-407E-A947-70E740481C1C}">
+                <a14:useLocalDpi xmlns:a14="http://schemas.microsoft.com/office/drawing/2010/main" val="0"/>
+              </a:ext>
+            </a:extLst>
+          </a:blip>
+          <a:srcRect/>
+          <a:stretch>
+            <a:fillRect/>
+          </a:stretch>
+        </p:blipFill>
+        <p:spPr bwMode="auto">
+          <a:xfrm>
+            <a:off x="1497466" y="3392225"/>
+            <a:ext cx="6667500" cy="2162175"/>
+          </a:xfrm>
+          <a:prstGeom prst="rect">
+            <a:avLst/>
+          </a:prstGeom>
+          <a:noFill/>
+          <a:extLst>
+            <a:ext uri="{909E8E84-426E-40DD-AFC4-6F175D3DCCD1}">
+              <a14:hiddenFill xmlns:a14="http://schemas.microsoft.com/office/drawing/2010/main">
+                <a:solidFill>
+                  <a:srgbClr val="FFFFFF"/>
+                </a:solidFill>
+              </a14:hiddenFill>
+            </a:ext>
+          </a:extLst>
+        </p:spPr>
+      </p:pic>
+      <p:sp>
+        <p:nvSpPr>
+          <p:cNvPr id="4" name="Tekstfelt 3">
+            <a:extLst>
+              <a:ext uri="{FF2B5EF4-FFF2-40B4-BE49-F238E27FC236}">
+                <a16:creationId xmlns:a16="http://schemas.microsoft.com/office/drawing/2014/main" id="{DE21BE42-C827-4ED1-7504-C25056444344}"/>
+              </a:ext>
+            </a:extLst>
+          </p:cNvPr>
+          <p:cNvSpPr txBox="1"/>
+          <p:nvPr/>
+        </p:nvSpPr>
+        <p:spPr>
+          <a:xfrm>
+            <a:off x="646459" y="1356715"/>
+            <a:ext cx="4776146" cy="954107"/>
+          </a:xfrm>
+          <a:prstGeom prst="rect">
+            <a:avLst/>
+          </a:prstGeom>
+        </p:spPr>
+        <p:style>
+          <a:lnRef idx="1">
+            <a:schemeClr val="dk1"/>
+          </a:lnRef>
+          <a:fillRef idx="2">
+            <a:schemeClr val="dk1"/>
+          </a:fillRef>
+          <a:effectRef idx="1">
+            <a:schemeClr val="dk1"/>
+          </a:effectRef>
+          <a:fontRef idx="minor">
+            <a:schemeClr val="dk1"/>
+          </a:fontRef>
+        </p:style>
+        <p:txBody>
+          <a:bodyPr wrap="square" rtlCol="0">
+            <a:spAutoFit/>
+          </a:bodyPr>
+          <a:lstStyle/>
+          <a:p>
+            <a:pPr marL="285750" indent="-285750">
+              <a:buFont typeface="Arial" panose="020B0604020202020204" pitchFamily="34" charset="0"/>
+              <a:buChar char="•"/>
+            </a:pPr>
+            <a:r>
+              <a:rPr lang="da-DK" dirty="0"/>
+              <a:t>No </a:t>
+            </a:r>
+            <a:r>
+              <a:rPr lang="da-DK" dirty="0" err="1"/>
+              <a:t>validation</a:t>
+            </a:r>
+            <a:r>
+              <a:rPr lang="da-DK" dirty="0"/>
+              <a:t> of input data</a:t>
+            </a:r>
+          </a:p>
+          <a:p>
+            <a:pPr marL="285750" indent="-285750">
+              <a:buFont typeface="Arial" panose="020B0604020202020204" pitchFamily="34" charset="0"/>
+              <a:buChar char="•"/>
+            </a:pPr>
+            <a:r>
+              <a:rPr lang="da-DK" dirty="0"/>
+              <a:t>Producer </a:t>
+            </a:r>
+            <a:r>
+              <a:rPr lang="da-DK" dirty="0" err="1"/>
+              <a:t>can</a:t>
+            </a:r>
+            <a:r>
+              <a:rPr lang="da-DK" dirty="0"/>
+              <a:t> send </a:t>
+            </a:r>
+            <a:r>
+              <a:rPr lang="da-DK" dirty="0" err="1"/>
+              <a:t>poisoned</a:t>
+            </a:r>
+            <a:r>
+              <a:rPr lang="da-DK" dirty="0"/>
+              <a:t> data</a:t>
+            </a:r>
+          </a:p>
+          <a:p>
+            <a:pPr marL="285750" indent="-285750">
+              <a:buFont typeface="Arial" panose="020B0604020202020204" pitchFamily="34" charset="0"/>
+              <a:buChar char="•"/>
+            </a:pPr>
+            <a:r>
+              <a:rPr lang="da-DK" dirty="0"/>
+              <a:t>Consumer </a:t>
+            </a:r>
+            <a:r>
+              <a:rPr lang="da-DK" dirty="0" err="1"/>
+              <a:t>will</a:t>
+            </a:r>
+            <a:r>
+              <a:rPr lang="da-DK" dirty="0"/>
+              <a:t> break </a:t>
+            </a:r>
+            <a:r>
+              <a:rPr lang="da-DK" dirty="0" err="1"/>
+              <a:t>when</a:t>
+            </a:r>
+            <a:r>
+              <a:rPr lang="da-DK" dirty="0"/>
+              <a:t> </a:t>
+            </a:r>
+            <a:r>
+              <a:rPr lang="da-DK" dirty="0" err="1"/>
+              <a:t>consuming</a:t>
+            </a:r>
+            <a:r>
+              <a:rPr lang="da-DK" dirty="0"/>
+              <a:t> </a:t>
+            </a:r>
+            <a:r>
+              <a:rPr lang="da-DK" dirty="0" err="1"/>
+              <a:t>poisoned</a:t>
+            </a:r>
+            <a:r>
+              <a:rPr lang="da-DK" dirty="0"/>
+              <a:t> data</a:t>
+            </a:r>
+          </a:p>
+          <a:p>
+            <a:endParaRPr lang="en-US" dirty="0"/>
+          </a:p>
+        </p:txBody>
+      </p:sp>
+    </p:spTree>
+    <p:extLst>
+      <p:ext uri="{BB962C8B-B14F-4D97-AF65-F5344CB8AC3E}">
+        <p14:creationId xmlns:p14="http://schemas.microsoft.com/office/powerpoint/2010/main" val="2625883798"/>
+      </p:ext>
+    </p:extLst>
+  </p:cSld>
+  <p:clrMapOvr>
+    <a:masterClrMapping/>
+  </p:clrMapOvr>
+</p:sld>
+</file>
+
+<file path=ppt/slides/slide3.xml><?xml version="1.0" encoding="utf-8"?>
+<p:sld xmlns:a="http://schemas.openxmlformats.org/drawingml/2006/main" xmlns:r="http://schemas.openxmlformats.org/officeDocument/2006/relationships" xmlns:p="http://schemas.openxmlformats.org/presentationml/2006/main">
+  <p:cSld>
+    <p:spTree>
+      <p:nvGrpSpPr>
+        <p:cNvPr id="1" name=""/>
+        <p:cNvGrpSpPr/>
+        <p:nvPr/>
+      </p:nvGrpSpPr>
+      <p:grpSpPr>
+        <a:xfrm>
+          <a:off x="0" y="0"/>
+          <a:ext cx="0" cy="0"/>
+          <a:chOff x="0" y="0"/>
+          <a:chExt cx="0" cy="0"/>
+        </a:xfrm>
+      </p:grpSpPr>
+      <p:sp>
+        <p:nvSpPr>
+          <p:cNvPr id="2" name="Titel 1">
+            <a:extLst>
+              <a:ext uri="{FF2B5EF4-FFF2-40B4-BE49-F238E27FC236}">
+                <a16:creationId xmlns:a16="http://schemas.microsoft.com/office/drawing/2014/main" id="{D921EA28-74D7-33B5-C555-50355A95DB0C}"/>
+              </a:ext>
+            </a:extLst>
+          </p:cNvPr>
+          <p:cNvSpPr>
+            <a:spLocks noGrp="1"/>
+          </p:cNvSpPr>
+          <p:nvPr>
+            <p:ph type="title"/>
+          </p:nvPr>
+        </p:nvSpPr>
+        <p:spPr/>
+        <p:txBody>
+          <a:bodyPr/>
+          <a:lstStyle/>
+          <a:p>
+            <a:r>
+              <a:rPr lang="da-DK" dirty="0"/>
+              <a:t>With </a:t>
+            </a:r>
+            <a:r>
+              <a:rPr lang="da-DK" dirty="0" err="1"/>
+              <a:t>schema</a:t>
+            </a:r>
+            <a:r>
+              <a:rPr lang="da-DK" dirty="0"/>
+              <a:t> </a:t>
+            </a:r>
+            <a:r>
+              <a:rPr lang="da-DK" dirty="0" err="1"/>
+              <a:t>registry</a:t>
+            </a:r>
+            <a:endParaRPr lang="en-US" dirty="0"/>
+          </a:p>
+        </p:txBody>
+      </p:sp>
+      <p:pic>
+        <p:nvPicPr>
+          <p:cNvPr id="2050" name="Picture 2">
+            <a:extLst>
+              <a:ext uri="{FF2B5EF4-FFF2-40B4-BE49-F238E27FC236}">
+                <a16:creationId xmlns:a16="http://schemas.microsoft.com/office/drawing/2014/main" id="{8384B039-F901-D00A-5EED-F6AA60FA71C5}"/>
+              </a:ext>
+            </a:extLst>
+          </p:cNvPr>
+          <p:cNvPicPr>
+            <a:picLocks noChangeAspect="1" noChangeArrowheads="1"/>
+          </p:cNvPicPr>
+          <p:nvPr/>
+        </p:nvPicPr>
+        <p:blipFill>
+          <a:blip r:embed="rId2">
+            <a:extLst>
+              <a:ext uri="{28A0092B-C50C-407E-A947-70E740481C1C}">
+                <a14:useLocalDpi xmlns:a14="http://schemas.microsoft.com/office/drawing/2010/main" val="0"/>
+              </a:ext>
+            </a:extLst>
+          </a:blip>
+          <a:srcRect/>
+          <a:stretch>
+            <a:fillRect/>
+          </a:stretch>
+        </p:blipFill>
+        <p:spPr bwMode="auto">
+          <a:xfrm>
+            <a:off x="1983009" y="2831517"/>
+            <a:ext cx="6667500" cy="3457575"/>
+          </a:xfrm>
+          <a:prstGeom prst="rect">
+            <a:avLst/>
+          </a:prstGeom>
+          <a:noFill/>
+          <a:extLst>
+            <a:ext uri="{909E8E84-426E-40DD-AFC4-6F175D3DCCD1}">
+              <a14:hiddenFill xmlns:a14="http://schemas.microsoft.com/office/drawing/2010/main">
+                <a:solidFill>
+                  <a:srgbClr val="FFFFFF"/>
+                </a:solidFill>
+              </a14:hiddenFill>
+            </a:ext>
+          </a:extLst>
+        </p:spPr>
+      </p:pic>
+      <p:sp>
+        <p:nvSpPr>
+          <p:cNvPr id="3" name="Tekstfelt 2">
+            <a:extLst>
+              <a:ext uri="{FF2B5EF4-FFF2-40B4-BE49-F238E27FC236}">
+                <a16:creationId xmlns:a16="http://schemas.microsoft.com/office/drawing/2014/main" id="{5F0F8A9B-C3F9-D438-70F1-EDA6AD8722CB}"/>
+              </a:ext>
+            </a:extLst>
+          </p:cNvPr>
+          <p:cNvSpPr txBox="1"/>
+          <p:nvPr/>
+        </p:nvSpPr>
+        <p:spPr>
+          <a:xfrm rot="1740857">
+            <a:off x="5239383" y="1828844"/>
+            <a:ext cx="4567746" cy="1600438"/>
+          </a:xfrm>
+          <a:prstGeom prst="rect">
+            <a:avLst/>
+          </a:prstGeom>
+        </p:spPr>
+        <p:style>
+          <a:lnRef idx="1">
+            <a:schemeClr val="dk1"/>
+          </a:lnRef>
+          <a:fillRef idx="2">
+            <a:schemeClr val="dk1"/>
+          </a:fillRef>
+          <a:effectRef idx="1">
+            <a:schemeClr val="dk1"/>
+          </a:effectRef>
+          <a:fontRef idx="minor">
+            <a:schemeClr val="dk1"/>
+          </a:fontRef>
+        </p:style>
+        <p:txBody>
+          <a:bodyPr wrap="square" rtlCol="0">
+            <a:spAutoFit/>
+          </a:bodyPr>
+          <a:lstStyle/>
+          <a:p>
+            <a:pPr marL="285750" indent="-285750">
+              <a:buFont typeface="Arial" panose="020B0604020202020204" pitchFamily="34" charset="0"/>
+              <a:buChar char="•"/>
+            </a:pPr>
+            <a:r>
+              <a:rPr lang="da-DK" dirty="0" err="1"/>
+              <a:t>Before</a:t>
+            </a:r>
+            <a:r>
+              <a:rPr lang="da-DK" dirty="0"/>
+              <a:t> </a:t>
+            </a:r>
+            <a:r>
+              <a:rPr lang="da-DK" dirty="0" err="1"/>
+              <a:t>deserialization</a:t>
+            </a:r>
+            <a:r>
+              <a:rPr lang="da-DK" dirty="0"/>
+              <a:t> the </a:t>
+            </a:r>
+            <a:r>
+              <a:rPr lang="da-DK" dirty="0" err="1"/>
+              <a:t>consumer</a:t>
+            </a:r>
+            <a:r>
+              <a:rPr lang="da-DK" dirty="0"/>
+              <a:t> checks </a:t>
+            </a:r>
+            <a:r>
+              <a:rPr lang="da-DK" dirty="0" err="1"/>
+              <a:t>if</a:t>
+            </a:r>
+            <a:r>
+              <a:rPr lang="da-DK" dirty="0"/>
+              <a:t> the </a:t>
+            </a:r>
+            <a:r>
+              <a:rPr lang="da-DK" dirty="0" err="1"/>
+              <a:t>schema</a:t>
+            </a:r>
+            <a:r>
+              <a:rPr lang="da-DK" dirty="0"/>
+              <a:t> </a:t>
+            </a:r>
+            <a:r>
+              <a:rPr lang="da-DK" dirty="0" err="1"/>
+              <a:t>exists</a:t>
+            </a:r>
+            <a:r>
+              <a:rPr lang="da-DK" dirty="0"/>
+              <a:t> in </a:t>
+            </a:r>
+            <a:r>
+              <a:rPr lang="da-DK" dirty="0" err="1"/>
+              <a:t>local</a:t>
+            </a:r>
+            <a:r>
+              <a:rPr lang="da-DK" dirty="0"/>
+              <a:t> cache (by id)</a:t>
+            </a:r>
+          </a:p>
+          <a:p>
+            <a:pPr marL="285750" indent="-285750">
+              <a:buFont typeface="Arial" panose="020B0604020202020204" pitchFamily="34" charset="0"/>
+              <a:buChar char="•"/>
+            </a:pPr>
+            <a:r>
+              <a:rPr lang="da-DK" dirty="0"/>
+              <a:t>If not it </a:t>
+            </a:r>
+            <a:r>
+              <a:rPr lang="da-DK" dirty="0" err="1"/>
+              <a:t>tries</a:t>
+            </a:r>
+            <a:r>
+              <a:rPr lang="da-DK" dirty="0"/>
+              <a:t> to load </a:t>
+            </a:r>
+            <a:r>
+              <a:rPr lang="da-DK" dirty="0" err="1"/>
+              <a:t>if</a:t>
+            </a:r>
+            <a:r>
+              <a:rPr lang="da-DK" dirty="0"/>
+              <a:t> from the </a:t>
+            </a:r>
+            <a:r>
+              <a:rPr lang="da-DK" dirty="0" err="1"/>
+              <a:t>registry</a:t>
+            </a:r>
+            <a:r>
+              <a:rPr lang="da-DK" dirty="0"/>
+              <a:t> and puts it in </a:t>
+            </a:r>
+            <a:r>
+              <a:rPr lang="da-DK" dirty="0" err="1"/>
+              <a:t>local</a:t>
+            </a:r>
+            <a:r>
+              <a:rPr lang="da-DK" dirty="0"/>
+              <a:t> cache. </a:t>
+            </a:r>
+          </a:p>
+          <a:p>
+            <a:pPr marL="285750" indent="-285750">
+              <a:buFont typeface="Arial" panose="020B0604020202020204" pitchFamily="34" charset="0"/>
+              <a:buChar char="•"/>
+            </a:pPr>
+            <a:r>
+              <a:rPr lang="da-DK" dirty="0"/>
+              <a:t>Upon </a:t>
+            </a:r>
+            <a:r>
+              <a:rPr lang="da-DK" dirty="0" err="1"/>
+              <a:t>success</a:t>
+            </a:r>
+            <a:r>
+              <a:rPr lang="da-DK" dirty="0"/>
+              <a:t> the message is </a:t>
+            </a:r>
+            <a:r>
+              <a:rPr lang="da-DK" dirty="0" err="1"/>
+              <a:t>deserialized</a:t>
+            </a:r>
+            <a:endParaRPr lang="da-DK" dirty="0"/>
+          </a:p>
+          <a:p>
+            <a:pPr marL="285750" indent="-285750">
+              <a:buFont typeface="Arial" panose="020B0604020202020204" pitchFamily="34" charset="0"/>
+              <a:buChar char="•"/>
+            </a:pPr>
+            <a:r>
+              <a:rPr lang="da-DK" dirty="0"/>
+              <a:t>The </a:t>
+            </a:r>
+            <a:r>
+              <a:rPr lang="da-DK" dirty="0" err="1"/>
+              <a:t>consumer</a:t>
+            </a:r>
+            <a:r>
+              <a:rPr lang="da-DK" dirty="0"/>
+              <a:t> </a:t>
+            </a:r>
+            <a:r>
+              <a:rPr lang="da-DK" dirty="0" err="1"/>
+              <a:t>need</a:t>
+            </a:r>
+            <a:r>
+              <a:rPr lang="da-DK" dirty="0"/>
+              <a:t> not </a:t>
+            </a:r>
+            <a:r>
+              <a:rPr lang="da-DK" dirty="0" err="1"/>
+              <a:t>know</a:t>
+            </a:r>
+            <a:r>
+              <a:rPr lang="da-DK" dirty="0"/>
+              <a:t> the </a:t>
+            </a:r>
+            <a:r>
+              <a:rPr lang="da-DK" dirty="0" err="1"/>
+              <a:t>schema</a:t>
+            </a:r>
+            <a:r>
+              <a:rPr lang="da-DK" dirty="0"/>
+              <a:t> in </a:t>
+            </a:r>
+            <a:r>
+              <a:rPr lang="da-DK" dirty="0" err="1"/>
+              <a:t>advance</a:t>
+            </a:r>
+            <a:endParaRPr lang="en-US" dirty="0"/>
+          </a:p>
+        </p:txBody>
+      </p:sp>
+      <p:sp>
+        <p:nvSpPr>
+          <p:cNvPr id="5" name="Tekstfelt 4">
+            <a:extLst>
+              <a:ext uri="{FF2B5EF4-FFF2-40B4-BE49-F238E27FC236}">
+                <a16:creationId xmlns:a16="http://schemas.microsoft.com/office/drawing/2014/main" id="{58204637-84F5-C5C4-ACC9-9DC34F79B050}"/>
+              </a:ext>
+            </a:extLst>
+          </p:cNvPr>
+          <p:cNvSpPr txBox="1"/>
+          <p:nvPr/>
+        </p:nvSpPr>
+        <p:spPr>
+          <a:xfrm rot="19553284">
+            <a:off x="127014" y="1781178"/>
+            <a:ext cx="4567746" cy="2031325"/>
+          </a:xfrm>
+          <a:prstGeom prst="rect">
+            <a:avLst/>
+          </a:prstGeom>
+        </p:spPr>
+        <p:style>
+          <a:lnRef idx="1">
+            <a:schemeClr val="dk1"/>
+          </a:lnRef>
+          <a:fillRef idx="2">
+            <a:schemeClr val="dk1"/>
+          </a:fillRef>
+          <a:effectRef idx="1">
+            <a:schemeClr val="dk1"/>
+          </a:effectRef>
+          <a:fontRef idx="minor">
+            <a:schemeClr val="dk1"/>
+          </a:fontRef>
+        </p:style>
+        <p:txBody>
+          <a:bodyPr wrap="square" rtlCol="0">
+            <a:spAutoFit/>
+          </a:bodyPr>
+          <a:lstStyle/>
+          <a:p>
+            <a:pPr marL="285750" indent="-285750">
+              <a:buFont typeface="Arial" panose="020B0604020202020204" pitchFamily="34" charset="0"/>
+              <a:buChar char="•"/>
+            </a:pPr>
+            <a:r>
+              <a:rPr lang="da-DK" dirty="0" err="1"/>
+              <a:t>Before</a:t>
+            </a:r>
+            <a:r>
+              <a:rPr lang="da-DK" dirty="0"/>
+              <a:t> </a:t>
+            </a:r>
+            <a:r>
+              <a:rPr lang="da-DK" dirty="0" err="1"/>
+              <a:t>serialization</a:t>
+            </a:r>
+            <a:r>
+              <a:rPr lang="da-DK" dirty="0"/>
+              <a:t> the </a:t>
+            </a:r>
+            <a:r>
+              <a:rPr lang="da-DK" dirty="0" err="1"/>
+              <a:t>serializer</a:t>
+            </a:r>
+            <a:r>
+              <a:rPr lang="da-DK" dirty="0"/>
+              <a:t> checks </a:t>
+            </a:r>
+            <a:r>
+              <a:rPr lang="da-DK" dirty="0" err="1"/>
+              <a:t>if</a:t>
+            </a:r>
+            <a:r>
+              <a:rPr lang="da-DK" dirty="0"/>
+              <a:t> the </a:t>
+            </a:r>
+            <a:r>
+              <a:rPr lang="da-DK" dirty="0" err="1"/>
+              <a:t>schema</a:t>
+            </a:r>
+            <a:r>
+              <a:rPr lang="da-DK" dirty="0"/>
+              <a:t> </a:t>
+            </a:r>
+            <a:r>
+              <a:rPr lang="da-DK" dirty="0" err="1"/>
+              <a:t>exists</a:t>
+            </a:r>
+            <a:r>
+              <a:rPr lang="da-DK" dirty="0"/>
+              <a:t> in </a:t>
+            </a:r>
+            <a:r>
+              <a:rPr lang="da-DK" dirty="0" err="1"/>
+              <a:t>local</a:t>
+            </a:r>
+            <a:r>
+              <a:rPr lang="da-DK" dirty="0"/>
+              <a:t> cache (</a:t>
+            </a:r>
+            <a:r>
+              <a:rPr lang="da-DK" dirty="0" err="1"/>
+              <a:t>along</a:t>
+            </a:r>
+            <a:r>
+              <a:rPr lang="da-DK" dirty="0"/>
+              <a:t> with an id)</a:t>
+            </a:r>
+          </a:p>
+          <a:p>
+            <a:pPr marL="285750" indent="-285750">
+              <a:buFont typeface="Arial" panose="020B0604020202020204" pitchFamily="34" charset="0"/>
+              <a:buChar char="•"/>
+            </a:pPr>
+            <a:r>
+              <a:rPr lang="da-DK" dirty="0"/>
+              <a:t>If not it </a:t>
+            </a:r>
+            <a:r>
+              <a:rPr lang="da-DK" dirty="0" err="1"/>
+              <a:t>tries</a:t>
+            </a:r>
+            <a:r>
+              <a:rPr lang="da-DK" dirty="0"/>
+              <a:t> to load it from the </a:t>
+            </a:r>
+            <a:r>
+              <a:rPr lang="da-DK" dirty="0" err="1"/>
+              <a:t>registry</a:t>
+            </a:r>
+            <a:r>
+              <a:rPr lang="da-DK" dirty="0"/>
+              <a:t>, and puts it in </a:t>
+            </a:r>
+            <a:r>
+              <a:rPr lang="da-DK" dirty="0" err="1"/>
+              <a:t>local</a:t>
+            </a:r>
+            <a:r>
+              <a:rPr lang="da-DK" dirty="0"/>
+              <a:t> cache. </a:t>
+            </a:r>
+          </a:p>
+          <a:p>
+            <a:pPr marL="285750" indent="-285750">
+              <a:buFont typeface="Arial" panose="020B0604020202020204" pitchFamily="34" charset="0"/>
+              <a:buChar char="•"/>
+            </a:pPr>
+            <a:r>
+              <a:rPr lang="da-DK" dirty="0"/>
+              <a:t>If the </a:t>
+            </a:r>
+            <a:r>
+              <a:rPr lang="da-DK" dirty="0" err="1"/>
+              <a:t>schema</a:t>
+            </a:r>
+            <a:r>
+              <a:rPr lang="da-DK" dirty="0"/>
+              <a:t> is not in the </a:t>
+            </a:r>
+            <a:r>
+              <a:rPr lang="da-DK" dirty="0" err="1"/>
+              <a:t>registry</a:t>
+            </a:r>
+            <a:r>
+              <a:rPr lang="da-DK" dirty="0"/>
+              <a:t>, the </a:t>
+            </a:r>
+            <a:r>
+              <a:rPr lang="da-DK" dirty="0" err="1"/>
+              <a:t>serializer</a:t>
+            </a:r>
+            <a:r>
+              <a:rPr lang="da-DK" dirty="0"/>
+              <a:t> </a:t>
+            </a:r>
+            <a:r>
+              <a:rPr lang="da-DK" dirty="0" err="1"/>
+              <a:t>sends</a:t>
+            </a:r>
+            <a:r>
+              <a:rPr lang="da-DK" dirty="0"/>
+              <a:t> the </a:t>
+            </a:r>
+            <a:r>
+              <a:rPr lang="da-DK" dirty="0" err="1"/>
+              <a:t>schema</a:t>
+            </a:r>
+            <a:r>
+              <a:rPr lang="da-DK" dirty="0"/>
+              <a:t> to the </a:t>
+            </a:r>
+            <a:r>
+              <a:rPr lang="da-DK" dirty="0" err="1"/>
+              <a:t>registry</a:t>
+            </a:r>
+            <a:r>
+              <a:rPr lang="da-DK" dirty="0"/>
+              <a:t> and </a:t>
+            </a:r>
+            <a:r>
+              <a:rPr lang="da-DK" dirty="0" err="1"/>
+              <a:t>gets</a:t>
+            </a:r>
+            <a:r>
+              <a:rPr lang="da-DK" dirty="0"/>
+              <a:t> an id back (</a:t>
+            </a:r>
+            <a:r>
+              <a:rPr lang="da-DK" dirty="0" err="1">
+                <a:latin typeface="Consolas" panose="020B0609020204030204" pitchFamily="49" charset="0"/>
+              </a:rPr>
+              <a:t>auto.register.schemas</a:t>
+            </a:r>
+            <a:r>
+              <a:rPr lang="da-DK" dirty="0"/>
+              <a:t> </a:t>
+            </a:r>
+            <a:r>
+              <a:rPr lang="da-DK" dirty="0" err="1"/>
+              <a:t>turned</a:t>
+            </a:r>
+            <a:r>
+              <a:rPr lang="da-DK" dirty="0"/>
+              <a:t> on)</a:t>
+            </a:r>
+          </a:p>
+          <a:p>
+            <a:pPr marL="285750" indent="-285750">
+              <a:buFont typeface="Arial" panose="020B0604020202020204" pitchFamily="34" charset="0"/>
+              <a:buChar char="•"/>
+            </a:pPr>
+            <a:r>
+              <a:rPr lang="da-DK" dirty="0"/>
+              <a:t>If the </a:t>
+            </a:r>
+            <a:r>
+              <a:rPr lang="da-DK" dirty="0" err="1"/>
+              <a:t>above</a:t>
+            </a:r>
+            <a:r>
+              <a:rPr lang="da-DK" dirty="0"/>
+              <a:t> </a:t>
+            </a:r>
+            <a:r>
+              <a:rPr lang="da-DK" dirty="0" err="1"/>
+              <a:t>fails</a:t>
+            </a:r>
+            <a:r>
+              <a:rPr lang="da-DK" dirty="0"/>
+              <a:t> the </a:t>
+            </a:r>
+            <a:r>
+              <a:rPr lang="da-DK" dirty="0" err="1"/>
+              <a:t>serializer</a:t>
+            </a:r>
+            <a:r>
+              <a:rPr lang="da-DK" dirty="0"/>
+              <a:t> aborts</a:t>
+            </a:r>
+          </a:p>
+          <a:p>
+            <a:endParaRPr lang="en-US" dirty="0"/>
+          </a:p>
+        </p:txBody>
+      </p:sp>
+    </p:spTree>
+    <p:extLst>
+      <p:ext uri="{BB962C8B-B14F-4D97-AF65-F5344CB8AC3E}">
+        <p14:creationId xmlns:p14="http://schemas.microsoft.com/office/powerpoint/2010/main" val="576345979"/>
+      </p:ext>
+    </p:extLst>
+  </p:cSld>
+  <p:clrMapOvr>
+    <a:masterClrMapping/>
+  </p:clrMapOvr>
+</p:sld>
+</file>
+
+<file path=ppt/slides/slide4.xml><?xml version="1.0" encoding="utf-8"?>
+<p:sld xmlns:a="http://schemas.openxmlformats.org/drawingml/2006/main" xmlns:r="http://schemas.openxmlformats.org/officeDocument/2006/relationships" xmlns:p="http://schemas.openxmlformats.org/presentationml/2006/main">
+  <p:cSld>
+    <p:spTree>
+      <p:nvGrpSpPr>
+        <p:cNvPr id="1" name=""/>
+        <p:cNvGrpSpPr/>
+        <p:nvPr/>
+      </p:nvGrpSpPr>
+      <p:grpSpPr>
+        <a:xfrm>
+          <a:off x="0" y="0"/>
+          <a:ext cx="0" cy="0"/>
+          <a:chOff x="0" y="0"/>
+          <a:chExt cx="0" cy="0"/>
+        </a:xfrm>
+      </p:grpSpPr>
+      <p:sp>
+        <p:nvSpPr>
+          <p:cNvPr id="2" name="Titel 1">
+            <a:extLst>
+              <a:ext uri="{FF2B5EF4-FFF2-40B4-BE49-F238E27FC236}">
+                <a16:creationId xmlns:a16="http://schemas.microsoft.com/office/drawing/2014/main" id="{46D53518-2CD0-474C-E35C-1F06C27C3826}"/>
+              </a:ext>
+            </a:extLst>
+          </p:cNvPr>
+          <p:cNvSpPr>
+            <a:spLocks noGrp="1"/>
+          </p:cNvSpPr>
+          <p:nvPr>
+            <p:ph type="title"/>
+          </p:nvPr>
+        </p:nvSpPr>
+        <p:spPr/>
+        <p:txBody>
+          <a:bodyPr/>
+          <a:lstStyle/>
+          <a:p>
+            <a:r>
+              <a:rPr lang="da-DK" dirty="0" err="1"/>
+              <a:t>Protobuf</a:t>
+            </a:r>
+            <a:r>
+              <a:rPr lang="da-DK" dirty="0"/>
+              <a:t> </a:t>
+            </a:r>
+            <a:r>
+              <a:rPr lang="da-DK" dirty="0" err="1"/>
+              <a:t>schema</a:t>
+            </a:r>
+            <a:endParaRPr lang="en-US" dirty="0"/>
+          </a:p>
+        </p:txBody>
+      </p:sp>
+      <p:sp>
+        <p:nvSpPr>
+          <p:cNvPr id="3" name="Pladsholder til tekst 2">
+            <a:extLst>
+              <a:ext uri="{FF2B5EF4-FFF2-40B4-BE49-F238E27FC236}">
+                <a16:creationId xmlns:a16="http://schemas.microsoft.com/office/drawing/2014/main" id="{DC531672-D33C-7E69-4953-3F2AB16C8326}"/>
+              </a:ext>
+            </a:extLst>
+          </p:cNvPr>
+          <p:cNvSpPr>
+            <a:spLocks noGrp="1"/>
+          </p:cNvSpPr>
+          <p:nvPr>
+            <p:ph type="body" idx="1"/>
+          </p:nvPr>
+        </p:nvSpPr>
+        <p:spPr>
+          <a:xfrm>
+            <a:off x="360361" y="1052512"/>
+            <a:ext cx="4590157" cy="3285572"/>
+          </a:xfrm>
+        </p:spPr>
+        <p:style>
+          <a:lnRef idx="1">
+            <a:schemeClr val="dk1"/>
+          </a:lnRef>
+          <a:fillRef idx="2">
+            <a:schemeClr val="dk1"/>
+          </a:fillRef>
+          <a:effectRef idx="1">
+            <a:schemeClr val="dk1"/>
+          </a:effectRef>
+          <a:fontRef idx="minor">
+            <a:schemeClr val="dk1"/>
+          </a:fontRef>
+        </p:style>
+        <p:txBody>
+          <a:bodyPr/>
+          <a:lstStyle/>
+          <a:p>
+            <a:pPr marL="12700" indent="0">
+              <a:buNone/>
+            </a:pPr>
+            <a:r>
+              <a:rPr lang="en-US" sz="1600" dirty="0">
+                <a:latin typeface="Consolas" panose="020B0609020204030204" pitchFamily="49" charset="0"/>
+              </a:rPr>
+              <a:t>syntax = "proto3";</a:t>
+            </a:r>
+          </a:p>
+          <a:p>
+            <a:endParaRPr lang="en-US" sz="1600" dirty="0">
+              <a:latin typeface="Consolas" panose="020B0609020204030204" pitchFamily="49" charset="0"/>
+            </a:endParaRPr>
+          </a:p>
+          <a:p>
+            <a:pPr marL="12700" indent="0">
+              <a:buNone/>
+            </a:pPr>
+            <a:r>
+              <a:rPr lang="en-US" sz="1600" dirty="0">
+                <a:latin typeface="Consolas" panose="020B0609020204030204" pitchFamily="49" charset="0"/>
+              </a:rPr>
+              <a:t>option </a:t>
+            </a:r>
+            <a:r>
+              <a:rPr lang="en-US" sz="1600" dirty="0" err="1">
+                <a:latin typeface="Consolas" panose="020B0609020204030204" pitchFamily="49" charset="0"/>
+              </a:rPr>
+              <a:t>java_package</a:t>
+            </a:r>
+            <a:r>
+              <a:rPr lang="en-US" sz="1600" dirty="0">
+                <a:latin typeface="Consolas" panose="020B0609020204030204" pitchFamily="49" charset="0"/>
+              </a:rPr>
+              <a:t> = "</a:t>
+            </a:r>
+            <a:r>
+              <a:rPr lang="en-US" sz="1600" dirty="0" err="1">
+                <a:latin typeface="Consolas" panose="020B0609020204030204" pitchFamily="49" charset="0"/>
+              </a:rPr>
+              <a:t>com.example.tutorial.protos</a:t>
+            </a:r>
+            <a:r>
+              <a:rPr lang="en-US" sz="1600" dirty="0">
+                <a:latin typeface="Consolas" panose="020B0609020204030204" pitchFamily="49" charset="0"/>
+              </a:rPr>
+              <a:t>";</a:t>
+            </a:r>
+          </a:p>
+          <a:p>
+            <a:pPr marL="12700" indent="0">
+              <a:buNone/>
+            </a:pPr>
+            <a:endParaRPr lang="en-US" sz="1600" dirty="0">
+              <a:latin typeface="Consolas" panose="020B0609020204030204" pitchFamily="49" charset="0"/>
+            </a:endParaRPr>
+          </a:p>
+          <a:p>
+            <a:pPr marL="12700" indent="0">
+              <a:buNone/>
+            </a:pPr>
+            <a:r>
+              <a:rPr lang="en-US" sz="1600" dirty="0">
+                <a:latin typeface="Consolas" panose="020B0609020204030204" pitchFamily="49" charset="0"/>
+              </a:rPr>
+              <a:t>message </a:t>
+            </a:r>
+            <a:r>
+              <a:rPr lang="en-US" sz="1600" dirty="0" err="1">
+                <a:latin typeface="Consolas" panose="020B0609020204030204" pitchFamily="49" charset="0"/>
+              </a:rPr>
+              <a:t>SimpleMessage</a:t>
+            </a:r>
+            <a:r>
+              <a:rPr lang="en-US" sz="1600" dirty="0">
+                <a:latin typeface="Consolas" panose="020B0609020204030204" pitchFamily="49" charset="0"/>
+              </a:rPr>
+              <a:t> {</a:t>
+            </a:r>
+          </a:p>
+          <a:p>
+            <a:pPr marL="12700" indent="0">
+              <a:buNone/>
+            </a:pPr>
+            <a:r>
+              <a:rPr lang="en-US" sz="1600" dirty="0">
+                <a:latin typeface="Consolas" panose="020B0609020204030204" pitchFamily="49" charset="0"/>
+              </a:rPr>
+              <a:t>	string content = 1;</a:t>
+            </a:r>
+          </a:p>
+          <a:p>
+            <a:pPr marL="12700" indent="0">
+              <a:buNone/>
+            </a:pPr>
+            <a:r>
+              <a:rPr lang="en-US" sz="1600" dirty="0">
+                <a:latin typeface="Consolas" panose="020B0609020204030204" pitchFamily="49" charset="0"/>
+              </a:rPr>
+              <a:t>	string </a:t>
+            </a:r>
+            <a:r>
+              <a:rPr lang="en-US" sz="1600" dirty="0" err="1">
+                <a:latin typeface="Consolas" panose="020B0609020204030204" pitchFamily="49" charset="0"/>
+              </a:rPr>
+              <a:t>date_time</a:t>
+            </a:r>
+            <a:r>
+              <a:rPr lang="en-US" sz="1600" dirty="0">
+                <a:latin typeface="Consolas" panose="020B0609020204030204" pitchFamily="49" charset="0"/>
+              </a:rPr>
+              <a:t> = 2;</a:t>
+            </a:r>
+          </a:p>
+          <a:p>
+            <a:pPr marL="12700" indent="0">
+              <a:buNone/>
+            </a:pPr>
+            <a:r>
+              <a:rPr lang="en-US" sz="1600" dirty="0">
+                <a:latin typeface="Consolas" panose="020B0609020204030204" pitchFamily="49" charset="0"/>
+              </a:rPr>
+              <a:t>}</a:t>
+            </a:r>
+          </a:p>
+        </p:txBody>
+      </p:sp>
+      <p:sp>
+        <p:nvSpPr>
+          <p:cNvPr id="4" name="Pladsholder til tekst 2">
+            <a:extLst>
+              <a:ext uri="{FF2B5EF4-FFF2-40B4-BE49-F238E27FC236}">
+                <a16:creationId xmlns:a16="http://schemas.microsoft.com/office/drawing/2014/main" id="{1B8446E8-F0C7-3440-78BB-C463D9A521A0}"/>
+              </a:ext>
+            </a:extLst>
+          </p:cNvPr>
+          <p:cNvSpPr txBox="1">
+            <a:spLocks/>
+          </p:cNvSpPr>
+          <p:nvPr/>
+        </p:nvSpPr>
+        <p:spPr>
+          <a:xfrm>
+            <a:off x="5242124" y="1986815"/>
+            <a:ext cx="4360494" cy="3996536"/>
+          </a:xfrm>
+          <a:prstGeom prst="rect">
+            <a:avLst/>
+          </a:prstGeom>
+        </p:spPr>
+        <p:style>
+          <a:lnRef idx="1">
+            <a:schemeClr val="dk1"/>
+          </a:lnRef>
+          <a:fillRef idx="2">
+            <a:schemeClr val="dk1"/>
+          </a:fillRef>
+          <a:effectRef idx="1">
+            <a:schemeClr val="dk1"/>
+          </a:effectRef>
+          <a:fontRef idx="minor">
+            <a:schemeClr val="dk1"/>
+          </a:fontRef>
+        </p:style>
+        <p:txBody>
+          <a:bodyPr spcFirstLastPara="1" wrap="square" lIns="91425" tIns="91425" rIns="91425" bIns="91425" anchor="t" anchorCtr="0">
+            <a:noAutofit/>
+          </a:bodyPr>
+          <a:lstStyle>
+            <a:defPPr marR="0" lvl="0" algn="l" rtl="0">
+              <a:lnSpc>
+                <a:spcPct val="100000"/>
+              </a:lnSpc>
+              <a:spcBef>
+                <a:spcPts val="0"/>
+              </a:spcBef>
+              <a:spcAft>
+                <a:spcPts val="0"/>
+              </a:spcAft>
+            </a:defPPr>
+            <a:lvl1pPr marL="457200" marR="0" lvl="0" indent="-444500" algn="l" rtl="0">
+              <a:lnSpc>
+                <a:spcPct val="100000"/>
+              </a:lnSpc>
+              <a:spcBef>
+                <a:spcPts val="680"/>
+              </a:spcBef>
+              <a:spcAft>
+                <a:spcPts val="0"/>
+              </a:spcAft>
+              <a:buClr>
+                <a:schemeClr val="dk1"/>
+              </a:buClr>
+              <a:buSzPts val="3400"/>
+              <a:buFont typeface="Arial"/>
+              <a:buChar char="•"/>
+              <a:defRPr sz="3400" b="0" i="0" u="none" strike="noStrike" cap="none">
+                <a:solidFill>
+                  <a:schemeClr val="dk1"/>
+                </a:solidFill>
+                <a:latin typeface="Arial"/>
+                <a:ea typeface="Arial"/>
+                <a:cs typeface="Arial"/>
+                <a:sym typeface="Arial"/>
+              </a:defRPr>
+            </a:lvl1pPr>
+            <a:lvl2pPr marL="914400" marR="0" lvl="1" indent="-419100" algn="l" rtl="0">
+              <a:lnSpc>
+                <a:spcPct val="100000"/>
+              </a:lnSpc>
+              <a:spcBef>
+                <a:spcPts val="600"/>
+              </a:spcBef>
+              <a:spcAft>
+                <a:spcPts val="0"/>
+              </a:spcAft>
+              <a:buClr>
+                <a:schemeClr val="dk1"/>
+              </a:buClr>
+              <a:buSzPts val="3000"/>
+              <a:buFont typeface="Arial"/>
+              <a:buChar char="–"/>
+              <a:defRPr sz="3000" b="0" i="0" u="none" strike="noStrike" cap="none">
+                <a:solidFill>
+                  <a:schemeClr val="dk1"/>
+                </a:solidFill>
+                <a:latin typeface="Arial"/>
+                <a:ea typeface="Arial"/>
+                <a:cs typeface="Arial"/>
+                <a:sym typeface="Arial"/>
+              </a:defRPr>
+            </a:lvl2pPr>
+            <a:lvl3pPr marL="1371600" marR="0" lvl="2" indent="-387350" algn="l" rtl="0">
+              <a:lnSpc>
+                <a:spcPct val="100000"/>
+              </a:lnSpc>
+              <a:spcBef>
+                <a:spcPts val="500"/>
+              </a:spcBef>
+              <a:spcAft>
+                <a:spcPts val="0"/>
+              </a:spcAft>
+              <a:buClr>
+                <a:schemeClr val="dk1"/>
+              </a:buClr>
+              <a:buSzPts val="2500"/>
+              <a:buFont typeface="Arial"/>
+              <a:buChar char="•"/>
+              <a:defRPr sz="2500" b="0" i="0" u="none" strike="noStrike" cap="none">
+                <a:solidFill>
+                  <a:schemeClr val="dk1"/>
+                </a:solidFill>
+                <a:latin typeface="Arial"/>
+                <a:ea typeface="Arial"/>
+                <a:cs typeface="Arial"/>
+                <a:sym typeface="Arial"/>
+              </a:defRPr>
+            </a:lvl3pPr>
+            <a:lvl4pPr marL="1828800" marR="0" lvl="3" indent="-361950" algn="l" rtl="0">
+              <a:lnSpc>
+                <a:spcPct val="100000"/>
+              </a:lnSpc>
+              <a:spcBef>
+                <a:spcPts val="420"/>
+              </a:spcBef>
+              <a:spcAft>
+                <a:spcPts val="0"/>
+              </a:spcAft>
+              <a:buClr>
+                <a:schemeClr val="dk1"/>
+              </a:buClr>
+              <a:buSzPts val="2100"/>
+              <a:buFont typeface="Arial"/>
+              <a:buChar char="–"/>
+              <a:defRPr sz="2100" b="0" i="0" u="none" strike="noStrike" cap="none">
+                <a:solidFill>
+                  <a:schemeClr val="dk1"/>
+                </a:solidFill>
+                <a:latin typeface="Arial"/>
+                <a:ea typeface="Arial"/>
+                <a:cs typeface="Arial"/>
+                <a:sym typeface="Arial"/>
+              </a:defRPr>
+            </a:lvl4pPr>
+            <a:lvl5pPr marL="2286000" marR="0" lvl="4" indent="-361950" algn="l" rtl="0">
+              <a:lnSpc>
+                <a:spcPct val="100000"/>
+              </a:lnSpc>
+              <a:spcBef>
+                <a:spcPts val="420"/>
+              </a:spcBef>
+              <a:spcAft>
+                <a:spcPts val="0"/>
+              </a:spcAft>
+              <a:buClr>
+                <a:schemeClr val="dk1"/>
+              </a:buClr>
+              <a:buSzPts val="2100"/>
+              <a:buFont typeface="Arial"/>
+              <a:buChar char="»"/>
+              <a:defRPr sz="2100" b="0" i="0" u="none" strike="noStrike" cap="none">
+                <a:solidFill>
+                  <a:schemeClr val="dk1"/>
+                </a:solidFill>
+                <a:latin typeface="Arial"/>
+                <a:ea typeface="Arial"/>
+                <a:cs typeface="Arial"/>
+                <a:sym typeface="Arial"/>
+              </a:defRPr>
+            </a:lvl5pPr>
+            <a:lvl6pPr marL="2743200" marR="0" lvl="5" indent="-361950" algn="l" rtl="0">
+              <a:lnSpc>
+                <a:spcPct val="100000"/>
+              </a:lnSpc>
+              <a:spcBef>
+                <a:spcPts val="420"/>
+              </a:spcBef>
+              <a:spcAft>
+                <a:spcPts val="0"/>
+              </a:spcAft>
+              <a:buClr>
+                <a:schemeClr val="dk1"/>
+              </a:buClr>
+              <a:buSzPts val="2100"/>
+              <a:buFont typeface="Times New Roman"/>
+              <a:buChar char="»"/>
+              <a:defRPr sz="2100" b="0" i="0" u="none" strike="noStrike" cap="none">
+                <a:solidFill>
+                  <a:schemeClr val="dk1"/>
+                </a:solidFill>
+                <a:latin typeface="Times New Roman"/>
+                <a:ea typeface="Times New Roman"/>
+                <a:cs typeface="Times New Roman"/>
+                <a:sym typeface="Times New Roman"/>
+              </a:defRPr>
+            </a:lvl6pPr>
+            <a:lvl7pPr marL="3200400" marR="0" lvl="6" indent="-361950" algn="l" rtl="0">
+              <a:lnSpc>
+                <a:spcPct val="100000"/>
+              </a:lnSpc>
+              <a:spcBef>
+                <a:spcPts val="420"/>
+              </a:spcBef>
+              <a:spcAft>
+                <a:spcPts val="0"/>
+              </a:spcAft>
+              <a:buClr>
+                <a:schemeClr val="dk1"/>
+              </a:buClr>
+              <a:buSzPts val="2100"/>
+              <a:buFont typeface="Times New Roman"/>
+              <a:buChar char="»"/>
+              <a:defRPr sz="2100" b="0" i="0" u="none" strike="noStrike" cap="none">
+                <a:solidFill>
+                  <a:schemeClr val="dk1"/>
+                </a:solidFill>
+                <a:latin typeface="Times New Roman"/>
+                <a:ea typeface="Times New Roman"/>
+                <a:cs typeface="Times New Roman"/>
+                <a:sym typeface="Times New Roman"/>
+              </a:defRPr>
+            </a:lvl7pPr>
+            <a:lvl8pPr marL="3657600" marR="0" lvl="7" indent="-361950" algn="l" rtl="0">
+              <a:lnSpc>
+                <a:spcPct val="100000"/>
+              </a:lnSpc>
+              <a:spcBef>
+                <a:spcPts val="420"/>
+              </a:spcBef>
+              <a:spcAft>
+                <a:spcPts val="0"/>
+              </a:spcAft>
+              <a:buClr>
+                <a:schemeClr val="dk1"/>
+              </a:buClr>
+              <a:buSzPts val="2100"/>
+              <a:buFont typeface="Times New Roman"/>
+              <a:buChar char="»"/>
+              <a:defRPr sz="2100" b="0" i="0" u="none" strike="noStrike" cap="none">
+                <a:solidFill>
+                  <a:schemeClr val="dk1"/>
+                </a:solidFill>
+                <a:latin typeface="Times New Roman"/>
+                <a:ea typeface="Times New Roman"/>
+                <a:cs typeface="Times New Roman"/>
+                <a:sym typeface="Times New Roman"/>
+              </a:defRPr>
+            </a:lvl8pPr>
+            <a:lvl9pPr marL="4114800" marR="0" lvl="8" indent="-361950" algn="l" rtl="0">
+              <a:lnSpc>
+                <a:spcPct val="100000"/>
+              </a:lnSpc>
+              <a:spcBef>
+                <a:spcPts val="420"/>
+              </a:spcBef>
+              <a:spcAft>
+                <a:spcPts val="0"/>
+              </a:spcAft>
+              <a:buClr>
+                <a:schemeClr val="dk1"/>
+              </a:buClr>
+              <a:buSzPts val="2100"/>
+              <a:buFont typeface="Times New Roman"/>
+              <a:buChar char="»"/>
+              <a:defRPr sz="2100" b="0" i="0" u="none" strike="noStrike" cap="none">
+                <a:solidFill>
+                  <a:schemeClr val="dk1"/>
+                </a:solidFill>
+                <a:latin typeface="Times New Roman"/>
+                <a:ea typeface="Times New Roman"/>
+                <a:cs typeface="Times New Roman"/>
+                <a:sym typeface="Times New Roman"/>
+              </a:defRPr>
+            </a:lvl9pPr>
+          </a:lstStyle>
+          <a:p>
+            <a:pPr marL="12700" indent="0">
+              <a:buFont typeface="Arial"/>
+              <a:buNone/>
+            </a:pPr>
+            <a:r>
+              <a:rPr lang="en-US" sz="1600" dirty="0">
+                <a:latin typeface="Consolas" panose="020B0609020204030204" pitchFamily="49" charset="0"/>
+              </a:rPr>
+              <a:t>message Order {</a:t>
+            </a:r>
+          </a:p>
+          <a:p>
+            <a:pPr marL="12700" indent="0">
+              <a:buFont typeface="Arial"/>
+              <a:buNone/>
+            </a:pPr>
+            <a:r>
+              <a:rPr lang="en-US" sz="1600" dirty="0">
+                <a:latin typeface="Consolas" panose="020B0609020204030204" pitchFamily="49" charset="0"/>
+              </a:rPr>
+              <a:t>	int64 </a:t>
+            </a:r>
+            <a:r>
+              <a:rPr lang="en-US" sz="1600" dirty="0" err="1">
+                <a:latin typeface="Consolas" panose="020B0609020204030204" pitchFamily="49" charset="0"/>
+              </a:rPr>
+              <a:t>order_id</a:t>
+            </a:r>
+            <a:r>
+              <a:rPr lang="en-US" sz="1600" dirty="0">
+                <a:latin typeface="Consolas" panose="020B0609020204030204" pitchFamily="49" charset="0"/>
+              </a:rPr>
+              <a:t> = 1;</a:t>
+            </a:r>
+          </a:p>
+          <a:p>
+            <a:pPr marL="12700" indent="0">
+              <a:buFont typeface="Arial"/>
+              <a:buNone/>
+            </a:pPr>
+            <a:r>
+              <a:rPr lang="en-US" sz="1600" dirty="0">
+                <a:latin typeface="Consolas" panose="020B0609020204030204" pitchFamily="49" charset="0"/>
+              </a:rPr>
+              <a:t>	int64 </a:t>
+            </a:r>
+            <a:r>
+              <a:rPr lang="en-US" sz="1600" dirty="0" err="1">
+                <a:latin typeface="Consolas" panose="020B0609020204030204" pitchFamily="49" charset="0"/>
+              </a:rPr>
+              <a:t>date_time</a:t>
+            </a:r>
+            <a:r>
+              <a:rPr lang="en-US" sz="1600" dirty="0">
+                <a:latin typeface="Consolas" panose="020B0609020204030204" pitchFamily="49" charset="0"/>
+              </a:rPr>
+              <a:t> = 2;</a:t>
+            </a:r>
+          </a:p>
+          <a:p>
+            <a:pPr marL="12700" indent="0">
+              <a:buFont typeface="Arial"/>
+              <a:buNone/>
+            </a:pPr>
+            <a:r>
+              <a:rPr lang="en-US" sz="1600" dirty="0">
+                <a:latin typeface="Consolas" panose="020B0609020204030204" pitchFamily="49" charset="0"/>
+              </a:rPr>
+              <a:t>	repeated Product </a:t>
+            </a:r>
+            <a:r>
+              <a:rPr lang="en-US" sz="1600" dirty="0" err="1">
+                <a:latin typeface="Consolas" panose="020B0609020204030204" pitchFamily="49" charset="0"/>
+              </a:rPr>
+              <a:t>product</a:t>
+            </a:r>
+            <a:r>
+              <a:rPr lang="en-US" sz="1600" dirty="0">
+                <a:latin typeface="Consolas" panose="020B0609020204030204" pitchFamily="49" charset="0"/>
+              </a:rPr>
+              <a:t> = 3;</a:t>
+            </a:r>
+          </a:p>
+          <a:p>
+            <a:pPr marL="12700" indent="0">
+              <a:buFont typeface="Arial"/>
+              <a:buNone/>
+            </a:pPr>
+            <a:r>
+              <a:rPr lang="en-US" sz="1600" dirty="0">
+                <a:latin typeface="Consolas" panose="020B0609020204030204" pitchFamily="49" charset="0"/>
+              </a:rPr>
+              <a:t>}</a:t>
+            </a:r>
+          </a:p>
+          <a:p>
+            <a:pPr marL="12700" indent="0">
+              <a:buFont typeface="Arial"/>
+              <a:buNone/>
+            </a:pPr>
+            <a:endParaRPr lang="en-US" sz="1600" dirty="0">
+              <a:latin typeface="Consolas" panose="020B0609020204030204" pitchFamily="49" charset="0"/>
+            </a:endParaRPr>
+          </a:p>
+          <a:p>
+            <a:pPr marL="12700" indent="0">
+              <a:buFont typeface="Arial"/>
+              <a:buNone/>
+            </a:pPr>
+            <a:r>
+              <a:rPr lang="en-US" sz="1600" dirty="0">
+                <a:latin typeface="Consolas" panose="020B0609020204030204" pitchFamily="49" charset="0"/>
+              </a:rPr>
+              <a:t>message Product {</a:t>
+            </a:r>
+          </a:p>
+          <a:p>
+            <a:pPr marL="12700" indent="0">
+              <a:buFont typeface="Arial"/>
+              <a:buNone/>
+            </a:pPr>
+            <a:r>
+              <a:rPr lang="en-US" sz="1600" dirty="0">
+                <a:latin typeface="Consolas" panose="020B0609020204030204" pitchFamily="49" charset="0"/>
+              </a:rPr>
+              <a:t>	int32 </a:t>
+            </a:r>
+            <a:r>
+              <a:rPr lang="en-US" sz="1600" dirty="0" err="1">
+                <a:latin typeface="Consolas" panose="020B0609020204030204" pitchFamily="49" charset="0"/>
+              </a:rPr>
+              <a:t>product_id</a:t>
+            </a:r>
+            <a:r>
+              <a:rPr lang="en-US" sz="1600" dirty="0">
+                <a:latin typeface="Consolas" panose="020B0609020204030204" pitchFamily="49" charset="0"/>
+              </a:rPr>
+              <a:t> = 1;</a:t>
+            </a:r>
+          </a:p>
+          <a:p>
+            <a:pPr marL="12700" indent="0">
+              <a:buFont typeface="Arial"/>
+              <a:buNone/>
+            </a:pPr>
+            <a:r>
+              <a:rPr lang="en-US" sz="1600" dirty="0">
+                <a:latin typeface="Consolas" panose="020B0609020204030204" pitchFamily="49" charset="0"/>
+              </a:rPr>
+              <a:t>	string name = 2;</a:t>
+            </a:r>
+          </a:p>
+          <a:p>
+            <a:pPr marL="12700" indent="0">
+              <a:buFont typeface="Arial"/>
+              <a:buNone/>
+            </a:pPr>
+            <a:r>
+              <a:rPr lang="en-US" sz="1600" dirty="0">
+                <a:latin typeface="Consolas" panose="020B0609020204030204" pitchFamily="49" charset="0"/>
+              </a:rPr>
+              <a:t>	string description = 3;</a:t>
+            </a:r>
+          </a:p>
+          <a:p>
+            <a:pPr marL="12700" indent="0">
+              <a:buFont typeface="Arial"/>
+              <a:buNone/>
+            </a:pPr>
+            <a:r>
+              <a:rPr lang="en-US" sz="1600" dirty="0">
+                <a:latin typeface="Consolas" panose="020B0609020204030204" pitchFamily="49" charset="0"/>
+              </a:rPr>
+              <a:t>}</a:t>
+            </a:r>
+          </a:p>
+        </p:txBody>
+      </p:sp>
+      <p:sp>
+        <p:nvSpPr>
+          <p:cNvPr id="7" name="Pil: højre 6">
+            <a:extLst>
+              <a:ext uri="{FF2B5EF4-FFF2-40B4-BE49-F238E27FC236}">
+                <a16:creationId xmlns:a16="http://schemas.microsoft.com/office/drawing/2014/main" id="{41B786A8-8542-9773-71B0-E8BFB29C46EE}"/>
+              </a:ext>
+            </a:extLst>
+          </p:cNvPr>
+          <p:cNvSpPr/>
+          <p:nvPr/>
+        </p:nvSpPr>
+        <p:spPr>
+          <a:xfrm rot="20313559">
+            <a:off x="3142984" y="5083328"/>
+            <a:ext cx="2594556" cy="484632"/>
+          </a:xfrm>
+          <a:prstGeom prst="rightArrow">
+            <a:avLst/>
+          </a:prstGeom>
+        </p:spPr>
+        <p:style>
+          <a:lnRef idx="2">
+            <a:schemeClr val="accent1">
+              <a:shade val="15000"/>
+            </a:schemeClr>
+          </a:lnRef>
+          <a:fillRef idx="1">
+            <a:schemeClr val="accent1"/>
+          </a:fillRef>
+          <a:effectRef idx="0">
+            <a:schemeClr val="accent1"/>
+          </a:effectRef>
+          <a:fontRef idx="minor">
+            <a:schemeClr val="lt1"/>
+          </a:fontRef>
+        </p:style>
+        <p:txBody>
+          <a:bodyPr rtlCol="0" anchor="ctr"/>
+          <a:lstStyle/>
+          <a:p>
+            <a:pPr algn="ctr"/>
+            <a:r>
+              <a:rPr lang="da-DK" dirty="0"/>
+              <a:t>More </a:t>
+            </a:r>
+            <a:r>
+              <a:rPr lang="da-DK" dirty="0" err="1"/>
+              <a:t>complex</a:t>
+            </a:r>
+            <a:r>
+              <a:rPr lang="da-DK" dirty="0"/>
+              <a:t> datatypes</a:t>
+            </a:r>
+            <a:endParaRPr lang="en-US" dirty="0"/>
+          </a:p>
+        </p:txBody>
+      </p:sp>
+    </p:spTree>
+    <p:extLst>
+      <p:ext uri="{BB962C8B-B14F-4D97-AF65-F5344CB8AC3E}">
+        <p14:creationId xmlns:p14="http://schemas.microsoft.com/office/powerpoint/2010/main" val="1811524064"/>
+      </p:ext>
+    </p:extLst>
+  </p:cSld>
+  <p:clrMapOvr>
+    <a:masterClrMapping/>
+  </p:clrMapOvr>
+</p:sld>
+</file>
+
+<file path=ppt/slides/slide5.xml><?xml version="1.0" encoding="utf-8"?>
+<p:sld xmlns:a="http://schemas.openxmlformats.org/drawingml/2006/main" xmlns:r="http://schemas.openxmlformats.org/officeDocument/2006/relationships" xmlns:p="http://schemas.openxmlformats.org/presentationml/2006/main">
+  <p:cSld>
+    <p:spTree>
+      <p:nvGrpSpPr>
+        <p:cNvPr id="1" name=""/>
+        <p:cNvGrpSpPr/>
+        <p:nvPr/>
+      </p:nvGrpSpPr>
+      <p:grpSpPr>
+        <a:xfrm>
+          <a:off x="0" y="0"/>
+          <a:ext cx="0" cy="0"/>
+          <a:chOff x="0" y="0"/>
+          <a:chExt cx="0" cy="0"/>
+        </a:xfrm>
+      </p:grpSpPr>
+      <p:sp>
+        <p:nvSpPr>
+          <p:cNvPr id="2" name="Titel 1">
+            <a:extLst>
+              <a:ext uri="{FF2B5EF4-FFF2-40B4-BE49-F238E27FC236}">
+                <a16:creationId xmlns:a16="http://schemas.microsoft.com/office/drawing/2014/main" id="{46D53518-2CD0-474C-E35C-1F06C27C3826}"/>
+              </a:ext>
+            </a:extLst>
+          </p:cNvPr>
+          <p:cNvSpPr>
+            <a:spLocks noGrp="1"/>
+          </p:cNvSpPr>
+          <p:nvPr>
+            <p:ph type="title"/>
+          </p:nvPr>
+        </p:nvSpPr>
+        <p:spPr/>
+        <p:txBody>
+          <a:bodyPr/>
+          <a:lstStyle/>
+          <a:p>
+            <a:r>
+              <a:rPr lang="da-DK" dirty="0" err="1"/>
+              <a:t>Generating</a:t>
+            </a:r>
+            <a:r>
+              <a:rPr lang="da-DK" dirty="0"/>
+              <a:t> </a:t>
+            </a:r>
+            <a:r>
+              <a:rPr lang="da-DK" dirty="0" err="1"/>
+              <a:t>code</a:t>
+            </a:r>
+            <a:r>
+              <a:rPr lang="da-DK" dirty="0"/>
+              <a:t> in </a:t>
+            </a:r>
+            <a:r>
+              <a:rPr lang="da-DK" dirty="0" err="1"/>
+              <a:t>java</a:t>
+            </a:r>
+            <a:endParaRPr lang="en-US" dirty="0"/>
+          </a:p>
+        </p:txBody>
+      </p:sp>
+      <p:sp>
+        <p:nvSpPr>
+          <p:cNvPr id="3" name="Pladsholder til tekst 2">
+            <a:extLst>
+              <a:ext uri="{FF2B5EF4-FFF2-40B4-BE49-F238E27FC236}">
+                <a16:creationId xmlns:a16="http://schemas.microsoft.com/office/drawing/2014/main" id="{DC531672-D33C-7E69-4953-3F2AB16C8326}"/>
+              </a:ext>
+            </a:extLst>
+          </p:cNvPr>
+          <p:cNvSpPr>
+            <a:spLocks noGrp="1"/>
+          </p:cNvSpPr>
+          <p:nvPr>
+            <p:ph type="body" idx="1"/>
+          </p:nvPr>
+        </p:nvSpPr>
+        <p:spPr>
+          <a:xfrm>
+            <a:off x="6208268" y="2039213"/>
+            <a:ext cx="3016539" cy="1716207"/>
+          </a:xfrm>
+        </p:spPr>
+        <p:style>
+          <a:lnRef idx="1">
+            <a:schemeClr val="dk1"/>
+          </a:lnRef>
+          <a:fillRef idx="2">
+            <a:schemeClr val="dk1"/>
+          </a:fillRef>
+          <a:effectRef idx="1">
+            <a:schemeClr val="dk1"/>
+          </a:effectRef>
+          <a:fontRef idx="minor">
+            <a:schemeClr val="dk1"/>
+          </a:fontRef>
+        </p:style>
+        <p:txBody>
+          <a:bodyPr/>
+          <a:lstStyle/>
+          <a:p>
+            <a:pPr marL="12700" indent="0">
+              <a:buNone/>
+            </a:pPr>
+            <a:r>
+              <a:rPr lang="en-US" sz="800" dirty="0">
+                <a:latin typeface="Consolas" panose="020B0609020204030204" pitchFamily="49" charset="0"/>
+              </a:rPr>
+              <a:t>&lt;dependencies&gt;</a:t>
+            </a:r>
+          </a:p>
+          <a:p>
+            <a:pPr marL="12700" indent="0">
+              <a:buNone/>
+            </a:pPr>
+            <a:r>
+              <a:rPr lang="en-US" sz="800" dirty="0">
+                <a:latin typeface="Consolas" panose="020B0609020204030204" pitchFamily="49" charset="0"/>
+              </a:rPr>
+              <a:t>   &lt;dependency&gt;</a:t>
+            </a:r>
+          </a:p>
+          <a:p>
+            <a:pPr marL="12700" indent="0">
+              <a:buNone/>
+            </a:pPr>
+            <a:r>
+              <a:rPr lang="en-US" sz="800" dirty="0">
+                <a:latin typeface="Consolas" panose="020B0609020204030204" pitchFamily="49" charset="0"/>
+              </a:rPr>
+              <a:t>      &lt;</a:t>
+            </a:r>
+            <a:r>
+              <a:rPr lang="en-US" sz="800" dirty="0" err="1">
+                <a:latin typeface="Consolas" panose="020B0609020204030204" pitchFamily="49" charset="0"/>
+              </a:rPr>
+              <a:t>groupId</a:t>
+            </a:r>
+            <a:r>
+              <a:rPr lang="en-US" sz="800" dirty="0">
+                <a:latin typeface="Consolas" panose="020B0609020204030204" pitchFamily="49" charset="0"/>
+              </a:rPr>
+              <a:t>&gt;</a:t>
+            </a:r>
+            <a:r>
+              <a:rPr lang="en-US" sz="800" dirty="0" err="1">
+                <a:latin typeface="Consolas" panose="020B0609020204030204" pitchFamily="49" charset="0"/>
+              </a:rPr>
+              <a:t>com.google.protobuf</a:t>
+            </a:r>
+            <a:r>
+              <a:rPr lang="en-US" sz="800" dirty="0">
+                <a:latin typeface="Consolas" panose="020B0609020204030204" pitchFamily="49" charset="0"/>
+              </a:rPr>
+              <a:t>&lt;/</a:t>
+            </a:r>
+            <a:r>
+              <a:rPr lang="en-US" sz="800" dirty="0" err="1">
+                <a:latin typeface="Consolas" panose="020B0609020204030204" pitchFamily="49" charset="0"/>
+              </a:rPr>
+              <a:t>groupId</a:t>
+            </a:r>
+            <a:r>
+              <a:rPr lang="en-US" sz="800" dirty="0">
+                <a:latin typeface="Consolas" panose="020B0609020204030204" pitchFamily="49" charset="0"/>
+              </a:rPr>
+              <a:t>&gt;</a:t>
+            </a:r>
+          </a:p>
+          <a:p>
+            <a:pPr marL="12700" indent="0">
+              <a:buNone/>
+            </a:pPr>
+            <a:r>
+              <a:rPr lang="en-US" sz="800" dirty="0">
+                <a:latin typeface="Consolas" panose="020B0609020204030204" pitchFamily="49" charset="0"/>
+              </a:rPr>
+              <a:t>      &lt;</a:t>
+            </a:r>
+            <a:r>
+              <a:rPr lang="en-US" sz="800" dirty="0" err="1">
+                <a:latin typeface="Consolas" panose="020B0609020204030204" pitchFamily="49" charset="0"/>
+              </a:rPr>
+              <a:t>artifactId</a:t>
+            </a:r>
+            <a:r>
+              <a:rPr lang="en-US" sz="800" dirty="0">
+                <a:latin typeface="Consolas" panose="020B0609020204030204" pitchFamily="49" charset="0"/>
+              </a:rPr>
+              <a:t>&gt;</a:t>
+            </a:r>
+            <a:r>
+              <a:rPr lang="en-US" sz="800" dirty="0" err="1">
+                <a:latin typeface="Consolas" panose="020B0609020204030204" pitchFamily="49" charset="0"/>
+              </a:rPr>
+              <a:t>protobuf</a:t>
+            </a:r>
+            <a:r>
+              <a:rPr lang="en-US" sz="800" dirty="0">
+                <a:latin typeface="Consolas" panose="020B0609020204030204" pitchFamily="49" charset="0"/>
+              </a:rPr>
+              <a:t>-java&lt;/</a:t>
+            </a:r>
+            <a:r>
+              <a:rPr lang="en-US" sz="800" dirty="0" err="1">
+                <a:latin typeface="Consolas" panose="020B0609020204030204" pitchFamily="49" charset="0"/>
+              </a:rPr>
+              <a:t>artifactId</a:t>
+            </a:r>
+            <a:r>
+              <a:rPr lang="en-US" sz="800" dirty="0">
+                <a:latin typeface="Consolas" panose="020B0609020204030204" pitchFamily="49" charset="0"/>
+              </a:rPr>
+              <a:t>&gt;</a:t>
+            </a:r>
+          </a:p>
+          <a:p>
+            <a:pPr marL="12700" indent="0">
+              <a:buNone/>
+            </a:pPr>
+            <a:r>
+              <a:rPr lang="en-US" sz="800" dirty="0">
+                <a:latin typeface="Consolas" panose="020B0609020204030204" pitchFamily="49" charset="0"/>
+              </a:rPr>
+              <a:t>      &lt;version&gt;3.12.2&lt;/version&gt;</a:t>
+            </a:r>
+          </a:p>
+          <a:p>
+            <a:pPr marL="12700" indent="0">
+              <a:buNone/>
+            </a:pPr>
+            <a:r>
+              <a:rPr lang="en-US" sz="800" dirty="0">
+                <a:latin typeface="Consolas" panose="020B0609020204030204" pitchFamily="49" charset="0"/>
+              </a:rPr>
+              <a:t>   &lt;/dependency&gt;</a:t>
+            </a:r>
+          </a:p>
+          <a:p>
+            <a:pPr marL="12700" indent="0">
+              <a:buNone/>
+            </a:pPr>
+            <a:r>
+              <a:rPr lang="en-US" sz="800" dirty="0">
+                <a:latin typeface="Consolas" panose="020B0609020204030204" pitchFamily="49" charset="0"/>
+              </a:rPr>
+              <a:t>&lt;/dependencies&gt;</a:t>
+            </a:r>
+          </a:p>
+        </p:txBody>
+      </p:sp>
+      <p:sp>
+        <p:nvSpPr>
+          <p:cNvPr id="4" name="Pladsholder til tekst 2">
+            <a:extLst>
+              <a:ext uri="{FF2B5EF4-FFF2-40B4-BE49-F238E27FC236}">
+                <a16:creationId xmlns:a16="http://schemas.microsoft.com/office/drawing/2014/main" id="{1B8446E8-F0C7-3440-78BB-C463D9A521A0}"/>
+              </a:ext>
+            </a:extLst>
+          </p:cNvPr>
+          <p:cNvSpPr txBox="1">
+            <a:spLocks/>
+          </p:cNvSpPr>
+          <p:nvPr/>
+        </p:nvSpPr>
+        <p:spPr>
+          <a:xfrm>
+            <a:off x="1131636" y="1009981"/>
+            <a:ext cx="4720523" cy="5658759"/>
+          </a:xfrm>
+          <a:prstGeom prst="rect">
+            <a:avLst/>
+          </a:prstGeom>
+        </p:spPr>
+        <p:style>
+          <a:lnRef idx="1">
+            <a:schemeClr val="dk1"/>
+          </a:lnRef>
+          <a:fillRef idx="2">
+            <a:schemeClr val="dk1"/>
+          </a:fillRef>
+          <a:effectRef idx="1">
+            <a:schemeClr val="dk1"/>
+          </a:effectRef>
+          <a:fontRef idx="minor">
+            <a:schemeClr val="dk1"/>
+          </a:fontRef>
+        </p:style>
+        <p:txBody>
+          <a:bodyPr spcFirstLastPara="1" wrap="square" lIns="91425" tIns="91425" rIns="91425" bIns="91425" anchor="t" anchorCtr="0">
+            <a:noAutofit/>
+          </a:bodyPr>
+          <a:lstStyle>
+            <a:defPPr marR="0" lvl="0" algn="l" rtl="0">
+              <a:lnSpc>
+                <a:spcPct val="100000"/>
+              </a:lnSpc>
+              <a:spcBef>
+                <a:spcPts val="0"/>
+              </a:spcBef>
+              <a:spcAft>
+                <a:spcPts val="0"/>
+              </a:spcAft>
+            </a:defPPr>
+            <a:lvl1pPr marL="457200" marR="0" lvl="0" indent="-444500" algn="l" rtl="0">
+              <a:lnSpc>
+                <a:spcPct val="100000"/>
+              </a:lnSpc>
+              <a:spcBef>
+                <a:spcPts val="680"/>
+              </a:spcBef>
+              <a:spcAft>
+                <a:spcPts val="0"/>
+              </a:spcAft>
+              <a:buClr>
+                <a:schemeClr val="dk1"/>
+              </a:buClr>
+              <a:buSzPts val="3400"/>
+              <a:buFont typeface="Arial"/>
+              <a:buChar char="•"/>
+              <a:defRPr sz="3400" b="0" i="0" u="none" strike="noStrike" cap="none">
+                <a:solidFill>
+                  <a:schemeClr val="dk1"/>
+                </a:solidFill>
+                <a:latin typeface="Arial"/>
+                <a:ea typeface="Arial"/>
+                <a:cs typeface="Arial"/>
+                <a:sym typeface="Arial"/>
+              </a:defRPr>
+            </a:lvl1pPr>
+            <a:lvl2pPr marL="914400" marR="0" lvl="1" indent="-419100" algn="l" rtl="0">
+              <a:lnSpc>
+                <a:spcPct val="100000"/>
+              </a:lnSpc>
+              <a:spcBef>
+                <a:spcPts val="600"/>
+              </a:spcBef>
+              <a:spcAft>
+                <a:spcPts val="0"/>
+              </a:spcAft>
+              <a:buClr>
+                <a:schemeClr val="dk1"/>
+              </a:buClr>
+              <a:buSzPts val="3000"/>
+              <a:buFont typeface="Arial"/>
+              <a:buChar char="–"/>
+              <a:defRPr sz="3000" b="0" i="0" u="none" strike="noStrike" cap="none">
+                <a:solidFill>
+                  <a:schemeClr val="dk1"/>
+                </a:solidFill>
+                <a:latin typeface="Arial"/>
+                <a:ea typeface="Arial"/>
+                <a:cs typeface="Arial"/>
+                <a:sym typeface="Arial"/>
+              </a:defRPr>
+            </a:lvl2pPr>
+            <a:lvl3pPr marL="1371600" marR="0" lvl="2" indent="-387350" algn="l" rtl="0">
+              <a:lnSpc>
+                <a:spcPct val="100000"/>
+              </a:lnSpc>
+              <a:spcBef>
+                <a:spcPts val="500"/>
+              </a:spcBef>
+              <a:spcAft>
+                <a:spcPts val="0"/>
+              </a:spcAft>
+              <a:buClr>
+                <a:schemeClr val="dk1"/>
+              </a:buClr>
+              <a:buSzPts val="2500"/>
+              <a:buFont typeface="Arial"/>
+              <a:buChar char="•"/>
+              <a:defRPr sz="2500" b="0" i="0" u="none" strike="noStrike" cap="none">
+                <a:solidFill>
+                  <a:schemeClr val="dk1"/>
+                </a:solidFill>
+                <a:latin typeface="Arial"/>
+                <a:ea typeface="Arial"/>
+                <a:cs typeface="Arial"/>
+                <a:sym typeface="Arial"/>
+              </a:defRPr>
+            </a:lvl3pPr>
+            <a:lvl4pPr marL="1828800" marR="0" lvl="3" indent="-361950" algn="l" rtl="0">
+              <a:lnSpc>
+                <a:spcPct val="100000"/>
+              </a:lnSpc>
+              <a:spcBef>
+                <a:spcPts val="420"/>
+              </a:spcBef>
+              <a:spcAft>
+                <a:spcPts val="0"/>
+              </a:spcAft>
+              <a:buClr>
+                <a:schemeClr val="dk1"/>
+              </a:buClr>
+              <a:buSzPts val="2100"/>
+              <a:buFont typeface="Arial"/>
+              <a:buChar char="–"/>
+              <a:defRPr sz="2100" b="0" i="0" u="none" strike="noStrike" cap="none">
+                <a:solidFill>
+                  <a:schemeClr val="dk1"/>
+                </a:solidFill>
+                <a:latin typeface="Arial"/>
+                <a:ea typeface="Arial"/>
+                <a:cs typeface="Arial"/>
+                <a:sym typeface="Arial"/>
+              </a:defRPr>
+            </a:lvl4pPr>
+            <a:lvl5pPr marL="2286000" marR="0" lvl="4" indent="-361950" algn="l" rtl="0">
+              <a:lnSpc>
+                <a:spcPct val="100000"/>
+              </a:lnSpc>
+              <a:spcBef>
+                <a:spcPts val="420"/>
+              </a:spcBef>
+              <a:spcAft>
+                <a:spcPts val="0"/>
+              </a:spcAft>
+              <a:buClr>
+                <a:schemeClr val="dk1"/>
+              </a:buClr>
+              <a:buSzPts val="2100"/>
+              <a:buFont typeface="Arial"/>
+              <a:buChar char="»"/>
+              <a:defRPr sz="2100" b="0" i="0" u="none" strike="noStrike" cap="none">
+                <a:solidFill>
+                  <a:schemeClr val="dk1"/>
+                </a:solidFill>
+                <a:latin typeface="Arial"/>
+                <a:ea typeface="Arial"/>
+                <a:cs typeface="Arial"/>
+                <a:sym typeface="Arial"/>
+              </a:defRPr>
+            </a:lvl5pPr>
+            <a:lvl6pPr marL="2743200" marR="0" lvl="5" indent="-361950" algn="l" rtl="0">
+              <a:lnSpc>
+                <a:spcPct val="100000"/>
+              </a:lnSpc>
+              <a:spcBef>
+                <a:spcPts val="420"/>
+              </a:spcBef>
+              <a:spcAft>
+                <a:spcPts val="0"/>
+              </a:spcAft>
+              <a:buClr>
+                <a:schemeClr val="dk1"/>
+              </a:buClr>
+              <a:buSzPts val="2100"/>
+              <a:buFont typeface="Times New Roman"/>
+              <a:buChar char="»"/>
+              <a:defRPr sz="2100" b="0" i="0" u="none" strike="noStrike" cap="none">
+                <a:solidFill>
+                  <a:schemeClr val="dk1"/>
+                </a:solidFill>
+                <a:latin typeface="Times New Roman"/>
+                <a:ea typeface="Times New Roman"/>
+                <a:cs typeface="Times New Roman"/>
+                <a:sym typeface="Times New Roman"/>
+              </a:defRPr>
+            </a:lvl6pPr>
+            <a:lvl7pPr marL="3200400" marR="0" lvl="6" indent="-361950" algn="l" rtl="0">
+              <a:lnSpc>
+                <a:spcPct val="100000"/>
+              </a:lnSpc>
+              <a:spcBef>
+                <a:spcPts val="420"/>
+              </a:spcBef>
+              <a:spcAft>
+                <a:spcPts val="0"/>
+              </a:spcAft>
+              <a:buClr>
+                <a:schemeClr val="dk1"/>
+              </a:buClr>
+              <a:buSzPts val="2100"/>
+              <a:buFont typeface="Times New Roman"/>
+              <a:buChar char="»"/>
+              <a:defRPr sz="2100" b="0" i="0" u="none" strike="noStrike" cap="none">
+                <a:solidFill>
+                  <a:schemeClr val="dk1"/>
+                </a:solidFill>
+                <a:latin typeface="Times New Roman"/>
+                <a:ea typeface="Times New Roman"/>
+                <a:cs typeface="Times New Roman"/>
+                <a:sym typeface="Times New Roman"/>
+              </a:defRPr>
+            </a:lvl7pPr>
+            <a:lvl8pPr marL="3657600" marR="0" lvl="7" indent="-361950" algn="l" rtl="0">
+              <a:lnSpc>
+                <a:spcPct val="100000"/>
+              </a:lnSpc>
+              <a:spcBef>
+                <a:spcPts val="420"/>
+              </a:spcBef>
+              <a:spcAft>
+                <a:spcPts val="0"/>
+              </a:spcAft>
+              <a:buClr>
+                <a:schemeClr val="dk1"/>
+              </a:buClr>
+              <a:buSzPts val="2100"/>
+              <a:buFont typeface="Times New Roman"/>
+              <a:buChar char="»"/>
+              <a:defRPr sz="2100" b="0" i="0" u="none" strike="noStrike" cap="none">
+                <a:solidFill>
+                  <a:schemeClr val="dk1"/>
+                </a:solidFill>
+                <a:latin typeface="Times New Roman"/>
+                <a:ea typeface="Times New Roman"/>
+                <a:cs typeface="Times New Roman"/>
+                <a:sym typeface="Times New Roman"/>
+              </a:defRPr>
+            </a:lvl8pPr>
+            <a:lvl9pPr marL="4114800" marR="0" lvl="8" indent="-361950" algn="l" rtl="0">
+              <a:lnSpc>
+                <a:spcPct val="100000"/>
+              </a:lnSpc>
+              <a:spcBef>
+                <a:spcPts val="420"/>
+              </a:spcBef>
+              <a:spcAft>
+                <a:spcPts val="0"/>
+              </a:spcAft>
+              <a:buClr>
+                <a:schemeClr val="dk1"/>
+              </a:buClr>
+              <a:buSzPts val="2100"/>
+              <a:buFont typeface="Times New Roman"/>
+              <a:buChar char="»"/>
+              <a:defRPr sz="2100" b="0" i="0" u="none" strike="noStrike" cap="none">
+                <a:solidFill>
+                  <a:schemeClr val="dk1"/>
+                </a:solidFill>
+                <a:latin typeface="Times New Roman"/>
+                <a:ea typeface="Times New Roman"/>
+                <a:cs typeface="Times New Roman"/>
+                <a:sym typeface="Times New Roman"/>
+              </a:defRPr>
+            </a:lvl9pPr>
+          </a:lstStyle>
+          <a:p>
+            <a:pPr marL="12700" indent="0">
+              <a:buFont typeface="Arial"/>
+              <a:buNone/>
+            </a:pPr>
+            <a:r>
+              <a:rPr lang="en-US" sz="800" dirty="0">
+                <a:latin typeface="Consolas" panose="020B0609020204030204" pitchFamily="49" charset="0"/>
+              </a:rPr>
+              <a:t>&lt;plugin&gt;</a:t>
+            </a:r>
+          </a:p>
+          <a:p>
+            <a:pPr marL="12700" indent="0">
+              <a:buFont typeface="Arial"/>
+              <a:buNone/>
+            </a:pPr>
+            <a:r>
+              <a:rPr lang="en-US" sz="800" dirty="0">
+                <a:latin typeface="Consolas" panose="020B0609020204030204" pitchFamily="49" charset="0"/>
+              </a:rPr>
+              <a:t>    &lt;</a:t>
+            </a:r>
+            <a:r>
+              <a:rPr lang="en-US" sz="800" dirty="0" err="1">
+                <a:latin typeface="Consolas" panose="020B0609020204030204" pitchFamily="49" charset="0"/>
+              </a:rPr>
+              <a:t>groupId</a:t>
+            </a:r>
+            <a:r>
+              <a:rPr lang="en-US" sz="800" dirty="0">
+                <a:latin typeface="Consolas" panose="020B0609020204030204" pitchFamily="49" charset="0"/>
+              </a:rPr>
+              <a:t>&gt;com.github.os72&lt;/</a:t>
+            </a:r>
+            <a:r>
+              <a:rPr lang="en-US" sz="800" dirty="0" err="1">
+                <a:latin typeface="Consolas" panose="020B0609020204030204" pitchFamily="49" charset="0"/>
+              </a:rPr>
+              <a:t>groupId</a:t>
+            </a:r>
+            <a:r>
+              <a:rPr lang="en-US" sz="800" dirty="0">
+                <a:latin typeface="Consolas" panose="020B0609020204030204" pitchFamily="49" charset="0"/>
+              </a:rPr>
+              <a:t>&gt;</a:t>
+            </a:r>
+          </a:p>
+          <a:p>
+            <a:pPr marL="12700" indent="0">
+              <a:buFont typeface="Arial"/>
+              <a:buNone/>
+            </a:pPr>
+            <a:r>
+              <a:rPr lang="en-US" sz="800" dirty="0">
+                <a:latin typeface="Consolas" panose="020B0609020204030204" pitchFamily="49" charset="0"/>
+              </a:rPr>
+              <a:t>    &lt;</a:t>
+            </a:r>
+            <a:r>
+              <a:rPr lang="en-US" sz="800" dirty="0" err="1">
+                <a:latin typeface="Consolas" panose="020B0609020204030204" pitchFamily="49" charset="0"/>
+              </a:rPr>
+              <a:t>artifactId</a:t>
+            </a:r>
+            <a:r>
+              <a:rPr lang="en-US" sz="800" dirty="0">
+                <a:latin typeface="Consolas" panose="020B0609020204030204" pitchFamily="49" charset="0"/>
+              </a:rPr>
+              <a:t>&gt;</a:t>
+            </a:r>
+            <a:r>
+              <a:rPr lang="en-US" sz="800" dirty="0" err="1">
+                <a:latin typeface="Consolas" panose="020B0609020204030204" pitchFamily="49" charset="0"/>
+              </a:rPr>
+              <a:t>protoc</a:t>
+            </a:r>
+            <a:r>
+              <a:rPr lang="en-US" sz="800" dirty="0">
+                <a:latin typeface="Consolas" panose="020B0609020204030204" pitchFamily="49" charset="0"/>
+              </a:rPr>
+              <a:t>-jar-maven-plugin&lt;/</a:t>
+            </a:r>
+            <a:r>
+              <a:rPr lang="en-US" sz="800" dirty="0" err="1">
+                <a:latin typeface="Consolas" panose="020B0609020204030204" pitchFamily="49" charset="0"/>
+              </a:rPr>
+              <a:t>artifactId</a:t>
+            </a:r>
+            <a:r>
+              <a:rPr lang="en-US" sz="800" dirty="0">
+                <a:latin typeface="Consolas" panose="020B0609020204030204" pitchFamily="49" charset="0"/>
+              </a:rPr>
+              <a:t>&gt;</a:t>
+            </a:r>
+          </a:p>
+          <a:p>
+            <a:pPr marL="12700" indent="0">
+              <a:buFont typeface="Arial"/>
+              <a:buNone/>
+            </a:pPr>
+            <a:r>
+              <a:rPr lang="en-US" sz="800" dirty="0">
+                <a:latin typeface="Consolas" panose="020B0609020204030204" pitchFamily="49" charset="0"/>
+              </a:rPr>
+              <a:t>    &lt;version&gt;3.11.4&lt;/version&gt;</a:t>
+            </a:r>
+          </a:p>
+          <a:p>
+            <a:pPr marL="12700" indent="0">
+              <a:buFont typeface="Arial"/>
+              <a:buNone/>
+            </a:pPr>
+            <a:r>
+              <a:rPr lang="en-US" sz="800" dirty="0">
+                <a:latin typeface="Consolas" panose="020B0609020204030204" pitchFamily="49" charset="0"/>
+              </a:rPr>
+              <a:t>    &lt;executions&gt;</a:t>
+            </a:r>
+          </a:p>
+          <a:p>
+            <a:pPr marL="12700" indent="0">
+              <a:buFont typeface="Arial"/>
+              <a:buNone/>
+            </a:pPr>
+            <a:r>
+              <a:rPr lang="en-US" sz="800" dirty="0">
+                <a:latin typeface="Consolas" panose="020B0609020204030204" pitchFamily="49" charset="0"/>
+              </a:rPr>
+              <a:t>        &lt;execution&gt;</a:t>
+            </a:r>
+          </a:p>
+          <a:p>
+            <a:pPr marL="12700" indent="0">
+              <a:buFont typeface="Arial"/>
+              <a:buNone/>
+            </a:pPr>
+            <a:r>
+              <a:rPr lang="en-US" sz="800" dirty="0">
+                <a:latin typeface="Consolas" panose="020B0609020204030204" pitchFamily="49" charset="0"/>
+              </a:rPr>
+              <a:t>            &lt;phase&gt;generate-sources&lt;/phase&gt;</a:t>
+            </a:r>
+          </a:p>
+          <a:p>
+            <a:pPr marL="12700" indent="0">
+              <a:buFont typeface="Arial"/>
+              <a:buNone/>
+            </a:pPr>
+            <a:r>
+              <a:rPr lang="en-US" sz="800" dirty="0">
+                <a:latin typeface="Consolas" panose="020B0609020204030204" pitchFamily="49" charset="0"/>
+              </a:rPr>
+              <a:t>            &lt;goals&gt;</a:t>
+            </a:r>
+          </a:p>
+          <a:p>
+            <a:pPr marL="12700" indent="0">
+              <a:buFont typeface="Arial"/>
+              <a:buNone/>
+            </a:pPr>
+            <a:r>
+              <a:rPr lang="en-US" sz="800" dirty="0">
+                <a:latin typeface="Consolas" panose="020B0609020204030204" pitchFamily="49" charset="0"/>
+              </a:rPr>
+              <a:t>                &lt;goal&gt;run&lt;/goal&gt;</a:t>
+            </a:r>
+          </a:p>
+          <a:p>
+            <a:pPr marL="12700" indent="0">
+              <a:buFont typeface="Arial"/>
+              <a:buNone/>
+            </a:pPr>
+            <a:r>
+              <a:rPr lang="en-US" sz="800" dirty="0">
+                <a:latin typeface="Consolas" panose="020B0609020204030204" pitchFamily="49" charset="0"/>
+              </a:rPr>
+              <a:t>            &lt;/goals&gt;</a:t>
+            </a:r>
+          </a:p>
+          <a:p>
+            <a:pPr marL="12700" indent="0">
+              <a:buFont typeface="Arial"/>
+              <a:buNone/>
+            </a:pPr>
+            <a:r>
+              <a:rPr lang="en-US" sz="800" dirty="0">
+                <a:latin typeface="Consolas" panose="020B0609020204030204" pitchFamily="49" charset="0"/>
+              </a:rPr>
+              <a:t>            &lt;configuration&gt;</a:t>
+            </a:r>
+          </a:p>
+          <a:p>
+            <a:pPr marL="12700" indent="0">
+              <a:buFont typeface="Arial"/>
+              <a:buNone/>
+            </a:pPr>
+            <a:r>
+              <a:rPr lang="en-US" sz="800" dirty="0">
+                <a:latin typeface="Consolas" panose="020B0609020204030204" pitchFamily="49" charset="0"/>
+              </a:rPr>
+              <a:t>                &lt;</a:t>
+            </a:r>
+            <a:r>
+              <a:rPr lang="en-US" sz="800" dirty="0" err="1">
+                <a:latin typeface="Consolas" panose="020B0609020204030204" pitchFamily="49" charset="0"/>
+              </a:rPr>
+              <a:t>inputDirectories</a:t>
+            </a:r>
+            <a:r>
+              <a:rPr lang="en-US" sz="800" dirty="0">
+                <a:latin typeface="Consolas" panose="020B0609020204030204" pitchFamily="49" charset="0"/>
+              </a:rPr>
+              <a:t>&gt;</a:t>
+            </a:r>
+          </a:p>
+          <a:p>
+            <a:pPr marL="12700" indent="0">
+              <a:buFont typeface="Arial"/>
+              <a:buNone/>
+            </a:pPr>
+            <a:r>
+              <a:rPr lang="en-US" sz="800" dirty="0">
+                <a:latin typeface="Consolas" panose="020B0609020204030204" pitchFamily="49" charset="0"/>
+              </a:rPr>
+              <a:t>                  &lt;include&gt;${</a:t>
+            </a:r>
+            <a:r>
+              <a:rPr lang="en-US" sz="800" dirty="0" err="1">
+                <a:latin typeface="Consolas" panose="020B0609020204030204" pitchFamily="49" charset="0"/>
+              </a:rPr>
+              <a:t>project.basedir</a:t>
+            </a:r>
+            <a:r>
+              <a:rPr lang="en-US" sz="800" dirty="0">
+                <a:latin typeface="Consolas" panose="020B0609020204030204" pitchFamily="49" charset="0"/>
+              </a:rPr>
+              <a:t>}/</a:t>
+            </a:r>
+            <a:r>
+              <a:rPr lang="en-US" sz="800" dirty="0" err="1">
+                <a:latin typeface="Consolas" panose="020B0609020204030204" pitchFamily="49" charset="0"/>
+              </a:rPr>
+              <a:t>src</a:t>
+            </a:r>
+            <a:r>
+              <a:rPr lang="en-US" sz="800" dirty="0">
+                <a:latin typeface="Consolas" panose="020B0609020204030204" pitchFamily="49" charset="0"/>
+              </a:rPr>
+              <a:t>/main/</a:t>
+            </a:r>
+            <a:r>
+              <a:rPr lang="en-US" sz="800" dirty="0" err="1">
+                <a:latin typeface="Consolas" panose="020B0609020204030204" pitchFamily="49" charset="0"/>
+              </a:rPr>
+              <a:t>protobuf</a:t>
+            </a:r>
+            <a:r>
+              <a:rPr lang="en-US" sz="800" dirty="0">
+                <a:latin typeface="Consolas" panose="020B0609020204030204" pitchFamily="49" charset="0"/>
+              </a:rPr>
+              <a:t>&lt;/include&gt;</a:t>
+            </a:r>
+          </a:p>
+          <a:p>
+            <a:pPr marL="12700" indent="0">
+              <a:buFont typeface="Arial"/>
+              <a:buNone/>
+            </a:pPr>
+            <a:r>
+              <a:rPr lang="en-US" sz="800" dirty="0">
+                <a:latin typeface="Consolas" panose="020B0609020204030204" pitchFamily="49" charset="0"/>
+              </a:rPr>
+              <a:t>                &lt;/</a:t>
+            </a:r>
+            <a:r>
+              <a:rPr lang="en-US" sz="800" dirty="0" err="1">
+                <a:latin typeface="Consolas" panose="020B0609020204030204" pitchFamily="49" charset="0"/>
+              </a:rPr>
+              <a:t>inputDirectories</a:t>
+            </a:r>
+            <a:r>
+              <a:rPr lang="en-US" sz="800" dirty="0">
+                <a:latin typeface="Consolas" panose="020B0609020204030204" pitchFamily="49" charset="0"/>
+              </a:rPr>
+              <a:t>&gt;</a:t>
+            </a:r>
+          </a:p>
+          <a:p>
+            <a:pPr marL="12700" indent="0">
+              <a:buFont typeface="Arial"/>
+              <a:buNone/>
+            </a:pPr>
+            <a:r>
+              <a:rPr lang="en-US" sz="800" dirty="0">
+                <a:latin typeface="Consolas" panose="020B0609020204030204" pitchFamily="49" charset="0"/>
+              </a:rPr>
+              <a:t>                &lt;</a:t>
+            </a:r>
+            <a:r>
+              <a:rPr lang="en-US" sz="800" dirty="0" err="1">
+                <a:latin typeface="Consolas" panose="020B0609020204030204" pitchFamily="49" charset="0"/>
+              </a:rPr>
+              <a:t>outputTargets</a:t>
+            </a:r>
+            <a:r>
+              <a:rPr lang="en-US" sz="800" dirty="0">
+                <a:latin typeface="Consolas" panose="020B0609020204030204" pitchFamily="49" charset="0"/>
+              </a:rPr>
+              <a:t>&gt;</a:t>
+            </a:r>
+          </a:p>
+          <a:p>
+            <a:pPr marL="12700" indent="0">
+              <a:buFont typeface="Arial"/>
+              <a:buNone/>
+            </a:pPr>
+            <a:r>
+              <a:rPr lang="en-US" sz="800" dirty="0">
+                <a:latin typeface="Consolas" panose="020B0609020204030204" pitchFamily="49" charset="0"/>
+              </a:rPr>
+              <a:t>                    &lt;</a:t>
+            </a:r>
+            <a:r>
+              <a:rPr lang="en-US" sz="800" dirty="0" err="1">
+                <a:latin typeface="Consolas" panose="020B0609020204030204" pitchFamily="49" charset="0"/>
+              </a:rPr>
+              <a:t>outputTarget</a:t>
+            </a:r>
+            <a:r>
+              <a:rPr lang="en-US" sz="800" dirty="0">
+                <a:latin typeface="Consolas" panose="020B0609020204030204" pitchFamily="49" charset="0"/>
+              </a:rPr>
+              <a:t>&gt;</a:t>
+            </a:r>
+          </a:p>
+          <a:p>
+            <a:pPr marL="12700" indent="0">
+              <a:buFont typeface="Arial"/>
+              <a:buNone/>
+            </a:pPr>
+            <a:r>
+              <a:rPr lang="en-US" sz="800" dirty="0">
+                <a:latin typeface="Consolas" panose="020B0609020204030204" pitchFamily="49" charset="0"/>
+              </a:rPr>
+              <a:t>                        &lt;type&gt;java&lt;/type&gt;</a:t>
+            </a:r>
+          </a:p>
+          <a:p>
+            <a:pPr marL="12700" indent="0">
+              <a:buFont typeface="Arial"/>
+              <a:buNone/>
+            </a:pPr>
+            <a:r>
+              <a:rPr lang="en-US" sz="800" dirty="0">
+                <a:latin typeface="Consolas" panose="020B0609020204030204" pitchFamily="49" charset="0"/>
+              </a:rPr>
+              <a:t>                        &lt;</a:t>
+            </a:r>
+            <a:r>
+              <a:rPr lang="en-US" sz="800" dirty="0" err="1">
+                <a:latin typeface="Consolas" panose="020B0609020204030204" pitchFamily="49" charset="0"/>
+              </a:rPr>
+              <a:t>addSources</a:t>
+            </a:r>
+            <a:r>
+              <a:rPr lang="en-US" sz="800" dirty="0">
+                <a:latin typeface="Consolas" panose="020B0609020204030204" pitchFamily="49" charset="0"/>
+              </a:rPr>
+              <a:t>&gt;main&lt;/</a:t>
+            </a:r>
+            <a:r>
+              <a:rPr lang="en-US" sz="800" dirty="0" err="1">
+                <a:latin typeface="Consolas" panose="020B0609020204030204" pitchFamily="49" charset="0"/>
+              </a:rPr>
+              <a:t>addSources</a:t>
+            </a:r>
+            <a:r>
+              <a:rPr lang="en-US" sz="800" dirty="0">
+                <a:latin typeface="Consolas" panose="020B0609020204030204" pitchFamily="49" charset="0"/>
+              </a:rPr>
+              <a:t>&gt;</a:t>
+            </a:r>
+          </a:p>
+          <a:p>
+            <a:pPr marL="12700" indent="0">
+              <a:buFont typeface="Arial"/>
+              <a:buNone/>
+            </a:pPr>
+            <a:r>
+              <a:rPr lang="en-US" sz="800" dirty="0">
+                <a:latin typeface="Consolas" panose="020B0609020204030204" pitchFamily="49" charset="0"/>
+              </a:rPr>
+              <a:t>                    &lt;</a:t>
+            </a:r>
+            <a:r>
+              <a:rPr lang="en-US" sz="800" dirty="0" err="1">
+                <a:latin typeface="Consolas" panose="020B0609020204030204" pitchFamily="49" charset="0"/>
+              </a:rPr>
+              <a:t>outputDirectory</a:t>
+            </a:r>
+            <a:r>
+              <a:rPr lang="en-US" sz="800" dirty="0">
+                <a:latin typeface="Consolas" panose="020B0609020204030204" pitchFamily="49" charset="0"/>
+              </a:rPr>
+              <a:t>&gt;${</a:t>
+            </a:r>
+            <a:r>
+              <a:rPr lang="en-US" sz="800" dirty="0" err="1">
+                <a:latin typeface="Consolas" panose="020B0609020204030204" pitchFamily="49" charset="0"/>
+              </a:rPr>
+              <a:t>project.basedir</a:t>
+            </a:r>
+            <a:r>
+              <a:rPr lang="en-US" sz="800" dirty="0">
+                <a:latin typeface="Consolas" panose="020B0609020204030204" pitchFamily="49" charset="0"/>
+              </a:rPr>
+              <a:t>}/target/generated-sources/</a:t>
+            </a:r>
+            <a:r>
+              <a:rPr lang="en-US" sz="800" dirty="0" err="1">
+                <a:latin typeface="Consolas" panose="020B0609020204030204" pitchFamily="49" charset="0"/>
+              </a:rPr>
+              <a:t>protobuf</a:t>
+            </a:r>
+            <a:r>
+              <a:rPr lang="en-US" sz="800" dirty="0">
+                <a:latin typeface="Consolas" panose="020B0609020204030204" pitchFamily="49" charset="0"/>
+              </a:rPr>
+              <a:t>&lt;/</a:t>
+            </a:r>
+            <a:r>
+              <a:rPr lang="en-US" sz="800" dirty="0" err="1">
+                <a:latin typeface="Consolas" panose="020B0609020204030204" pitchFamily="49" charset="0"/>
+              </a:rPr>
+              <a:t>outputDirectory</a:t>
+            </a:r>
+            <a:r>
+              <a:rPr lang="en-US" sz="800" dirty="0">
+                <a:latin typeface="Consolas" panose="020B0609020204030204" pitchFamily="49" charset="0"/>
+              </a:rPr>
+              <a:t>&gt;</a:t>
+            </a:r>
+          </a:p>
+          <a:p>
+            <a:pPr marL="12700" indent="0">
+              <a:buFont typeface="Arial"/>
+              <a:buNone/>
+            </a:pPr>
+            <a:r>
+              <a:rPr lang="en-US" sz="800" dirty="0">
+                <a:latin typeface="Consolas" panose="020B0609020204030204" pitchFamily="49" charset="0"/>
+              </a:rPr>
+              <a:t>                    &lt;/</a:t>
+            </a:r>
+            <a:r>
+              <a:rPr lang="en-US" sz="800" dirty="0" err="1">
+                <a:latin typeface="Consolas" panose="020B0609020204030204" pitchFamily="49" charset="0"/>
+              </a:rPr>
+              <a:t>outputTarget</a:t>
+            </a:r>
+            <a:r>
+              <a:rPr lang="en-US" sz="800" dirty="0">
+                <a:latin typeface="Consolas" panose="020B0609020204030204" pitchFamily="49" charset="0"/>
+              </a:rPr>
+              <a:t>&gt;</a:t>
+            </a:r>
+          </a:p>
+          <a:p>
+            <a:pPr marL="12700" indent="0">
+              <a:buFont typeface="Arial"/>
+              <a:buNone/>
+            </a:pPr>
+            <a:r>
+              <a:rPr lang="en-US" sz="800" dirty="0">
+                <a:latin typeface="Consolas" panose="020B0609020204030204" pitchFamily="49" charset="0"/>
+              </a:rPr>
+              <a:t>                &lt;/</a:t>
+            </a:r>
+            <a:r>
+              <a:rPr lang="en-US" sz="800" dirty="0" err="1">
+                <a:latin typeface="Consolas" panose="020B0609020204030204" pitchFamily="49" charset="0"/>
+              </a:rPr>
+              <a:t>outputTargets</a:t>
+            </a:r>
+            <a:r>
+              <a:rPr lang="en-US" sz="800" dirty="0">
+                <a:latin typeface="Consolas" panose="020B0609020204030204" pitchFamily="49" charset="0"/>
+              </a:rPr>
+              <a:t>&gt;</a:t>
+            </a:r>
+          </a:p>
+          <a:p>
+            <a:pPr marL="12700" indent="0">
+              <a:buFont typeface="Arial"/>
+              <a:buNone/>
+            </a:pPr>
+            <a:r>
+              <a:rPr lang="en-US" sz="800" dirty="0">
+                <a:latin typeface="Consolas" panose="020B0609020204030204" pitchFamily="49" charset="0"/>
+              </a:rPr>
+              <a:t>            &lt;/configuration&gt;</a:t>
+            </a:r>
+          </a:p>
+          <a:p>
+            <a:pPr marL="12700" indent="0">
+              <a:buFont typeface="Arial"/>
+              <a:buNone/>
+            </a:pPr>
+            <a:r>
+              <a:rPr lang="en-US" sz="800" dirty="0">
+                <a:latin typeface="Consolas" panose="020B0609020204030204" pitchFamily="49" charset="0"/>
+              </a:rPr>
+              <a:t>        &lt;/execution&gt;</a:t>
+            </a:r>
+          </a:p>
+          <a:p>
+            <a:pPr marL="12700" indent="0">
+              <a:buFont typeface="Arial"/>
+              <a:buNone/>
+            </a:pPr>
+            <a:r>
+              <a:rPr lang="en-US" sz="800" dirty="0">
+                <a:latin typeface="Consolas" panose="020B0609020204030204" pitchFamily="49" charset="0"/>
+              </a:rPr>
+              <a:t>    &lt;/executions&gt;</a:t>
+            </a:r>
+          </a:p>
+          <a:p>
+            <a:pPr marL="12700" indent="0">
+              <a:buFont typeface="Arial"/>
+              <a:buNone/>
+            </a:pPr>
+            <a:r>
+              <a:rPr lang="en-US" sz="800" dirty="0">
+                <a:latin typeface="Consolas" panose="020B0609020204030204" pitchFamily="49" charset="0"/>
+              </a:rPr>
+              <a:t>&lt;/plugin&gt;</a:t>
+            </a:r>
+          </a:p>
+        </p:txBody>
+      </p:sp>
+    </p:spTree>
+    <p:extLst>
+      <p:ext uri="{BB962C8B-B14F-4D97-AF65-F5344CB8AC3E}">
+        <p14:creationId xmlns:p14="http://schemas.microsoft.com/office/powerpoint/2010/main" val="1085921959"/>
+      </p:ext>
+    </p:extLst>
+  </p:cSld>
+  <p:clrMapOvr>
+    <a:masterClrMapping/>
+  </p:clrMapOvr>
+</p:sld>
+</file>
+
+<file path=ppt/slides/slide6.xml><?xml version="1.0" encoding="utf-8"?>
+<p:sld xmlns:a="http://schemas.openxmlformats.org/drawingml/2006/main" xmlns:r="http://schemas.openxmlformats.org/officeDocument/2006/relationships" xmlns:p="http://schemas.openxmlformats.org/presentationml/2006/main">
+  <p:cSld>
+    <p:spTree>
+      <p:nvGrpSpPr>
+        <p:cNvPr id="1" name=""/>
+        <p:cNvGrpSpPr/>
+        <p:nvPr/>
+      </p:nvGrpSpPr>
+      <p:grpSpPr>
+        <a:xfrm>
+          <a:off x="0" y="0"/>
+          <a:ext cx="0" cy="0"/>
+          <a:chOff x="0" y="0"/>
+          <a:chExt cx="0" cy="0"/>
+        </a:xfrm>
+      </p:grpSpPr>
+      <p:sp>
+        <p:nvSpPr>
+          <p:cNvPr id="2" name="Titel 1">
+            <a:extLst>
+              <a:ext uri="{FF2B5EF4-FFF2-40B4-BE49-F238E27FC236}">
+                <a16:creationId xmlns:a16="http://schemas.microsoft.com/office/drawing/2014/main" id="{46D53518-2CD0-474C-E35C-1F06C27C3826}"/>
+              </a:ext>
+            </a:extLst>
+          </p:cNvPr>
+          <p:cNvSpPr>
+            <a:spLocks noGrp="1"/>
+          </p:cNvSpPr>
+          <p:nvPr>
+            <p:ph type="title"/>
+          </p:nvPr>
+        </p:nvSpPr>
+        <p:spPr/>
+        <p:txBody>
+          <a:bodyPr/>
+          <a:lstStyle/>
+          <a:p>
+            <a:r>
+              <a:rPr lang="da-DK" dirty="0"/>
+              <a:t>Writing producer</a:t>
+            </a:r>
+            <a:endParaRPr lang="en-US" dirty="0"/>
+          </a:p>
+        </p:txBody>
+      </p:sp>
+      <p:sp>
+        <p:nvSpPr>
+          <p:cNvPr id="4" name="Pladsholder til tekst 2">
+            <a:extLst>
+              <a:ext uri="{FF2B5EF4-FFF2-40B4-BE49-F238E27FC236}">
+                <a16:creationId xmlns:a16="http://schemas.microsoft.com/office/drawing/2014/main" id="{1B8446E8-F0C7-3440-78BB-C463D9A521A0}"/>
+              </a:ext>
+            </a:extLst>
+          </p:cNvPr>
+          <p:cNvSpPr txBox="1">
+            <a:spLocks/>
+          </p:cNvSpPr>
+          <p:nvPr/>
+        </p:nvSpPr>
+        <p:spPr>
+          <a:xfrm>
+            <a:off x="530146" y="1524596"/>
+            <a:ext cx="9020331" cy="5025059"/>
+          </a:xfrm>
+          <a:prstGeom prst="rect">
+            <a:avLst/>
+          </a:prstGeom>
+        </p:spPr>
+        <p:style>
+          <a:lnRef idx="1">
+            <a:schemeClr val="dk1"/>
+          </a:lnRef>
+          <a:fillRef idx="2">
+            <a:schemeClr val="dk1"/>
+          </a:fillRef>
+          <a:effectRef idx="1">
+            <a:schemeClr val="dk1"/>
+          </a:effectRef>
+          <a:fontRef idx="minor">
+            <a:schemeClr val="dk1"/>
+          </a:fontRef>
+        </p:style>
+        <p:txBody>
+          <a:bodyPr spcFirstLastPara="1" wrap="square" lIns="91425" tIns="91425" rIns="91425" bIns="91425" anchor="t" anchorCtr="0">
+            <a:noAutofit/>
+          </a:bodyPr>
+          <a:lstStyle>
+            <a:defPPr marR="0" lvl="0" algn="l" rtl="0">
+              <a:lnSpc>
+                <a:spcPct val="100000"/>
+              </a:lnSpc>
+              <a:spcBef>
+                <a:spcPts val="0"/>
+              </a:spcBef>
+              <a:spcAft>
+                <a:spcPts val="0"/>
+              </a:spcAft>
+            </a:defPPr>
+            <a:lvl1pPr marL="457200" marR="0" lvl="0" indent="-444500" algn="l" rtl="0">
+              <a:lnSpc>
+                <a:spcPct val="100000"/>
+              </a:lnSpc>
+              <a:spcBef>
+                <a:spcPts val="680"/>
+              </a:spcBef>
+              <a:spcAft>
+                <a:spcPts val="0"/>
+              </a:spcAft>
+              <a:buClr>
+                <a:schemeClr val="dk1"/>
+              </a:buClr>
+              <a:buSzPts val="3400"/>
+              <a:buFont typeface="Arial"/>
+              <a:buChar char="•"/>
+              <a:defRPr sz="3400" b="0" i="0" u="none" strike="noStrike" cap="none">
+                <a:solidFill>
+                  <a:schemeClr val="dk1"/>
+                </a:solidFill>
+                <a:latin typeface="Arial"/>
+                <a:ea typeface="Arial"/>
+                <a:cs typeface="Arial"/>
+                <a:sym typeface="Arial"/>
+              </a:defRPr>
+            </a:lvl1pPr>
+            <a:lvl2pPr marL="914400" marR="0" lvl="1" indent="-419100" algn="l" rtl="0">
+              <a:lnSpc>
+                <a:spcPct val="100000"/>
+              </a:lnSpc>
+              <a:spcBef>
+                <a:spcPts val="600"/>
+              </a:spcBef>
+              <a:spcAft>
+                <a:spcPts val="0"/>
+              </a:spcAft>
+              <a:buClr>
+                <a:schemeClr val="dk1"/>
+              </a:buClr>
+              <a:buSzPts val="3000"/>
+              <a:buFont typeface="Arial"/>
+              <a:buChar char="–"/>
+              <a:defRPr sz="3000" b="0" i="0" u="none" strike="noStrike" cap="none">
+                <a:solidFill>
+                  <a:schemeClr val="dk1"/>
+                </a:solidFill>
+                <a:latin typeface="Arial"/>
+                <a:ea typeface="Arial"/>
+                <a:cs typeface="Arial"/>
+                <a:sym typeface="Arial"/>
+              </a:defRPr>
+            </a:lvl2pPr>
+            <a:lvl3pPr marL="1371600" marR="0" lvl="2" indent="-387350" algn="l" rtl="0">
+              <a:lnSpc>
+                <a:spcPct val="100000"/>
+              </a:lnSpc>
+              <a:spcBef>
+                <a:spcPts val="500"/>
+              </a:spcBef>
+              <a:spcAft>
+                <a:spcPts val="0"/>
+              </a:spcAft>
+              <a:buClr>
+                <a:schemeClr val="dk1"/>
+              </a:buClr>
+              <a:buSzPts val="2500"/>
+              <a:buFont typeface="Arial"/>
+              <a:buChar char="•"/>
+              <a:defRPr sz="2500" b="0" i="0" u="none" strike="noStrike" cap="none">
+                <a:solidFill>
+                  <a:schemeClr val="dk1"/>
+                </a:solidFill>
+                <a:latin typeface="Arial"/>
+                <a:ea typeface="Arial"/>
+                <a:cs typeface="Arial"/>
+                <a:sym typeface="Arial"/>
+              </a:defRPr>
+            </a:lvl3pPr>
+            <a:lvl4pPr marL="1828800" marR="0" lvl="3" indent="-361950" algn="l" rtl="0">
+              <a:lnSpc>
+                <a:spcPct val="100000"/>
+              </a:lnSpc>
+              <a:spcBef>
+                <a:spcPts val="420"/>
+              </a:spcBef>
+              <a:spcAft>
+                <a:spcPts val="0"/>
+              </a:spcAft>
+              <a:buClr>
+                <a:schemeClr val="dk1"/>
+              </a:buClr>
+              <a:buSzPts val="2100"/>
+              <a:buFont typeface="Arial"/>
+              <a:buChar char="–"/>
+              <a:defRPr sz="2100" b="0" i="0" u="none" strike="noStrike" cap="none">
+                <a:solidFill>
+                  <a:schemeClr val="dk1"/>
+                </a:solidFill>
+                <a:latin typeface="Arial"/>
+                <a:ea typeface="Arial"/>
+                <a:cs typeface="Arial"/>
+                <a:sym typeface="Arial"/>
+              </a:defRPr>
+            </a:lvl4pPr>
+            <a:lvl5pPr marL="2286000" marR="0" lvl="4" indent="-361950" algn="l" rtl="0">
+              <a:lnSpc>
+                <a:spcPct val="100000"/>
+              </a:lnSpc>
+              <a:spcBef>
+                <a:spcPts val="420"/>
+              </a:spcBef>
+              <a:spcAft>
+                <a:spcPts val="0"/>
+              </a:spcAft>
+              <a:buClr>
+                <a:schemeClr val="dk1"/>
+              </a:buClr>
+              <a:buSzPts val="2100"/>
+              <a:buFont typeface="Arial"/>
+              <a:buChar char="»"/>
+              <a:defRPr sz="2100" b="0" i="0" u="none" strike="noStrike" cap="none">
+                <a:solidFill>
+                  <a:schemeClr val="dk1"/>
+                </a:solidFill>
+                <a:latin typeface="Arial"/>
+                <a:ea typeface="Arial"/>
+                <a:cs typeface="Arial"/>
+                <a:sym typeface="Arial"/>
+              </a:defRPr>
+            </a:lvl5pPr>
+            <a:lvl6pPr marL="2743200" marR="0" lvl="5" indent="-361950" algn="l" rtl="0">
+              <a:lnSpc>
+                <a:spcPct val="100000"/>
+              </a:lnSpc>
+              <a:spcBef>
+                <a:spcPts val="420"/>
+              </a:spcBef>
+              <a:spcAft>
+                <a:spcPts val="0"/>
+              </a:spcAft>
+              <a:buClr>
+                <a:schemeClr val="dk1"/>
+              </a:buClr>
+              <a:buSzPts val="2100"/>
+              <a:buFont typeface="Times New Roman"/>
+              <a:buChar char="»"/>
+              <a:defRPr sz="2100" b="0" i="0" u="none" strike="noStrike" cap="none">
+                <a:solidFill>
+                  <a:schemeClr val="dk1"/>
+                </a:solidFill>
+                <a:latin typeface="Times New Roman"/>
+                <a:ea typeface="Times New Roman"/>
+                <a:cs typeface="Times New Roman"/>
+                <a:sym typeface="Times New Roman"/>
+              </a:defRPr>
+            </a:lvl6pPr>
+            <a:lvl7pPr marL="3200400" marR="0" lvl="6" indent="-361950" algn="l" rtl="0">
+              <a:lnSpc>
+                <a:spcPct val="100000"/>
+              </a:lnSpc>
+              <a:spcBef>
+                <a:spcPts val="420"/>
+              </a:spcBef>
+              <a:spcAft>
+                <a:spcPts val="0"/>
+              </a:spcAft>
+              <a:buClr>
+                <a:schemeClr val="dk1"/>
+              </a:buClr>
+              <a:buSzPts val="2100"/>
+              <a:buFont typeface="Times New Roman"/>
+              <a:buChar char="»"/>
+              <a:defRPr sz="2100" b="0" i="0" u="none" strike="noStrike" cap="none">
+                <a:solidFill>
+                  <a:schemeClr val="dk1"/>
+                </a:solidFill>
+                <a:latin typeface="Times New Roman"/>
+                <a:ea typeface="Times New Roman"/>
+                <a:cs typeface="Times New Roman"/>
+                <a:sym typeface="Times New Roman"/>
+              </a:defRPr>
+            </a:lvl7pPr>
+            <a:lvl8pPr marL="3657600" marR="0" lvl="7" indent="-361950" algn="l" rtl="0">
+              <a:lnSpc>
+                <a:spcPct val="100000"/>
+              </a:lnSpc>
+              <a:spcBef>
+                <a:spcPts val="420"/>
+              </a:spcBef>
+              <a:spcAft>
+                <a:spcPts val="0"/>
+              </a:spcAft>
+              <a:buClr>
+                <a:schemeClr val="dk1"/>
+              </a:buClr>
+              <a:buSzPts val="2100"/>
+              <a:buFont typeface="Times New Roman"/>
+              <a:buChar char="»"/>
+              <a:defRPr sz="2100" b="0" i="0" u="none" strike="noStrike" cap="none">
+                <a:solidFill>
+                  <a:schemeClr val="dk1"/>
+                </a:solidFill>
+                <a:latin typeface="Times New Roman"/>
+                <a:ea typeface="Times New Roman"/>
+                <a:cs typeface="Times New Roman"/>
+                <a:sym typeface="Times New Roman"/>
+              </a:defRPr>
+            </a:lvl8pPr>
+            <a:lvl9pPr marL="4114800" marR="0" lvl="8" indent="-361950" algn="l" rtl="0">
+              <a:lnSpc>
+                <a:spcPct val="100000"/>
+              </a:lnSpc>
+              <a:spcBef>
+                <a:spcPts val="420"/>
+              </a:spcBef>
+              <a:spcAft>
+                <a:spcPts val="0"/>
+              </a:spcAft>
+              <a:buClr>
+                <a:schemeClr val="dk1"/>
+              </a:buClr>
+              <a:buSzPts val="2100"/>
+              <a:buFont typeface="Times New Roman"/>
+              <a:buChar char="»"/>
+              <a:defRPr sz="2100" b="0" i="0" u="none" strike="noStrike" cap="none">
+                <a:solidFill>
+                  <a:schemeClr val="dk1"/>
+                </a:solidFill>
+                <a:latin typeface="Times New Roman"/>
+                <a:ea typeface="Times New Roman"/>
+                <a:cs typeface="Times New Roman"/>
+                <a:sym typeface="Times New Roman"/>
+              </a:defRPr>
+            </a:lvl9pPr>
+          </a:lstStyle>
+          <a:p>
+            <a:pPr marL="12700" indent="0">
+              <a:buFont typeface="Arial"/>
+              <a:buNone/>
+            </a:pPr>
+            <a:r>
+              <a:rPr lang="en-US" sz="1000" dirty="0">
+                <a:latin typeface="Consolas" panose="020B0609020204030204" pitchFamily="49" charset="0"/>
+              </a:rPr>
+              <a:t>Properties </a:t>
+            </a:r>
+            <a:r>
+              <a:rPr lang="en-US" sz="1000" dirty="0" err="1">
+                <a:latin typeface="Consolas" panose="020B0609020204030204" pitchFamily="49" charset="0"/>
+              </a:rPr>
+              <a:t>properties</a:t>
+            </a:r>
+            <a:r>
+              <a:rPr lang="en-US" sz="1000" dirty="0">
+                <a:latin typeface="Consolas" panose="020B0609020204030204" pitchFamily="49" charset="0"/>
+              </a:rPr>
+              <a:t> = new Properties();</a:t>
+            </a:r>
+          </a:p>
+          <a:p>
+            <a:pPr marL="12700" indent="0">
+              <a:buFont typeface="Arial"/>
+              <a:buNone/>
+            </a:pPr>
+            <a:r>
+              <a:rPr lang="en-US" sz="1000" dirty="0" err="1">
+                <a:latin typeface="Consolas" panose="020B0609020204030204" pitchFamily="49" charset="0"/>
+              </a:rPr>
+              <a:t>properties.put</a:t>
+            </a:r>
+            <a:r>
+              <a:rPr lang="en-US" sz="1000" dirty="0">
+                <a:latin typeface="Consolas" panose="020B0609020204030204" pitchFamily="49" charset="0"/>
+              </a:rPr>
+              <a:t>(</a:t>
+            </a:r>
+            <a:r>
+              <a:rPr lang="en-US" sz="1000" dirty="0" err="1">
+                <a:latin typeface="Consolas" panose="020B0609020204030204" pitchFamily="49" charset="0"/>
+              </a:rPr>
+              <a:t>ProducerConfig.BOOTSTRAP_SERVERS_CONFIG</a:t>
+            </a:r>
+            <a:r>
+              <a:rPr lang="en-US" sz="1000" dirty="0">
+                <a:latin typeface="Consolas" panose="020B0609020204030204" pitchFamily="49" charset="0"/>
+              </a:rPr>
+              <a:t>, "localhost:9092");</a:t>
+            </a:r>
+          </a:p>
+          <a:p>
+            <a:pPr marL="12700" indent="0">
+              <a:buFont typeface="Arial"/>
+              <a:buNone/>
+            </a:pPr>
+            <a:r>
+              <a:rPr lang="en-US" sz="1000" dirty="0" err="1">
+                <a:latin typeface="Consolas" panose="020B0609020204030204" pitchFamily="49" charset="0"/>
+              </a:rPr>
+              <a:t>properties.put</a:t>
+            </a:r>
+            <a:r>
+              <a:rPr lang="en-US" sz="1000" dirty="0">
+                <a:latin typeface="Consolas" panose="020B0609020204030204" pitchFamily="49" charset="0"/>
+              </a:rPr>
+              <a:t>(</a:t>
+            </a:r>
+            <a:r>
+              <a:rPr lang="en-US" sz="1000" dirty="0" err="1">
+                <a:latin typeface="Consolas" panose="020B0609020204030204" pitchFamily="49" charset="0"/>
+              </a:rPr>
+              <a:t>ProducerConfig.KEY_SERIALIZER_CLASS_CONFIG</a:t>
+            </a:r>
+            <a:r>
+              <a:rPr lang="en-US" sz="1000" dirty="0">
+                <a:latin typeface="Consolas" panose="020B0609020204030204" pitchFamily="49" charset="0"/>
+              </a:rPr>
+              <a:t>, </a:t>
+            </a:r>
+            <a:r>
+              <a:rPr lang="en-US" sz="1000" dirty="0" err="1">
+                <a:latin typeface="Consolas" panose="020B0609020204030204" pitchFamily="49" charset="0"/>
+              </a:rPr>
+              <a:t>StringSerializer.class</a:t>
+            </a:r>
+            <a:r>
+              <a:rPr lang="en-US" sz="1000" dirty="0">
+                <a:latin typeface="Consolas" panose="020B0609020204030204" pitchFamily="49" charset="0"/>
+              </a:rPr>
+              <a:t>);</a:t>
+            </a:r>
+          </a:p>
+          <a:p>
+            <a:pPr marL="12700" indent="0">
+              <a:buFont typeface="Arial"/>
+              <a:buNone/>
+            </a:pPr>
+            <a:r>
+              <a:rPr lang="en-US" sz="1000" b="1" dirty="0" err="1">
+                <a:latin typeface="Consolas" panose="020B0609020204030204" pitchFamily="49" charset="0"/>
+              </a:rPr>
+              <a:t>properties.put</a:t>
+            </a:r>
+            <a:r>
+              <a:rPr lang="en-US" sz="1000" b="1" dirty="0">
+                <a:latin typeface="Consolas" panose="020B0609020204030204" pitchFamily="49" charset="0"/>
+              </a:rPr>
+              <a:t>(</a:t>
+            </a:r>
+            <a:r>
+              <a:rPr lang="en-US" sz="1000" b="1" dirty="0" err="1">
+                <a:latin typeface="Consolas" panose="020B0609020204030204" pitchFamily="49" charset="0"/>
+              </a:rPr>
+              <a:t>ProducerConfig.VALUE_SERIALIZER_CLASS_CONFIG</a:t>
+            </a:r>
+            <a:r>
+              <a:rPr lang="en-US" sz="1000" b="1" dirty="0">
+                <a:latin typeface="Consolas" panose="020B0609020204030204" pitchFamily="49" charset="0"/>
+              </a:rPr>
+              <a:t>, </a:t>
+            </a:r>
+            <a:r>
+              <a:rPr lang="en-US" sz="1000" b="1" dirty="0" err="1">
+                <a:latin typeface="Consolas" panose="020B0609020204030204" pitchFamily="49" charset="0"/>
+              </a:rPr>
+              <a:t>KafkaProtobufSerializer.class</a:t>
+            </a:r>
+            <a:r>
+              <a:rPr lang="en-US" sz="1000" b="1" dirty="0">
+                <a:latin typeface="Consolas" panose="020B0609020204030204" pitchFamily="49" charset="0"/>
+              </a:rPr>
+              <a:t>);</a:t>
+            </a:r>
+          </a:p>
+          <a:p>
+            <a:pPr marL="12700" indent="0">
+              <a:buFont typeface="Arial"/>
+              <a:buNone/>
+            </a:pPr>
+            <a:r>
+              <a:rPr lang="en-US" sz="1000" b="1" dirty="0" err="1">
+                <a:latin typeface="Consolas" panose="020B0609020204030204" pitchFamily="49" charset="0"/>
+              </a:rPr>
+              <a:t>properties.put</a:t>
+            </a:r>
+            <a:r>
+              <a:rPr lang="en-US" sz="1000" b="1" dirty="0">
+                <a:latin typeface="Consolas" panose="020B0609020204030204" pitchFamily="49" charset="0"/>
+              </a:rPr>
+              <a:t>(</a:t>
+            </a:r>
+            <a:r>
+              <a:rPr lang="en-US" sz="1000" b="1" dirty="0" err="1">
+                <a:latin typeface="Consolas" panose="020B0609020204030204" pitchFamily="49" charset="0"/>
+              </a:rPr>
+              <a:t>KafkaProtobufSerializerConfig.SCHEMA_REGISTRY_URL_CONFIG</a:t>
+            </a:r>
+            <a:r>
+              <a:rPr lang="en-US" sz="1000" b="1" dirty="0">
+                <a:latin typeface="Consolas" panose="020B0609020204030204" pitchFamily="49" charset="0"/>
+              </a:rPr>
+              <a:t>, "http://localhost:8081");</a:t>
+            </a:r>
+          </a:p>
+          <a:p>
+            <a:pPr marL="12700" indent="0">
+              <a:buFont typeface="Arial"/>
+              <a:buNone/>
+            </a:pPr>
+            <a:endParaRPr lang="en-US" sz="1000" dirty="0">
+              <a:latin typeface="Consolas" panose="020B0609020204030204" pitchFamily="49" charset="0"/>
+            </a:endParaRPr>
+          </a:p>
+          <a:p>
+            <a:pPr marL="12700" indent="0">
+              <a:buFont typeface="Arial"/>
+              <a:buNone/>
+            </a:pPr>
+            <a:r>
+              <a:rPr lang="en-US" sz="1000" b="1" dirty="0" err="1">
+                <a:latin typeface="Consolas" panose="020B0609020204030204" pitchFamily="49" charset="0"/>
+              </a:rPr>
+              <a:t>properties.put</a:t>
+            </a:r>
+            <a:r>
+              <a:rPr lang="en-US" sz="1000" b="1" dirty="0">
+                <a:latin typeface="Consolas" panose="020B0609020204030204" pitchFamily="49" charset="0"/>
+              </a:rPr>
+              <a:t>("</a:t>
+            </a:r>
+            <a:r>
+              <a:rPr lang="en-US" sz="1000" b="1" dirty="0" err="1">
+                <a:latin typeface="Consolas" panose="020B0609020204030204" pitchFamily="49" charset="0"/>
+              </a:rPr>
+              <a:t>auto.register.schemas</a:t>
+            </a:r>
+            <a:r>
+              <a:rPr lang="en-US" sz="1000" b="1" dirty="0">
+                <a:latin typeface="Consolas" panose="020B0609020204030204" pitchFamily="49" charset="0"/>
+              </a:rPr>
+              <a:t>", false);</a:t>
+            </a:r>
+          </a:p>
+          <a:p>
+            <a:pPr marL="12700" indent="0">
+              <a:buFont typeface="Arial"/>
+              <a:buNone/>
+            </a:pPr>
+            <a:endParaRPr lang="en-US" sz="1000" dirty="0">
+              <a:latin typeface="Consolas" panose="020B0609020204030204" pitchFamily="49" charset="0"/>
+            </a:endParaRPr>
+          </a:p>
+          <a:p>
+            <a:pPr marL="12700" indent="0">
+              <a:buFont typeface="Arial"/>
+              <a:buNone/>
+            </a:pPr>
+            <a:r>
+              <a:rPr lang="en-US" sz="1000" dirty="0">
+                <a:latin typeface="Consolas" panose="020B0609020204030204" pitchFamily="49" charset="0"/>
+              </a:rPr>
+              <a:t>Producer&lt;String, </a:t>
+            </a:r>
+            <a:r>
+              <a:rPr lang="en-US" sz="1000" dirty="0" err="1">
+                <a:latin typeface="Consolas" panose="020B0609020204030204" pitchFamily="49" charset="0"/>
+              </a:rPr>
+              <a:t>SimpleMessage</a:t>
+            </a:r>
+            <a:r>
+              <a:rPr lang="en-US" sz="1000" dirty="0">
+                <a:latin typeface="Consolas" panose="020B0609020204030204" pitchFamily="49" charset="0"/>
+              </a:rPr>
+              <a:t>&gt; producer = new </a:t>
+            </a:r>
+            <a:r>
+              <a:rPr lang="en-US" sz="1000" dirty="0" err="1">
+                <a:latin typeface="Consolas" panose="020B0609020204030204" pitchFamily="49" charset="0"/>
+              </a:rPr>
+              <a:t>KafkaProducer</a:t>
+            </a:r>
+            <a:r>
+              <a:rPr lang="en-US" sz="1000" dirty="0">
+                <a:latin typeface="Consolas" panose="020B0609020204030204" pitchFamily="49" charset="0"/>
+              </a:rPr>
+              <a:t>&lt;&gt;(properties);</a:t>
+            </a:r>
+          </a:p>
+          <a:p>
+            <a:pPr marL="12700" indent="0">
+              <a:buFont typeface="Arial"/>
+              <a:buNone/>
+            </a:pPr>
+            <a:endParaRPr lang="en-US" sz="1000" dirty="0">
+              <a:latin typeface="Consolas" panose="020B0609020204030204" pitchFamily="49" charset="0"/>
+            </a:endParaRPr>
+          </a:p>
+          <a:p>
+            <a:pPr marL="12700" indent="0">
+              <a:buFont typeface="Arial"/>
+              <a:buNone/>
+            </a:pPr>
+            <a:r>
+              <a:rPr lang="en-US" sz="1000" dirty="0" err="1">
+                <a:latin typeface="Consolas" panose="020B0609020204030204" pitchFamily="49" charset="0"/>
+              </a:rPr>
+              <a:t>SimpleMessage</a:t>
+            </a:r>
+            <a:r>
+              <a:rPr lang="en-US" sz="1000" dirty="0">
+                <a:latin typeface="Consolas" panose="020B0609020204030204" pitchFamily="49" charset="0"/>
+              </a:rPr>
+              <a:t> </a:t>
+            </a:r>
+            <a:r>
+              <a:rPr lang="en-US" sz="1000" dirty="0" err="1">
+                <a:latin typeface="Consolas" panose="020B0609020204030204" pitchFamily="49" charset="0"/>
+              </a:rPr>
+              <a:t>simpleMessage</a:t>
+            </a:r>
+            <a:r>
+              <a:rPr lang="en-US" sz="1000" dirty="0">
+                <a:latin typeface="Consolas" panose="020B0609020204030204" pitchFamily="49" charset="0"/>
+              </a:rPr>
+              <a:t> = </a:t>
+            </a:r>
+            <a:r>
+              <a:rPr lang="en-US" sz="1000" dirty="0" err="1">
+                <a:latin typeface="Consolas" panose="020B0609020204030204" pitchFamily="49" charset="0"/>
+              </a:rPr>
+              <a:t>SimpleMessage.newBuilder</a:t>
+            </a:r>
+            <a:r>
+              <a:rPr lang="en-US" sz="1000" dirty="0">
+                <a:latin typeface="Consolas" panose="020B0609020204030204" pitchFamily="49" charset="0"/>
+              </a:rPr>
+              <a:t>()</a:t>
+            </a:r>
+          </a:p>
+          <a:p>
+            <a:pPr marL="12700" indent="0">
+              <a:buFont typeface="Arial"/>
+              <a:buNone/>
+            </a:pPr>
+            <a:r>
+              <a:rPr lang="en-US" sz="1000" dirty="0">
+                <a:latin typeface="Consolas" panose="020B0609020204030204" pitchFamily="49" charset="0"/>
+              </a:rPr>
+              <a:t>    	.</a:t>
+            </a:r>
+            <a:r>
+              <a:rPr lang="en-US" sz="1000" dirty="0" err="1">
+                <a:latin typeface="Consolas" panose="020B0609020204030204" pitchFamily="49" charset="0"/>
+              </a:rPr>
+              <a:t>setContent</a:t>
+            </a:r>
+            <a:r>
+              <a:rPr lang="en-US" sz="1000" dirty="0">
+                <a:latin typeface="Consolas" panose="020B0609020204030204" pitchFamily="49" charset="0"/>
+              </a:rPr>
+              <a:t>("Hello world")</a:t>
+            </a:r>
+          </a:p>
+          <a:p>
+            <a:pPr marL="12700" indent="0">
+              <a:buFont typeface="Arial"/>
+              <a:buNone/>
+            </a:pPr>
+            <a:r>
+              <a:rPr lang="en-US" sz="1000" dirty="0">
+                <a:latin typeface="Consolas" panose="020B0609020204030204" pitchFamily="49" charset="0"/>
+              </a:rPr>
+              <a:t>        .</a:t>
+            </a:r>
+            <a:r>
+              <a:rPr lang="en-US" sz="1000" dirty="0" err="1">
+                <a:latin typeface="Consolas" panose="020B0609020204030204" pitchFamily="49" charset="0"/>
+              </a:rPr>
+              <a:t>setDateTime</a:t>
+            </a:r>
+            <a:r>
+              <a:rPr lang="en-US" sz="1000" dirty="0">
+                <a:latin typeface="Consolas" panose="020B0609020204030204" pitchFamily="49" charset="0"/>
+              </a:rPr>
+              <a:t>(</a:t>
+            </a:r>
+            <a:r>
+              <a:rPr lang="en-US" sz="1000" dirty="0" err="1">
+                <a:latin typeface="Consolas" panose="020B0609020204030204" pitchFamily="49" charset="0"/>
+              </a:rPr>
+              <a:t>Instant.now</a:t>
+            </a:r>
+            <a:r>
+              <a:rPr lang="en-US" sz="1000" dirty="0">
+                <a:latin typeface="Consolas" panose="020B0609020204030204" pitchFamily="49" charset="0"/>
+              </a:rPr>
+              <a:t>().</a:t>
+            </a:r>
+            <a:r>
+              <a:rPr lang="en-US" sz="1000" dirty="0" err="1">
+                <a:latin typeface="Consolas" panose="020B0609020204030204" pitchFamily="49" charset="0"/>
+              </a:rPr>
+              <a:t>toString</a:t>
+            </a:r>
+            <a:r>
+              <a:rPr lang="en-US" sz="1000" dirty="0">
+                <a:latin typeface="Consolas" panose="020B0609020204030204" pitchFamily="49" charset="0"/>
+              </a:rPr>
+              <a:t>())</a:t>
+            </a:r>
+          </a:p>
+          <a:p>
+            <a:pPr marL="12700" indent="0">
+              <a:buFont typeface="Arial"/>
+              <a:buNone/>
+            </a:pPr>
+            <a:r>
+              <a:rPr lang="en-US" sz="1000" dirty="0">
+                <a:latin typeface="Consolas" panose="020B0609020204030204" pitchFamily="49" charset="0"/>
+              </a:rPr>
+              <a:t>        .build();</a:t>
+            </a:r>
+          </a:p>
+          <a:p>
+            <a:pPr marL="12700" indent="0">
+              <a:buFont typeface="Arial"/>
+              <a:buNone/>
+            </a:pPr>
+            <a:r>
+              <a:rPr lang="en-US" sz="1000" dirty="0">
+                <a:latin typeface="Consolas" panose="020B0609020204030204" pitchFamily="49" charset="0"/>
+              </a:rPr>
+              <a:t>				</a:t>
+            </a:r>
+          </a:p>
+          <a:p>
+            <a:pPr marL="12700" indent="0">
+              <a:buFont typeface="Arial"/>
+              <a:buNone/>
+            </a:pPr>
+            <a:r>
+              <a:rPr lang="en-US" sz="1000" dirty="0" err="1">
+                <a:latin typeface="Consolas" panose="020B0609020204030204" pitchFamily="49" charset="0"/>
+              </a:rPr>
+              <a:t>ProducerRecord</a:t>
+            </a:r>
+            <a:r>
+              <a:rPr lang="en-US" sz="1000" dirty="0">
+                <a:latin typeface="Consolas" panose="020B0609020204030204" pitchFamily="49" charset="0"/>
+              </a:rPr>
+              <a:t>&lt;String, </a:t>
+            </a:r>
+            <a:r>
+              <a:rPr lang="en-US" sz="1000" dirty="0" err="1">
+                <a:latin typeface="Consolas" panose="020B0609020204030204" pitchFamily="49" charset="0"/>
+              </a:rPr>
+              <a:t>SimpleMessage</a:t>
+            </a:r>
+            <a:r>
+              <a:rPr lang="en-US" sz="1000" dirty="0">
+                <a:latin typeface="Consolas" panose="020B0609020204030204" pitchFamily="49" charset="0"/>
+              </a:rPr>
+              <a:t>&gt; record = new </a:t>
+            </a:r>
+            <a:r>
+              <a:rPr lang="en-US" sz="1000" dirty="0" err="1">
+                <a:latin typeface="Consolas" panose="020B0609020204030204" pitchFamily="49" charset="0"/>
+              </a:rPr>
+              <a:t>ProducerRecord</a:t>
+            </a:r>
+            <a:r>
+              <a:rPr lang="en-US" sz="1000" dirty="0">
+                <a:latin typeface="Consolas" panose="020B0609020204030204" pitchFamily="49" charset="0"/>
+              </a:rPr>
+              <a:t>&lt;&gt;("</a:t>
+            </a:r>
+            <a:r>
+              <a:rPr lang="en-US" sz="1000" dirty="0" err="1">
+                <a:latin typeface="Consolas" panose="020B0609020204030204" pitchFamily="49" charset="0"/>
+              </a:rPr>
+              <a:t>protobuf</a:t>
+            </a:r>
+            <a:r>
+              <a:rPr lang="en-US" sz="1000" dirty="0">
+                <a:latin typeface="Consolas" panose="020B0609020204030204" pitchFamily="49" charset="0"/>
+              </a:rPr>
+              <a:t>-topic", null, </a:t>
+            </a:r>
+            <a:r>
+              <a:rPr lang="en-US" sz="1000" dirty="0" err="1">
+                <a:latin typeface="Consolas" panose="020B0609020204030204" pitchFamily="49" charset="0"/>
+              </a:rPr>
+              <a:t>simpleMessage</a:t>
+            </a:r>
+            <a:r>
+              <a:rPr lang="en-US" sz="1000" dirty="0">
+                <a:latin typeface="Consolas" panose="020B0609020204030204" pitchFamily="49" charset="0"/>
+              </a:rPr>
+              <a:t>);	</a:t>
+            </a:r>
+          </a:p>
+          <a:p>
+            <a:pPr marL="12700" indent="0">
+              <a:buFont typeface="Arial"/>
+              <a:buNone/>
+            </a:pPr>
+            <a:r>
+              <a:rPr lang="en-US" sz="1000" dirty="0" err="1">
+                <a:latin typeface="Consolas" panose="020B0609020204030204" pitchFamily="49" charset="0"/>
+              </a:rPr>
+              <a:t>producer.send</a:t>
+            </a:r>
+            <a:r>
+              <a:rPr lang="en-US" sz="1000" dirty="0">
+                <a:latin typeface="Consolas" panose="020B0609020204030204" pitchFamily="49" charset="0"/>
+              </a:rPr>
+              <a:t>(record);</a:t>
+            </a:r>
+          </a:p>
+          <a:p>
+            <a:pPr marL="12700" indent="0">
+              <a:buFont typeface="Arial"/>
+              <a:buNone/>
+            </a:pPr>
+            <a:r>
+              <a:rPr lang="en-US" sz="1000" dirty="0" err="1">
+                <a:latin typeface="Consolas" panose="020B0609020204030204" pitchFamily="49" charset="0"/>
+              </a:rPr>
+              <a:t>producer.flush</a:t>
+            </a:r>
+            <a:r>
+              <a:rPr lang="en-US" sz="1000" dirty="0">
+                <a:latin typeface="Consolas" panose="020B0609020204030204" pitchFamily="49" charset="0"/>
+              </a:rPr>
+              <a:t>();</a:t>
+            </a:r>
+          </a:p>
+          <a:p>
+            <a:pPr marL="12700" indent="0">
+              <a:buFont typeface="Arial"/>
+              <a:buNone/>
+            </a:pPr>
+            <a:r>
+              <a:rPr lang="en-US" sz="1000" dirty="0" err="1">
+                <a:latin typeface="Consolas" panose="020B0609020204030204" pitchFamily="49" charset="0"/>
+              </a:rPr>
+              <a:t>producer.close</a:t>
+            </a:r>
+            <a:r>
+              <a:rPr lang="en-US" sz="1000" dirty="0">
+                <a:latin typeface="Consolas" panose="020B0609020204030204" pitchFamily="49" charset="0"/>
+              </a:rPr>
+              <a:t>();</a:t>
+            </a:r>
+          </a:p>
+        </p:txBody>
+      </p:sp>
+      <p:sp>
+        <p:nvSpPr>
+          <p:cNvPr id="8" name="Pil: venstre 7">
+            <a:extLst>
+              <a:ext uri="{FF2B5EF4-FFF2-40B4-BE49-F238E27FC236}">
+                <a16:creationId xmlns:a16="http://schemas.microsoft.com/office/drawing/2014/main" id="{CE66EFFD-2F4E-5B48-BCE9-8F9FDC4B8942}"/>
+              </a:ext>
+            </a:extLst>
+          </p:cNvPr>
+          <p:cNvSpPr/>
+          <p:nvPr/>
+        </p:nvSpPr>
+        <p:spPr>
+          <a:xfrm rot="2213185">
+            <a:off x="6332751" y="3729901"/>
+            <a:ext cx="3032405" cy="484632"/>
+          </a:xfrm>
+          <a:prstGeom prst="leftArrow">
+            <a:avLst/>
+          </a:prstGeom>
+        </p:spPr>
+        <p:style>
+          <a:lnRef idx="2">
+            <a:schemeClr val="accent1">
+              <a:shade val="15000"/>
+            </a:schemeClr>
+          </a:lnRef>
+          <a:fillRef idx="1">
+            <a:schemeClr val="accent1"/>
+          </a:fillRef>
+          <a:effectRef idx="0">
+            <a:schemeClr val="accent1"/>
+          </a:effectRef>
+          <a:fontRef idx="minor">
+            <a:schemeClr val="lt1"/>
+          </a:fontRef>
+        </p:style>
+        <p:txBody>
+          <a:bodyPr rtlCol="0" anchor="ctr"/>
+          <a:lstStyle/>
+          <a:p>
+            <a:pPr algn="ctr"/>
+            <a:r>
+              <a:rPr lang="da-DK" dirty="0" err="1"/>
+              <a:t>Serializer</a:t>
+            </a:r>
+            <a:r>
+              <a:rPr lang="da-DK" dirty="0"/>
+              <a:t> and pointer to </a:t>
+            </a:r>
+            <a:r>
+              <a:rPr lang="da-DK" dirty="0" err="1"/>
+              <a:t>registry</a:t>
+            </a:r>
+            <a:endParaRPr lang="en-US" dirty="0"/>
+          </a:p>
+        </p:txBody>
+      </p:sp>
+      <p:sp>
+        <p:nvSpPr>
+          <p:cNvPr id="10" name="Pil: venstre 9">
+            <a:extLst>
+              <a:ext uri="{FF2B5EF4-FFF2-40B4-BE49-F238E27FC236}">
+                <a16:creationId xmlns:a16="http://schemas.microsoft.com/office/drawing/2014/main" id="{2A9DB850-CB78-B276-9540-7577F9CF286E}"/>
+              </a:ext>
+            </a:extLst>
+          </p:cNvPr>
+          <p:cNvSpPr/>
+          <p:nvPr/>
+        </p:nvSpPr>
+        <p:spPr>
+          <a:xfrm rot="1488253">
+            <a:off x="3645016" y="3863207"/>
+            <a:ext cx="3263434" cy="484632"/>
+          </a:xfrm>
+          <a:prstGeom prst="leftArrow">
+            <a:avLst/>
+          </a:prstGeom>
+        </p:spPr>
+        <p:style>
+          <a:lnRef idx="2">
+            <a:schemeClr val="accent1">
+              <a:shade val="15000"/>
+            </a:schemeClr>
+          </a:lnRef>
+          <a:fillRef idx="1">
+            <a:schemeClr val="accent1"/>
+          </a:fillRef>
+          <a:effectRef idx="0">
+            <a:schemeClr val="accent1"/>
+          </a:effectRef>
+          <a:fontRef idx="minor">
+            <a:schemeClr val="lt1"/>
+          </a:fontRef>
+        </p:style>
+        <p:txBody>
+          <a:bodyPr rtlCol="0" anchor="ctr"/>
+          <a:lstStyle/>
+          <a:p>
+            <a:pPr algn="ctr"/>
+            <a:r>
+              <a:rPr lang="da-DK" dirty="0"/>
+              <a:t>Register </a:t>
+            </a:r>
+            <a:r>
+              <a:rPr lang="da-DK" dirty="0" err="1"/>
+              <a:t>schema</a:t>
+            </a:r>
+            <a:r>
+              <a:rPr lang="da-DK" dirty="0"/>
+              <a:t> </a:t>
+            </a:r>
+            <a:r>
+              <a:rPr lang="da-DK" dirty="0" err="1"/>
+              <a:t>if</a:t>
+            </a:r>
+            <a:r>
+              <a:rPr lang="da-DK" dirty="0"/>
+              <a:t> it </a:t>
+            </a:r>
+            <a:r>
+              <a:rPr lang="da-DK" dirty="0" err="1"/>
+              <a:t>does</a:t>
+            </a:r>
+            <a:r>
+              <a:rPr lang="da-DK" dirty="0"/>
+              <a:t> not </a:t>
+            </a:r>
+            <a:r>
+              <a:rPr lang="da-DK" dirty="0" err="1"/>
+              <a:t>exist</a:t>
+            </a:r>
+            <a:endParaRPr lang="en-US" dirty="0"/>
+          </a:p>
+        </p:txBody>
+      </p:sp>
+    </p:spTree>
+    <p:extLst>
+      <p:ext uri="{BB962C8B-B14F-4D97-AF65-F5344CB8AC3E}">
+        <p14:creationId xmlns:p14="http://schemas.microsoft.com/office/powerpoint/2010/main" val="4106370318"/>
+      </p:ext>
+    </p:extLst>
+  </p:cSld>
+  <p:clrMapOvr>
+    <a:masterClrMapping/>
+  </p:clrMapOvr>
+</p:sld>
+</file>
+
+<file path=ppt/slides/slide7.xml><?xml version="1.0" encoding="utf-8"?>
+<p:sld xmlns:a="http://schemas.openxmlformats.org/drawingml/2006/main" xmlns:r="http://schemas.openxmlformats.org/officeDocument/2006/relationships" xmlns:p="http://schemas.openxmlformats.org/presentationml/2006/main">
+  <p:cSld>
+    <p:spTree>
+      <p:nvGrpSpPr>
+        <p:cNvPr id="1" name=""/>
+        <p:cNvGrpSpPr/>
+        <p:nvPr/>
+      </p:nvGrpSpPr>
+      <p:grpSpPr>
+        <a:xfrm>
+          <a:off x="0" y="0"/>
+          <a:ext cx="0" cy="0"/>
+          <a:chOff x="0" y="0"/>
+          <a:chExt cx="0" cy="0"/>
+        </a:xfrm>
+      </p:grpSpPr>
+      <p:sp>
+        <p:nvSpPr>
+          <p:cNvPr id="2" name="Titel 1">
+            <a:extLst>
+              <a:ext uri="{FF2B5EF4-FFF2-40B4-BE49-F238E27FC236}">
+                <a16:creationId xmlns:a16="http://schemas.microsoft.com/office/drawing/2014/main" id="{46D53518-2CD0-474C-E35C-1F06C27C3826}"/>
+              </a:ext>
+            </a:extLst>
+          </p:cNvPr>
+          <p:cNvSpPr>
+            <a:spLocks noGrp="1"/>
+          </p:cNvSpPr>
+          <p:nvPr>
+            <p:ph type="title"/>
+          </p:nvPr>
+        </p:nvSpPr>
+        <p:spPr/>
+        <p:txBody>
+          <a:bodyPr/>
+          <a:lstStyle/>
+          <a:p>
+            <a:r>
+              <a:rPr lang="da-DK" dirty="0"/>
+              <a:t>Writing </a:t>
+            </a:r>
+            <a:r>
+              <a:rPr lang="da-DK" dirty="0" err="1"/>
+              <a:t>consumer</a:t>
+            </a:r>
+            <a:endParaRPr lang="en-US" dirty="0"/>
+          </a:p>
+        </p:txBody>
+      </p:sp>
+      <p:sp>
+        <p:nvSpPr>
+          <p:cNvPr id="4" name="Pladsholder til tekst 2">
+            <a:extLst>
+              <a:ext uri="{FF2B5EF4-FFF2-40B4-BE49-F238E27FC236}">
+                <a16:creationId xmlns:a16="http://schemas.microsoft.com/office/drawing/2014/main" id="{1B8446E8-F0C7-3440-78BB-C463D9A521A0}"/>
+              </a:ext>
+            </a:extLst>
+          </p:cNvPr>
+          <p:cNvSpPr txBox="1">
+            <a:spLocks/>
+          </p:cNvSpPr>
+          <p:nvPr/>
+        </p:nvSpPr>
+        <p:spPr>
+          <a:xfrm>
+            <a:off x="304736" y="988773"/>
+            <a:ext cx="9020331" cy="5229148"/>
+          </a:xfrm>
+          <a:prstGeom prst="rect">
+            <a:avLst/>
+          </a:prstGeom>
+        </p:spPr>
+        <p:style>
+          <a:lnRef idx="1">
+            <a:schemeClr val="dk1"/>
+          </a:lnRef>
+          <a:fillRef idx="2">
+            <a:schemeClr val="dk1"/>
+          </a:fillRef>
+          <a:effectRef idx="1">
+            <a:schemeClr val="dk1"/>
+          </a:effectRef>
+          <a:fontRef idx="minor">
+            <a:schemeClr val="dk1"/>
+          </a:fontRef>
+        </p:style>
+        <p:txBody>
+          <a:bodyPr spcFirstLastPara="1" wrap="square" lIns="91425" tIns="91425" rIns="91425" bIns="91425" anchor="t" anchorCtr="0">
+            <a:noAutofit/>
+          </a:bodyPr>
+          <a:lstStyle>
+            <a:defPPr marR="0" lvl="0" algn="l" rtl="0">
+              <a:lnSpc>
+                <a:spcPct val="100000"/>
+              </a:lnSpc>
+              <a:spcBef>
+                <a:spcPts val="0"/>
+              </a:spcBef>
+              <a:spcAft>
+                <a:spcPts val="0"/>
+              </a:spcAft>
+            </a:defPPr>
+            <a:lvl1pPr marL="457200" marR="0" lvl="0" indent="-444500" algn="l" rtl="0">
+              <a:lnSpc>
+                <a:spcPct val="100000"/>
+              </a:lnSpc>
+              <a:spcBef>
+                <a:spcPts val="680"/>
+              </a:spcBef>
+              <a:spcAft>
+                <a:spcPts val="0"/>
+              </a:spcAft>
+              <a:buClr>
+                <a:schemeClr val="dk1"/>
+              </a:buClr>
+              <a:buSzPts val="3400"/>
+              <a:buFont typeface="Arial"/>
+              <a:buChar char="•"/>
+              <a:defRPr sz="3400" b="0" i="0" u="none" strike="noStrike" cap="none">
+                <a:solidFill>
+                  <a:schemeClr val="dk1"/>
+                </a:solidFill>
+                <a:latin typeface="Arial"/>
+                <a:ea typeface="Arial"/>
+                <a:cs typeface="Arial"/>
+                <a:sym typeface="Arial"/>
+              </a:defRPr>
+            </a:lvl1pPr>
+            <a:lvl2pPr marL="914400" marR="0" lvl="1" indent="-419100" algn="l" rtl="0">
+              <a:lnSpc>
+                <a:spcPct val="100000"/>
+              </a:lnSpc>
+              <a:spcBef>
+                <a:spcPts val="600"/>
+              </a:spcBef>
+              <a:spcAft>
+                <a:spcPts val="0"/>
+              </a:spcAft>
+              <a:buClr>
+                <a:schemeClr val="dk1"/>
+              </a:buClr>
+              <a:buSzPts val="3000"/>
+              <a:buFont typeface="Arial"/>
+              <a:buChar char="–"/>
+              <a:defRPr sz="3000" b="0" i="0" u="none" strike="noStrike" cap="none">
+                <a:solidFill>
+                  <a:schemeClr val="dk1"/>
+                </a:solidFill>
+                <a:latin typeface="Arial"/>
+                <a:ea typeface="Arial"/>
+                <a:cs typeface="Arial"/>
+                <a:sym typeface="Arial"/>
+              </a:defRPr>
+            </a:lvl2pPr>
+            <a:lvl3pPr marL="1371600" marR="0" lvl="2" indent="-387350" algn="l" rtl="0">
+              <a:lnSpc>
+                <a:spcPct val="100000"/>
+              </a:lnSpc>
+              <a:spcBef>
+                <a:spcPts val="500"/>
+              </a:spcBef>
+              <a:spcAft>
+                <a:spcPts val="0"/>
+              </a:spcAft>
+              <a:buClr>
+                <a:schemeClr val="dk1"/>
+              </a:buClr>
+              <a:buSzPts val="2500"/>
+              <a:buFont typeface="Arial"/>
+              <a:buChar char="•"/>
+              <a:defRPr sz="2500" b="0" i="0" u="none" strike="noStrike" cap="none">
+                <a:solidFill>
+                  <a:schemeClr val="dk1"/>
+                </a:solidFill>
+                <a:latin typeface="Arial"/>
+                <a:ea typeface="Arial"/>
+                <a:cs typeface="Arial"/>
+                <a:sym typeface="Arial"/>
+              </a:defRPr>
+            </a:lvl3pPr>
+            <a:lvl4pPr marL="1828800" marR="0" lvl="3" indent="-361950" algn="l" rtl="0">
+              <a:lnSpc>
+                <a:spcPct val="100000"/>
+              </a:lnSpc>
+              <a:spcBef>
+                <a:spcPts val="420"/>
+              </a:spcBef>
+              <a:spcAft>
+                <a:spcPts val="0"/>
+              </a:spcAft>
+              <a:buClr>
+                <a:schemeClr val="dk1"/>
+              </a:buClr>
+              <a:buSzPts val="2100"/>
+              <a:buFont typeface="Arial"/>
+              <a:buChar char="–"/>
+              <a:defRPr sz="2100" b="0" i="0" u="none" strike="noStrike" cap="none">
+                <a:solidFill>
+                  <a:schemeClr val="dk1"/>
+                </a:solidFill>
+                <a:latin typeface="Arial"/>
+                <a:ea typeface="Arial"/>
+                <a:cs typeface="Arial"/>
+                <a:sym typeface="Arial"/>
+              </a:defRPr>
+            </a:lvl4pPr>
+            <a:lvl5pPr marL="2286000" marR="0" lvl="4" indent="-361950" algn="l" rtl="0">
+              <a:lnSpc>
+                <a:spcPct val="100000"/>
+              </a:lnSpc>
+              <a:spcBef>
+                <a:spcPts val="420"/>
+              </a:spcBef>
+              <a:spcAft>
+                <a:spcPts val="0"/>
+              </a:spcAft>
+              <a:buClr>
+                <a:schemeClr val="dk1"/>
+              </a:buClr>
+              <a:buSzPts val="2100"/>
+              <a:buFont typeface="Arial"/>
+              <a:buChar char="»"/>
+              <a:defRPr sz="2100" b="0" i="0" u="none" strike="noStrike" cap="none">
+                <a:solidFill>
+                  <a:schemeClr val="dk1"/>
+                </a:solidFill>
+                <a:latin typeface="Arial"/>
+                <a:ea typeface="Arial"/>
+                <a:cs typeface="Arial"/>
+                <a:sym typeface="Arial"/>
+              </a:defRPr>
+            </a:lvl5pPr>
+            <a:lvl6pPr marL="2743200" marR="0" lvl="5" indent="-361950" algn="l" rtl="0">
+              <a:lnSpc>
+                <a:spcPct val="100000"/>
+              </a:lnSpc>
+              <a:spcBef>
+                <a:spcPts val="420"/>
+              </a:spcBef>
+              <a:spcAft>
+                <a:spcPts val="0"/>
+              </a:spcAft>
+              <a:buClr>
+                <a:schemeClr val="dk1"/>
+              </a:buClr>
+              <a:buSzPts val="2100"/>
+              <a:buFont typeface="Times New Roman"/>
+              <a:buChar char="»"/>
+              <a:defRPr sz="2100" b="0" i="0" u="none" strike="noStrike" cap="none">
+                <a:solidFill>
+                  <a:schemeClr val="dk1"/>
+                </a:solidFill>
+                <a:latin typeface="Times New Roman"/>
+                <a:ea typeface="Times New Roman"/>
+                <a:cs typeface="Times New Roman"/>
+                <a:sym typeface="Times New Roman"/>
+              </a:defRPr>
+            </a:lvl6pPr>
+            <a:lvl7pPr marL="3200400" marR="0" lvl="6" indent="-361950" algn="l" rtl="0">
+              <a:lnSpc>
+                <a:spcPct val="100000"/>
+              </a:lnSpc>
+              <a:spcBef>
+                <a:spcPts val="420"/>
+              </a:spcBef>
+              <a:spcAft>
+                <a:spcPts val="0"/>
+              </a:spcAft>
+              <a:buClr>
+                <a:schemeClr val="dk1"/>
+              </a:buClr>
+              <a:buSzPts val="2100"/>
+              <a:buFont typeface="Times New Roman"/>
+              <a:buChar char="»"/>
+              <a:defRPr sz="2100" b="0" i="0" u="none" strike="noStrike" cap="none">
+                <a:solidFill>
+                  <a:schemeClr val="dk1"/>
+                </a:solidFill>
+                <a:latin typeface="Times New Roman"/>
+                <a:ea typeface="Times New Roman"/>
+                <a:cs typeface="Times New Roman"/>
+                <a:sym typeface="Times New Roman"/>
+              </a:defRPr>
+            </a:lvl7pPr>
+            <a:lvl8pPr marL="3657600" marR="0" lvl="7" indent="-361950" algn="l" rtl="0">
+              <a:lnSpc>
+                <a:spcPct val="100000"/>
+              </a:lnSpc>
+              <a:spcBef>
+                <a:spcPts val="420"/>
+              </a:spcBef>
+              <a:spcAft>
+                <a:spcPts val="0"/>
+              </a:spcAft>
+              <a:buClr>
+                <a:schemeClr val="dk1"/>
+              </a:buClr>
+              <a:buSzPts val="2100"/>
+              <a:buFont typeface="Times New Roman"/>
+              <a:buChar char="»"/>
+              <a:defRPr sz="2100" b="0" i="0" u="none" strike="noStrike" cap="none">
+                <a:solidFill>
+                  <a:schemeClr val="dk1"/>
+                </a:solidFill>
+                <a:latin typeface="Times New Roman"/>
+                <a:ea typeface="Times New Roman"/>
+                <a:cs typeface="Times New Roman"/>
+                <a:sym typeface="Times New Roman"/>
+              </a:defRPr>
+            </a:lvl8pPr>
+            <a:lvl9pPr marL="4114800" marR="0" lvl="8" indent="-361950" algn="l" rtl="0">
+              <a:lnSpc>
+                <a:spcPct val="100000"/>
+              </a:lnSpc>
+              <a:spcBef>
+                <a:spcPts val="420"/>
+              </a:spcBef>
+              <a:spcAft>
+                <a:spcPts val="0"/>
+              </a:spcAft>
+              <a:buClr>
+                <a:schemeClr val="dk1"/>
+              </a:buClr>
+              <a:buSzPts val="2100"/>
+              <a:buFont typeface="Times New Roman"/>
+              <a:buChar char="»"/>
+              <a:defRPr sz="2100" b="0" i="0" u="none" strike="noStrike" cap="none">
+                <a:solidFill>
+                  <a:schemeClr val="dk1"/>
+                </a:solidFill>
+                <a:latin typeface="Times New Roman"/>
+                <a:ea typeface="Times New Roman"/>
+                <a:cs typeface="Times New Roman"/>
+                <a:sym typeface="Times New Roman"/>
+              </a:defRPr>
+            </a:lvl9pPr>
+          </a:lstStyle>
+          <a:p>
+            <a:pPr marL="12700" indent="0">
+              <a:buFont typeface="Arial"/>
+              <a:buNone/>
+            </a:pPr>
+            <a:r>
+              <a:rPr lang="en-US" sz="1000" dirty="0">
+                <a:latin typeface="Consolas" panose="020B0609020204030204" pitchFamily="49" charset="0"/>
+              </a:rPr>
+              <a:t>Properties </a:t>
+            </a:r>
+            <a:r>
+              <a:rPr lang="en-US" sz="1000" dirty="0" err="1">
+                <a:latin typeface="Consolas" panose="020B0609020204030204" pitchFamily="49" charset="0"/>
+              </a:rPr>
+              <a:t>properties</a:t>
+            </a:r>
+            <a:r>
+              <a:rPr lang="en-US" sz="1000" dirty="0">
+                <a:latin typeface="Consolas" panose="020B0609020204030204" pitchFamily="49" charset="0"/>
+              </a:rPr>
+              <a:t> = new Properties();</a:t>
+            </a:r>
+          </a:p>
+          <a:p>
+            <a:pPr marL="12700" indent="0">
+              <a:buFont typeface="Arial"/>
+              <a:buNone/>
+            </a:pPr>
+            <a:r>
+              <a:rPr lang="en-US" sz="1000" dirty="0" err="1">
+                <a:latin typeface="Consolas" panose="020B0609020204030204" pitchFamily="49" charset="0"/>
+              </a:rPr>
+              <a:t>properties.put</a:t>
+            </a:r>
+            <a:r>
+              <a:rPr lang="en-US" sz="1000" dirty="0">
+                <a:latin typeface="Consolas" panose="020B0609020204030204" pitchFamily="49" charset="0"/>
+              </a:rPr>
+              <a:t>(</a:t>
+            </a:r>
+            <a:r>
+              <a:rPr lang="en-US" sz="1000" dirty="0" err="1">
+                <a:latin typeface="Consolas" panose="020B0609020204030204" pitchFamily="49" charset="0"/>
+              </a:rPr>
+              <a:t>ProducerConfig.BOOTSTRAP_SERVERS_CONFIG</a:t>
+            </a:r>
+            <a:r>
+              <a:rPr lang="en-US" sz="1000" dirty="0">
+                <a:latin typeface="Consolas" panose="020B0609020204030204" pitchFamily="49" charset="0"/>
+              </a:rPr>
+              <a:t>, "localhost:9092");</a:t>
+            </a:r>
+          </a:p>
+          <a:p>
+            <a:pPr marL="12700" indent="0">
+              <a:buFont typeface="Arial"/>
+              <a:buNone/>
+            </a:pPr>
+            <a:r>
+              <a:rPr lang="en-US" sz="1000" dirty="0" err="1">
+                <a:latin typeface="Consolas" panose="020B0609020204030204" pitchFamily="49" charset="0"/>
+              </a:rPr>
+              <a:t>properties.put</a:t>
+            </a:r>
+            <a:r>
+              <a:rPr lang="en-US" sz="1000" dirty="0">
+                <a:latin typeface="Consolas" panose="020B0609020204030204" pitchFamily="49" charset="0"/>
+              </a:rPr>
+              <a:t>(</a:t>
+            </a:r>
+            <a:r>
+              <a:rPr lang="en-US" sz="1000" dirty="0" err="1">
+                <a:latin typeface="Consolas" panose="020B0609020204030204" pitchFamily="49" charset="0"/>
+              </a:rPr>
+              <a:t>ConsumerConfig.GROUP_ID_CONFIG</a:t>
+            </a:r>
+            <a:r>
+              <a:rPr lang="en-US" sz="1000" dirty="0">
+                <a:latin typeface="Consolas" panose="020B0609020204030204" pitchFamily="49" charset="0"/>
+              </a:rPr>
+              <a:t>, "</a:t>
+            </a:r>
+            <a:r>
+              <a:rPr lang="en-US" sz="1000" dirty="0" err="1">
+                <a:latin typeface="Consolas" panose="020B0609020204030204" pitchFamily="49" charset="0"/>
+              </a:rPr>
+              <a:t>protobuf</a:t>
+            </a:r>
+            <a:r>
+              <a:rPr lang="en-US" sz="1000" dirty="0">
+                <a:latin typeface="Consolas" panose="020B0609020204030204" pitchFamily="49" charset="0"/>
+              </a:rPr>
+              <a:t>-consumer-group");      </a:t>
+            </a:r>
+          </a:p>
+          <a:p>
+            <a:pPr marL="12700" indent="0">
+              <a:buFont typeface="Arial"/>
+              <a:buNone/>
+            </a:pPr>
+            <a:r>
+              <a:rPr lang="en-US" sz="1000" dirty="0" err="1">
+                <a:latin typeface="Consolas" panose="020B0609020204030204" pitchFamily="49" charset="0"/>
+              </a:rPr>
+              <a:t>properties.put</a:t>
+            </a:r>
+            <a:r>
+              <a:rPr lang="en-US" sz="1000" dirty="0">
+                <a:latin typeface="Consolas" panose="020B0609020204030204" pitchFamily="49" charset="0"/>
+              </a:rPr>
+              <a:t>(</a:t>
+            </a:r>
+            <a:r>
+              <a:rPr lang="en-US" sz="1000" dirty="0" err="1">
+                <a:latin typeface="Consolas" panose="020B0609020204030204" pitchFamily="49" charset="0"/>
+              </a:rPr>
+              <a:t>ConsumerConfig.AUTO_OFFSET_RESET_CONFIG</a:t>
+            </a:r>
+            <a:r>
+              <a:rPr lang="en-US" sz="1000" dirty="0">
+                <a:latin typeface="Consolas" panose="020B0609020204030204" pitchFamily="49" charset="0"/>
+              </a:rPr>
+              <a:t>, "earliest");</a:t>
+            </a:r>
+          </a:p>
+          <a:p>
+            <a:pPr marL="12700" indent="0">
+              <a:buFont typeface="Arial"/>
+              <a:buNone/>
+            </a:pPr>
+            <a:r>
+              <a:rPr lang="en-US" sz="1000" dirty="0" err="1">
+                <a:latin typeface="Consolas" panose="020B0609020204030204" pitchFamily="49" charset="0"/>
+              </a:rPr>
+              <a:t>properties.put</a:t>
+            </a:r>
+            <a:r>
+              <a:rPr lang="en-US" sz="1000" dirty="0">
+                <a:latin typeface="Consolas" panose="020B0609020204030204" pitchFamily="49" charset="0"/>
+              </a:rPr>
+              <a:t>(</a:t>
+            </a:r>
+            <a:r>
+              <a:rPr lang="en-US" sz="1000" dirty="0" err="1">
+                <a:latin typeface="Consolas" panose="020B0609020204030204" pitchFamily="49" charset="0"/>
+              </a:rPr>
+              <a:t>ConsumerConfig.ENABLE_AUTO_COMMIT_CONFIG</a:t>
+            </a:r>
+            <a:r>
+              <a:rPr lang="en-US" sz="1000" dirty="0">
+                <a:latin typeface="Consolas" panose="020B0609020204030204" pitchFamily="49" charset="0"/>
+              </a:rPr>
+              <a:t>, false);</a:t>
+            </a:r>
+          </a:p>
+          <a:p>
+            <a:pPr marL="12700" indent="0">
+              <a:buFont typeface="Arial"/>
+              <a:buNone/>
+            </a:pPr>
+            <a:endParaRPr lang="en-US" sz="1000" dirty="0">
+              <a:latin typeface="Consolas" panose="020B0609020204030204" pitchFamily="49" charset="0"/>
+            </a:endParaRPr>
+          </a:p>
+          <a:p>
+            <a:pPr marL="12700" indent="0">
+              <a:buFont typeface="Arial"/>
+              <a:buNone/>
+            </a:pPr>
+            <a:r>
+              <a:rPr lang="en-US" sz="1000" dirty="0" err="1">
+                <a:latin typeface="Consolas" panose="020B0609020204030204" pitchFamily="49" charset="0"/>
+              </a:rPr>
+              <a:t>properties.put</a:t>
+            </a:r>
+            <a:r>
+              <a:rPr lang="en-US" sz="1000" dirty="0">
+                <a:latin typeface="Consolas" panose="020B0609020204030204" pitchFamily="49" charset="0"/>
+              </a:rPr>
+              <a:t>(</a:t>
+            </a:r>
+            <a:r>
+              <a:rPr lang="en-US" sz="1000" dirty="0" err="1">
+                <a:latin typeface="Consolas" panose="020B0609020204030204" pitchFamily="49" charset="0"/>
+              </a:rPr>
+              <a:t>ConsumerConfig.KEY_DESERIALIZER_CLASS_CONFIG</a:t>
+            </a:r>
+            <a:r>
+              <a:rPr lang="en-US" sz="1000" dirty="0">
+                <a:latin typeface="Consolas" panose="020B0609020204030204" pitchFamily="49" charset="0"/>
+              </a:rPr>
+              <a:t>, </a:t>
+            </a:r>
+            <a:r>
+              <a:rPr lang="en-US" sz="1000" dirty="0" err="1">
+                <a:latin typeface="Consolas" panose="020B0609020204030204" pitchFamily="49" charset="0"/>
+              </a:rPr>
+              <a:t>StringDeserializer.class</a:t>
+            </a:r>
+            <a:r>
+              <a:rPr lang="en-US" sz="1000" dirty="0">
+                <a:latin typeface="Consolas" panose="020B0609020204030204" pitchFamily="49" charset="0"/>
+              </a:rPr>
+              <a:t>);</a:t>
+            </a:r>
+          </a:p>
+          <a:p>
+            <a:pPr marL="12700" indent="0">
+              <a:buFont typeface="Arial"/>
+              <a:buNone/>
+            </a:pPr>
+            <a:r>
+              <a:rPr lang="en-US" sz="1000" b="1" dirty="0" err="1">
+                <a:latin typeface="Consolas" panose="020B0609020204030204" pitchFamily="49" charset="0"/>
+              </a:rPr>
+              <a:t>properties.put</a:t>
+            </a:r>
+            <a:r>
+              <a:rPr lang="en-US" sz="1000" b="1" dirty="0">
+                <a:latin typeface="Consolas" panose="020B0609020204030204" pitchFamily="49" charset="0"/>
+              </a:rPr>
+              <a:t>(</a:t>
+            </a:r>
+            <a:r>
+              <a:rPr lang="en-US" sz="1000" b="1" dirty="0" err="1">
+                <a:latin typeface="Consolas" panose="020B0609020204030204" pitchFamily="49" charset="0"/>
+              </a:rPr>
+              <a:t>ConsumerConfig.VALUE_DESERIALIZER_CLASS_CONFIG</a:t>
+            </a:r>
+            <a:r>
+              <a:rPr lang="en-US" sz="1000" b="1" dirty="0">
+                <a:latin typeface="Consolas" panose="020B0609020204030204" pitchFamily="49" charset="0"/>
+              </a:rPr>
+              <a:t>, </a:t>
+            </a:r>
+            <a:r>
+              <a:rPr lang="en-US" sz="1000" b="1" dirty="0" err="1">
+                <a:latin typeface="Consolas" panose="020B0609020204030204" pitchFamily="49" charset="0"/>
+              </a:rPr>
+              <a:t>KafkaProtobufDeserializer.class</a:t>
+            </a:r>
+            <a:r>
+              <a:rPr lang="en-US" sz="1000" b="1" dirty="0">
+                <a:latin typeface="Consolas" panose="020B0609020204030204" pitchFamily="49" charset="0"/>
+              </a:rPr>
+              <a:t>);</a:t>
+            </a:r>
+          </a:p>
+          <a:p>
+            <a:pPr marL="12700" indent="0">
+              <a:buFont typeface="Arial"/>
+              <a:buNone/>
+            </a:pPr>
+            <a:r>
+              <a:rPr lang="en-US" sz="1000" b="1" dirty="0" err="1">
+                <a:latin typeface="Consolas" panose="020B0609020204030204" pitchFamily="49" charset="0"/>
+              </a:rPr>
+              <a:t>properties.put</a:t>
+            </a:r>
+            <a:r>
+              <a:rPr lang="en-US" sz="1000" b="1" dirty="0">
+                <a:latin typeface="Consolas" panose="020B0609020204030204" pitchFamily="49" charset="0"/>
+              </a:rPr>
+              <a:t>(</a:t>
+            </a:r>
+            <a:r>
+              <a:rPr lang="en-US" sz="1000" b="1" dirty="0" err="1">
+                <a:latin typeface="Consolas" panose="020B0609020204030204" pitchFamily="49" charset="0"/>
+              </a:rPr>
+              <a:t>KafkaProtobufDeserializerConfig.SCHEMA_REGISTRY_URL_CONFIG</a:t>
+            </a:r>
+            <a:r>
+              <a:rPr lang="en-US" sz="1000" b="1" dirty="0">
+                <a:latin typeface="Consolas" panose="020B0609020204030204" pitchFamily="49" charset="0"/>
+              </a:rPr>
+              <a:t>, "http://localhost:8081");</a:t>
+            </a:r>
+          </a:p>
+          <a:p>
+            <a:pPr marL="12700" indent="0">
+              <a:buFont typeface="Arial"/>
+              <a:buNone/>
+            </a:pPr>
+            <a:r>
+              <a:rPr lang="en-US" sz="1000" b="1" dirty="0" err="1">
+                <a:latin typeface="Consolas" panose="020B0609020204030204" pitchFamily="49" charset="0"/>
+              </a:rPr>
+              <a:t>properties.put</a:t>
+            </a:r>
+            <a:r>
+              <a:rPr lang="en-US" sz="1000" b="1" dirty="0">
+                <a:latin typeface="Consolas" panose="020B0609020204030204" pitchFamily="49" charset="0"/>
+              </a:rPr>
+              <a:t>(</a:t>
+            </a:r>
+            <a:r>
+              <a:rPr lang="en-US" sz="1000" b="1" dirty="0" err="1">
+                <a:latin typeface="Consolas" panose="020B0609020204030204" pitchFamily="49" charset="0"/>
+              </a:rPr>
+              <a:t>KafkaProtobufDeserializerConfig.SPECIFIC_PROTOBUF_VALUE_TYPE</a:t>
+            </a:r>
+            <a:r>
+              <a:rPr lang="en-US" sz="1000" b="1" dirty="0">
+                <a:latin typeface="Consolas" panose="020B0609020204030204" pitchFamily="49" charset="0"/>
+              </a:rPr>
+              <a:t>, </a:t>
+            </a:r>
+            <a:r>
+              <a:rPr lang="en-US" sz="1000" b="1" dirty="0" err="1">
+                <a:latin typeface="Consolas" panose="020B0609020204030204" pitchFamily="49" charset="0"/>
+              </a:rPr>
+              <a:t>SimpleMessage.class.getName</a:t>
+            </a:r>
+            <a:r>
+              <a:rPr lang="en-US" sz="1000" b="1" dirty="0">
+                <a:latin typeface="Consolas" panose="020B0609020204030204" pitchFamily="49" charset="0"/>
+              </a:rPr>
+              <a:t>());</a:t>
+            </a:r>
+          </a:p>
+          <a:p>
+            <a:pPr marL="12700" indent="0">
+              <a:buFont typeface="Arial"/>
+              <a:buNone/>
+            </a:pPr>
+            <a:endParaRPr lang="en-US" sz="1000" dirty="0">
+              <a:latin typeface="Consolas" panose="020B0609020204030204" pitchFamily="49" charset="0"/>
+            </a:endParaRPr>
+          </a:p>
+          <a:p>
+            <a:pPr marL="12700" indent="0">
+              <a:buFont typeface="Arial"/>
+              <a:buNone/>
+            </a:pPr>
+            <a:r>
+              <a:rPr lang="en-US" sz="1000" dirty="0" err="1">
+                <a:latin typeface="Consolas" panose="020B0609020204030204" pitchFamily="49" charset="0"/>
+              </a:rPr>
+              <a:t>KafkaConsumer</a:t>
+            </a:r>
+            <a:r>
+              <a:rPr lang="en-US" sz="1000" dirty="0">
+                <a:latin typeface="Consolas" panose="020B0609020204030204" pitchFamily="49" charset="0"/>
+              </a:rPr>
+              <a:t>&lt;String, </a:t>
+            </a:r>
+            <a:r>
+              <a:rPr lang="en-US" sz="1000" dirty="0" err="1">
+                <a:latin typeface="Consolas" panose="020B0609020204030204" pitchFamily="49" charset="0"/>
+              </a:rPr>
+              <a:t>SimpleMessage</a:t>
+            </a:r>
+            <a:r>
+              <a:rPr lang="en-US" sz="1000" dirty="0">
+                <a:latin typeface="Consolas" panose="020B0609020204030204" pitchFamily="49" charset="0"/>
+              </a:rPr>
+              <a:t>&gt; consumer = new </a:t>
+            </a:r>
+            <a:r>
+              <a:rPr lang="en-US" sz="1000" dirty="0" err="1">
+                <a:latin typeface="Consolas" panose="020B0609020204030204" pitchFamily="49" charset="0"/>
+              </a:rPr>
+              <a:t>KafkaConsumer</a:t>
+            </a:r>
+            <a:r>
+              <a:rPr lang="en-US" sz="1000" dirty="0">
+                <a:latin typeface="Consolas" panose="020B0609020204030204" pitchFamily="49" charset="0"/>
+              </a:rPr>
+              <a:t>&lt;&gt;(properties);</a:t>
+            </a:r>
+          </a:p>
+          <a:p>
+            <a:pPr marL="12700" indent="0">
+              <a:buFont typeface="Arial"/>
+              <a:buNone/>
+            </a:pPr>
+            <a:r>
+              <a:rPr lang="en-US" sz="1000" dirty="0" err="1">
+                <a:latin typeface="Consolas" panose="020B0609020204030204" pitchFamily="49" charset="0"/>
+              </a:rPr>
+              <a:t>consumer.subscribe</a:t>
+            </a:r>
+            <a:r>
+              <a:rPr lang="en-US" sz="1000" dirty="0">
+                <a:latin typeface="Consolas" panose="020B0609020204030204" pitchFamily="49" charset="0"/>
+              </a:rPr>
+              <a:t>(</a:t>
+            </a:r>
+            <a:r>
+              <a:rPr lang="en-US" sz="1000" dirty="0" err="1">
+                <a:latin typeface="Consolas" panose="020B0609020204030204" pitchFamily="49" charset="0"/>
+              </a:rPr>
+              <a:t>Collections.singleton</a:t>
+            </a:r>
+            <a:r>
+              <a:rPr lang="en-US" sz="1000" dirty="0">
+                <a:latin typeface="Consolas" panose="020B0609020204030204" pitchFamily="49" charset="0"/>
+              </a:rPr>
+              <a:t>("</a:t>
+            </a:r>
+            <a:r>
+              <a:rPr lang="en-US" sz="1000" dirty="0" err="1">
+                <a:latin typeface="Consolas" panose="020B0609020204030204" pitchFamily="49" charset="0"/>
+              </a:rPr>
+              <a:t>protobuf</a:t>
+            </a:r>
+            <a:r>
+              <a:rPr lang="en-US" sz="1000" dirty="0">
+                <a:latin typeface="Consolas" panose="020B0609020204030204" pitchFamily="49" charset="0"/>
+              </a:rPr>
+              <a:t>-topic"));</a:t>
+            </a:r>
+          </a:p>
+          <a:p>
+            <a:pPr marL="12700" indent="0">
+              <a:buFont typeface="Arial"/>
+              <a:buNone/>
+            </a:pPr>
+            <a:r>
+              <a:rPr lang="en-US" sz="1000" dirty="0">
+                <a:latin typeface="Consolas" panose="020B0609020204030204" pitchFamily="49" charset="0"/>
+              </a:rPr>
+              <a:t>while (true) {</a:t>
+            </a:r>
+          </a:p>
+          <a:p>
+            <a:pPr marL="12700" indent="0">
+              <a:buFont typeface="Arial"/>
+              <a:buNone/>
+            </a:pPr>
+            <a:r>
+              <a:rPr lang="en-US" sz="1000" dirty="0">
+                <a:latin typeface="Consolas" panose="020B0609020204030204" pitchFamily="49" charset="0"/>
+              </a:rPr>
+              <a:t>	</a:t>
+            </a:r>
+            <a:r>
+              <a:rPr lang="en-US" sz="1000" dirty="0" err="1">
+                <a:latin typeface="Consolas" panose="020B0609020204030204" pitchFamily="49" charset="0"/>
+              </a:rPr>
+              <a:t>ConsumerRecords</a:t>
+            </a:r>
+            <a:r>
+              <a:rPr lang="en-US" sz="1000" dirty="0">
+                <a:latin typeface="Consolas" panose="020B0609020204030204" pitchFamily="49" charset="0"/>
+              </a:rPr>
+              <a:t>&lt;String, </a:t>
+            </a:r>
+            <a:r>
+              <a:rPr lang="en-US" sz="1000" dirty="0" err="1">
+                <a:latin typeface="Consolas" panose="020B0609020204030204" pitchFamily="49" charset="0"/>
+              </a:rPr>
+              <a:t>SimpleMessage</a:t>
+            </a:r>
+            <a:r>
+              <a:rPr lang="en-US" sz="1000" dirty="0">
+                <a:latin typeface="Consolas" panose="020B0609020204030204" pitchFamily="49" charset="0"/>
+              </a:rPr>
+              <a:t>&gt; records = </a:t>
+            </a:r>
+            <a:r>
+              <a:rPr lang="en-US" sz="1000" dirty="0" err="1">
+                <a:latin typeface="Consolas" panose="020B0609020204030204" pitchFamily="49" charset="0"/>
+              </a:rPr>
+              <a:t>consumer.poll</a:t>
+            </a:r>
+            <a:r>
+              <a:rPr lang="en-US" sz="1000" dirty="0">
+                <a:latin typeface="Consolas" panose="020B0609020204030204" pitchFamily="49" charset="0"/>
+              </a:rPr>
+              <a:t>(</a:t>
+            </a:r>
+            <a:r>
+              <a:rPr lang="en-US" sz="1000" dirty="0" err="1">
+                <a:latin typeface="Consolas" panose="020B0609020204030204" pitchFamily="49" charset="0"/>
+              </a:rPr>
+              <a:t>Duration.ofMillis</a:t>
+            </a:r>
+            <a:r>
+              <a:rPr lang="en-US" sz="1000" dirty="0">
+                <a:latin typeface="Consolas" panose="020B0609020204030204" pitchFamily="49" charset="0"/>
+              </a:rPr>
+              <a:t>(100));</a:t>
+            </a:r>
+          </a:p>
+          <a:p>
+            <a:pPr marL="12700" indent="0">
+              <a:buFont typeface="Arial"/>
+              <a:buNone/>
+            </a:pPr>
+            <a:r>
+              <a:rPr lang="en-US" sz="1000" dirty="0">
+                <a:latin typeface="Consolas" panose="020B0609020204030204" pitchFamily="49" charset="0"/>
+              </a:rPr>
+              <a:t>	for (</a:t>
+            </a:r>
+            <a:r>
+              <a:rPr lang="en-US" sz="1000" dirty="0" err="1">
+                <a:latin typeface="Consolas" panose="020B0609020204030204" pitchFamily="49" charset="0"/>
+              </a:rPr>
+              <a:t>ConsumerRecord</a:t>
+            </a:r>
+            <a:r>
+              <a:rPr lang="en-US" sz="1000" dirty="0">
+                <a:latin typeface="Consolas" panose="020B0609020204030204" pitchFamily="49" charset="0"/>
+              </a:rPr>
+              <a:t>&lt;String, </a:t>
+            </a:r>
+            <a:r>
+              <a:rPr lang="en-US" sz="1000" dirty="0" err="1">
+                <a:latin typeface="Consolas" panose="020B0609020204030204" pitchFamily="49" charset="0"/>
+              </a:rPr>
+              <a:t>SimpleMessage</a:t>
+            </a:r>
+            <a:r>
+              <a:rPr lang="en-US" sz="1000" dirty="0">
+                <a:latin typeface="Consolas" panose="020B0609020204030204" pitchFamily="49" charset="0"/>
+              </a:rPr>
+              <a:t>&gt; record : records) {</a:t>
+            </a:r>
+          </a:p>
+          <a:p>
+            <a:pPr marL="12700" indent="0">
+              <a:buFont typeface="Arial"/>
+              <a:buNone/>
+            </a:pPr>
+            <a:r>
+              <a:rPr lang="en-US" sz="1000" dirty="0">
+                <a:latin typeface="Consolas" panose="020B0609020204030204" pitchFamily="49" charset="0"/>
+              </a:rPr>
+              <a:t>		</a:t>
+            </a:r>
+            <a:r>
+              <a:rPr lang="en-US" sz="1000" dirty="0" err="1">
+                <a:latin typeface="Consolas" panose="020B0609020204030204" pitchFamily="49" charset="0"/>
+              </a:rPr>
+              <a:t>System.out.println</a:t>
+            </a:r>
+            <a:r>
+              <a:rPr lang="en-US" sz="1000" dirty="0">
+                <a:latin typeface="Consolas" panose="020B0609020204030204" pitchFamily="49" charset="0"/>
+              </a:rPr>
+              <a:t>("Message content: " + </a:t>
+            </a:r>
+            <a:r>
+              <a:rPr lang="en-US" sz="1000" dirty="0" err="1">
+                <a:latin typeface="Consolas" panose="020B0609020204030204" pitchFamily="49" charset="0"/>
+              </a:rPr>
+              <a:t>record.value</a:t>
+            </a:r>
+            <a:r>
+              <a:rPr lang="en-US" sz="1000" dirty="0">
+                <a:latin typeface="Consolas" panose="020B0609020204030204" pitchFamily="49" charset="0"/>
+              </a:rPr>
+              <a:t>().</a:t>
+            </a:r>
+            <a:r>
+              <a:rPr lang="en-US" sz="1000" dirty="0" err="1">
+                <a:latin typeface="Consolas" panose="020B0609020204030204" pitchFamily="49" charset="0"/>
+              </a:rPr>
+              <a:t>getContent</a:t>
+            </a:r>
+            <a:r>
+              <a:rPr lang="en-US" sz="1000" dirty="0">
+                <a:latin typeface="Consolas" panose="020B0609020204030204" pitchFamily="49" charset="0"/>
+              </a:rPr>
+              <a:t>());</a:t>
+            </a:r>
+          </a:p>
+          <a:p>
+            <a:pPr marL="12700" indent="0">
+              <a:buFont typeface="Arial"/>
+              <a:buNone/>
+            </a:pPr>
+            <a:r>
+              <a:rPr lang="en-US" sz="1000" dirty="0">
+                <a:latin typeface="Consolas" panose="020B0609020204030204" pitchFamily="49" charset="0"/>
+              </a:rPr>
+              <a:t>		</a:t>
+            </a:r>
+            <a:r>
+              <a:rPr lang="en-US" sz="1000" dirty="0" err="1">
+                <a:latin typeface="Consolas" panose="020B0609020204030204" pitchFamily="49" charset="0"/>
+              </a:rPr>
+              <a:t>System.out.println</a:t>
+            </a:r>
+            <a:r>
+              <a:rPr lang="en-US" sz="1000" dirty="0">
+                <a:latin typeface="Consolas" panose="020B0609020204030204" pitchFamily="49" charset="0"/>
+              </a:rPr>
+              <a:t>("Message time: " + </a:t>
+            </a:r>
+            <a:r>
+              <a:rPr lang="en-US" sz="1000" dirty="0" err="1">
+                <a:latin typeface="Consolas" panose="020B0609020204030204" pitchFamily="49" charset="0"/>
+              </a:rPr>
+              <a:t>record.value</a:t>
+            </a:r>
+            <a:r>
+              <a:rPr lang="en-US" sz="1000" dirty="0">
+                <a:latin typeface="Consolas" panose="020B0609020204030204" pitchFamily="49" charset="0"/>
+              </a:rPr>
+              <a:t>().</a:t>
+            </a:r>
+            <a:r>
+              <a:rPr lang="en-US" sz="1000" dirty="0" err="1">
+                <a:latin typeface="Consolas" panose="020B0609020204030204" pitchFamily="49" charset="0"/>
+              </a:rPr>
+              <a:t>getDateTime</a:t>
+            </a:r>
+            <a:r>
+              <a:rPr lang="en-US" sz="1000" dirty="0">
+                <a:latin typeface="Consolas" panose="020B0609020204030204" pitchFamily="49" charset="0"/>
+              </a:rPr>
+              <a:t>());</a:t>
+            </a:r>
+          </a:p>
+          <a:p>
+            <a:pPr marL="12700" indent="0">
+              <a:buFont typeface="Arial"/>
+              <a:buNone/>
+            </a:pPr>
+            <a:r>
+              <a:rPr lang="en-US" sz="1000" dirty="0">
+                <a:latin typeface="Consolas" panose="020B0609020204030204" pitchFamily="49" charset="0"/>
+              </a:rPr>
+              <a:t>	}</a:t>
+            </a:r>
+          </a:p>
+          <a:p>
+            <a:pPr marL="12700" indent="0">
+              <a:buFont typeface="Arial"/>
+              <a:buNone/>
+            </a:pPr>
+            <a:r>
+              <a:rPr lang="en-US" sz="1000" dirty="0">
+                <a:latin typeface="Consolas" panose="020B0609020204030204" pitchFamily="49" charset="0"/>
+              </a:rPr>
+              <a:t>	</a:t>
+            </a:r>
+            <a:r>
+              <a:rPr lang="en-US" sz="1000" dirty="0" err="1">
+                <a:latin typeface="Consolas" panose="020B0609020204030204" pitchFamily="49" charset="0"/>
+              </a:rPr>
+              <a:t>consumer.commitAsync</a:t>
+            </a:r>
+            <a:r>
+              <a:rPr lang="en-US" sz="1000" dirty="0">
+                <a:latin typeface="Consolas" panose="020B0609020204030204" pitchFamily="49" charset="0"/>
+              </a:rPr>
+              <a:t>();</a:t>
+            </a:r>
+          </a:p>
+          <a:p>
+            <a:pPr marL="12700" indent="0">
+              <a:buFont typeface="Arial"/>
+              <a:buNone/>
+            </a:pPr>
+            <a:r>
+              <a:rPr lang="en-US" sz="1000" dirty="0">
+                <a:latin typeface="Consolas" panose="020B0609020204030204" pitchFamily="49" charset="0"/>
+              </a:rPr>
+              <a:t>}</a:t>
+            </a:r>
+          </a:p>
+        </p:txBody>
+      </p:sp>
+      <p:sp>
+        <p:nvSpPr>
+          <p:cNvPr id="5" name="Pil: venstre 4">
+            <a:extLst>
+              <a:ext uri="{FF2B5EF4-FFF2-40B4-BE49-F238E27FC236}">
+                <a16:creationId xmlns:a16="http://schemas.microsoft.com/office/drawing/2014/main" id="{9FE73D92-ADEC-1A44-8C62-652B6925C33C}"/>
+              </a:ext>
+            </a:extLst>
+          </p:cNvPr>
+          <p:cNvSpPr/>
+          <p:nvPr/>
+        </p:nvSpPr>
+        <p:spPr>
+          <a:xfrm rot="20291024">
+            <a:off x="6664747" y="1910179"/>
+            <a:ext cx="3174589" cy="484632"/>
+          </a:xfrm>
+          <a:prstGeom prst="leftArrow">
+            <a:avLst/>
+          </a:prstGeom>
+        </p:spPr>
+        <p:style>
+          <a:lnRef idx="2">
+            <a:schemeClr val="accent1">
+              <a:shade val="15000"/>
+            </a:schemeClr>
+          </a:lnRef>
+          <a:fillRef idx="1">
+            <a:schemeClr val="accent1"/>
+          </a:fillRef>
+          <a:effectRef idx="0">
+            <a:schemeClr val="accent1"/>
+          </a:effectRef>
+          <a:fontRef idx="minor">
+            <a:schemeClr val="lt1"/>
+          </a:fontRef>
+        </p:style>
+        <p:txBody>
+          <a:bodyPr rtlCol="0" anchor="ctr"/>
+          <a:lstStyle/>
+          <a:p>
+            <a:pPr algn="ctr"/>
+            <a:r>
+              <a:rPr lang="da-DK" dirty="0" err="1"/>
+              <a:t>Deserializer</a:t>
+            </a:r>
+            <a:r>
+              <a:rPr lang="da-DK" dirty="0"/>
+              <a:t> and pointer to </a:t>
+            </a:r>
+            <a:r>
+              <a:rPr lang="da-DK" dirty="0" err="1"/>
+              <a:t>registry</a:t>
+            </a:r>
+            <a:endParaRPr lang="en-US" dirty="0"/>
+          </a:p>
+        </p:txBody>
+      </p:sp>
+      <p:sp>
+        <p:nvSpPr>
+          <p:cNvPr id="6" name="Pil: venstre 5">
+            <a:extLst>
+              <a:ext uri="{FF2B5EF4-FFF2-40B4-BE49-F238E27FC236}">
+                <a16:creationId xmlns:a16="http://schemas.microsoft.com/office/drawing/2014/main" id="{4774132E-3230-80F5-8CD7-ABC2B100A0F2}"/>
+              </a:ext>
+            </a:extLst>
+          </p:cNvPr>
+          <p:cNvSpPr/>
+          <p:nvPr/>
+        </p:nvSpPr>
+        <p:spPr>
+          <a:xfrm rot="20368147">
+            <a:off x="7635218" y="2618652"/>
+            <a:ext cx="2167685" cy="484632"/>
+          </a:xfrm>
+          <a:prstGeom prst="leftArrow">
+            <a:avLst/>
+          </a:prstGeom>
+        </p:spPr>
+        <p:style>
+          <a:lnRef idx="2">
+            <a:schemeClr val="accent1">
+              <a:shade val="15000"/>
+            </a:schemeClr>
+          </a:lnRef>
+          <a:fillRef idx="1">
+            <a:schemeClr val="accent1"/>
+          </a:fillRef>
+          <a:effectRef idx="0">
+            <a:schemeClr val="accent1"/>
+          </a:effectRef>
+          <a:fontRef idx="minor">
+            <a:schemeClr val="lt1"/>
+          </a:fontRef>
+        </p:style>
+        <p:txBody>
+          <a:bodyPr rtlCol="0" anchor="ctr"/>
+          <a:lstStyle/>
+          <a:p>
+            <a:pPr algn="ctr"/>
+            <a:r>
+              <a:rPr lang="da-DK" dirty="0"/>
+              <a:t>Class to </a:t>
+            </a:r>
+            <a:r>
+              <a:rPr lang="da-DK" dirty="0" err="1"/>
+              <a:t>deserialize</a:t>
+            </a:r>
+            <a:r>
+              <a:rPr lang="da-DK" dirty="0"/>
+              <a:t> to</a:t>
+            </a:r>
+            <a:endParaRPr lang="en-US" dirty="0"/>
+          </a:p>
+        </p:txBody>
+      </p:sp>
+    </p:spTree>
+    <p:extLst>
+      <p:ext uri="{BB962C8B-B14F-4D97-AF65-F5344CB8AC3E}">
+        <p14:creationId xmlns:p14="http://schemas.microsoft.com/office/powerpoint/2010/main" val="3332019570"/>
+      </p:ext>
+    </p:extLst>
+  </p:cSld>
+  <p:clrMapOvr>
+    <a:masterClrMapping/>
+  </p:clrMapOvr>
+</p:sld>
+</file>
+
+<file path=ppt/slides/slide8.xml><?xml version="1.0" encoding="utf-8"?>
+<p:sld xmlns:a="http://schemas.openxmlformats.org/drawingml/2006/main" xmlns:r="http://schemas.openxmlformats.org/officeDocument/2006/relationships" xmlns:p="http://schemas.openxmlformats.org/presentationml/2006/main">
+  <p:cSld>
+    <p:spTree>
+      <p:nvGrpSpPr>
+        <p:cNvPr id="1" name=""/>
+        <p:cNvGrpSpPr/>
+        <p:nvPr/>
+      </p:nvGrpSpPr>
+      <p:grpSpPr>
+        <a:xfrm>
+          <a:off x="0" y="0"/>
+          <a:ext cx="0" cy="0"/>
+          <a:chOff x="0" y="0"/>
+          <a:chExt cx="0" cy="0"/>
+        </a:xfrm>
+      </p:grpSpPr>
+      <p:sp>
+        <p:nvSpPr>
+          <p:cNvPr id="2" name="Titel 1">
+            <a:extLst>
+              <a:ext uri="{FF2B5EF4-FFF2-40B4-BE49-F238E27FC236}">
+                <a16:creationId xmlns:a16="http://schemas.microsoft.com/office/drawing/2014/main" id="{46D53518-2CD0-474C-E35C-1F06C27C3826}"/>
+              </a:ext>
+            </a:extLst>
+          </p:cNvPr>
+          <p:cNvSpPr>
+            <a:spLocks noGrp="1"/>
+          </p:cNvSpPr>
+          <p:nvPr>
+            <p:ph type="title"/>
+          </p:nvPr>
+        </p:nvSpPr>
+        <p:spPr/>
+        <p:txBody>
+          <a:bodyPr/>
+          <a:lstStyle/>
+          <a:p>
+            <a:r>
+              <a:rPr lang="da-DK" dirty="0"/>
+              <a:t>Writing </a:t>
+            </a:r>
+            <a:r>
+              <a:rPr lang="da-DK" dirty="0" err="1"/>
+              <a:t>generic</a:t>
+            </a:r>
+            <a:r>
+              <a:rPr lang="da-DK" dirty="0"/>
+              <a:t> </a:t>
+            </a:r>
+            <a:r>
+              <a:rPr lang="da-DK" dirty="0" err="1"/>
+              <a:t>consumer</a:t>
+            </a:r>
+            <a:endParaRPr lang="en-US" dirty="0"/>
+          </a:p>
+        </p:txBody>
+      </p:sp>
+      <p:sp>
+        <p:nvSpPr>
+          <p:cNvPr id="4" name="Pladsholder til tekst 2">
+            <a:extLst>
+              <a:ext uri="{FF2B5EF4-FFF2-40B4-BE49-F238E27FC236}">
+                <a16:creationId xmlns:a16="http://schemas.microsoft.com/office/drawing/2014/main" id="{1B8446E8-F0C7-3440-78BB-C463D9A521A0}"/>
+              </a:ext>
+            </a:extLst>
+          </p:cNvPr>
+          <p:cNvSpPr txBox="1">
+            <a:spLocks/>
+          </p:cNvSpPr>
+          <p:nvPr/>
+        </p:nvSpPr>
+        <p:spPr>
+          <a:xfrm>
+            <a:off x="338760" y="1005785"/>
+            <a:ext cx="9020331" cy="5335473"/>
+          </a:xfrm>
+          <a:prstGeom prst="rect">
+            <a:avLst/>
+          </a:prstGeom>
+        </p:spPr>
+        <p:style>
+          <a:lnRef idx="1">
+            <a:schemeClr val="dk1"/>
+          </a:lnRef>
+          <a:fillRef idx="2">
+            <a:schemeClr val="dk1"/>
+          </a:fillRef>
+          <a:effectRef idx="1">
+            <a:schemeClr val="dk1"/>
+          </a:effectRef>
+          <a:fontRef idx="minor">
+            <a:schemeClr val="dk1"/>
+          </a:fontRef>
+        </p:style>
+        <p:txBody>
+          <a:bodyPr spcFirstLastPara="1" wrap="square" lIns="91425" tIns="91425" rIns="91425" bIns="91425" anchor="t" anchorCtr="0">
+            <a:noAutofit/>
+          </a:bodyPr>
+          <a:lstStyle>
+            <a:defPPr marR="0" lvl="0" algn="l" rtl="0">
+              <a:lnSpc>
+                <a:spcPct val="100000"/>
+              </a:lnSpc>
+              <a:spcBef>
+                <a:spcPts val="0"/>
+              </a:spcBef>
+              <a:spcAft>
+                <a:spcPts val="0"/>
+              </a:spcAft>
+            </a:defPPr>
+            <a:lvl1pPr marL="457200" marR="0" lvl="0" indent="-444500" algn="l" rtl="0">
+              <a:lnSpc>
+                <a:spcPct val="100000"/>
+              </a:lnSpc>
+              <a:spcBef>
+                <a:spcPts val="680"/>
+              </a:spcBef>
+              <a:spcAft>
+                <a:spcPts val="0"/>
+              </a:spcAft>
+              <a:buClr>
+                <a:schemeClr val="dk1"/>
+              </a:buClr>
+              <a:buSzPts val="3400"/>
+              <a:buFont typeface="Arial"/>
+              <a:buChar char="•"/>
+              <a:defRPr sz="3400" b="0" i="0" u="none" strike="noStrike" cap="none">
+                <a:solidFill>
+                  <a:schemeClr val="dk1"/>
+                </a:solidFill>
+                <a:latin typeface="Arial"/>
+                <a:ea typeface="Arial"/>
+                <a:cs typeface="Arial"/>
+                <a:sym typeface="Arial"/>
+              </a:defRPr>
+            </a:lvl1pPr>
+            <a:lvl2pPr marL="914400" marR="0" lvl="1" indent="-419100" algn="l" rtl="0">
+              <a:lnSpc>
+                <a:spcPct val="100000"/>
+              </a:lnSpc>
+              <a:spcBef>
+                <a:spcPts val="600"/>
+              </a:spcBef>
+              <a:spcAft>
+                <a:spcPts val="0"/>
+              </a:spcAft>
+              <a:buClr>
+                <a:schemeClr val="dk1"/>
+              </a:buClr>
+              <a:buSzPts val="3000"/>
+              <a:buFont typeface="Arial"/>
+              <a:buChar char="–"/>
+              <a:defRPr sz="3000" b="0" i="0" u="none" strike="noStrike" cap="none">
+                <a:solidFill>
+                  <a:schemeClr val="dk1"/>
+                </a:solidFill>
+                <a:latin typeface="Arial"/>
+                <a:ea typeface="Arial"/>
+                <a:cs typeface="Arial"/>
+                <a:sym typeface="Arial"/>
+              </a:defRPr>
+            </a:lvl2pPr>
+            <a:lvl3pPr marL="1371600" marR="0" lvl="2" indent="-387350" algn="l" rtl="0">
+              <a:lnSpc>
+                <a:spcPct val="100000"/>
+              </a:lnSpc>
+              <a:spcBef>
+                <a:spcPts val="500"/>
+              </a:spcBef>
+              <a:spcAft>
+                <a:spcPts val="0"/>
+              </a:spcAft>
+              <a:buClr>
+                <a:schemeClr val="dk1"/>
+              </a:buClr>
+              <a:buSzPts val="2500"/>
+              <a:buFont typeface="Arial"/>
+              <a:buChar char="•"/>
+              <a:defRPr sz="2500" b="0" i="0" u="none" strike="noStrike" cap="none">
+                <a:solidFill>
+                  <a:schemeClr val="dk1"/>
+                </a:solidFill>
+                <a:latin typeface="Arial"/>
+                <a:ea typeface="Arial"/>
+                <a:cs typeface="Arial"/>
+                <a:sym typeface="Arial"/>
+              </a:defRPr>
+            </a:lvl3pPr>
+            <a:lvl4pPr marL="1828800" marR="0" lvl="3" indent="-361950" algn="l" rtl="0">
+              <a:lnSpc>
+                <a:spcPct val="100000"/>
+              </a:lnSpc>
+              <a:spcBef>
+                <a:spcPts val="420"/>
+              </a:spcBef>
+              <a:spcAft>
+                <a:spcPts val="0"/>
+              </a:spcAft>
+              <a:buClr>
+                <a:schemeClr val="dk1"/>
+              </a:buClr>
+              <a:buSzPts val="2100"/>
+              <a:buFont typeface="Arial"/>
+              <a:buChar char="–"/>
+              <a:defRPr sz="2100" b="0" i="0" u="none" strike="noStrike" cap="none">
+                <a:solidFill>
+                  <a:schemeClr val="dk1"/>
+                </a:solidFill>
+                <a:latin typeface="Arial"/>
+                <a:ea typeface="Arial"/>
+                <a:cs typeface="Arial"/>
+                <a:sym typeface="Arial"/>
+              </a:defRPr>
+            </a:lvl4pPr>
+            <a:lvl5pPr marL="2286000" marR="0" lvl="4" indent="-361950" algn="l" rtl="0">
+              <a:lnSpc>
+                <a:spcPct val="100000"/>
+              </a:lnSpc>
+              <a:spcBef>
+                <a:spcPts val="420"/>
+              </a:spcBef>
+              <a:spcAft>
+                <a:spcPts val="0"/>
+              </a:spcAft>
+              <a:buClr>
+                <a:schemeClr val="dk1"/>
+              </a:buClr>
+              <a:buSzPts val="2100"/>
+              <a:buFont typeface="Arial"/>
+              <a:buChar char="»"/>
+              <a:defRPr sz="2100" b="0" i="0" u="none" strike="noStrike" cap="none">
+                <a:solidFill>
+                  <a:schemeClr val="dk1"/>
+                </a:solidFill>
+                <a:latin typeface="Arial"/>
+                <a:ea typeface="Arial"/>
+                <a:cs typeface="Arial"/>
+                <a:sym typeface="Arial"/>
+              </a:defRPr>
+            </a:lvl5pPr>
+            <a:lvl6pPr marL="2743200" marR="0" lvl="5" indent="-361950" algn="l" rtl="0">
+              <a:lnSpc>
+                <a:spcPct val="100000"/>
+              </a:lnSpc>
+              <a:spcBef>
+                <a:spcPts val="420"/>
+              </a:spcBef>
+              <a:spcAft>
+                <a:spcPts val="0"/>
+              </a:spcAft>
+              <a:buClr>
+                <a:schemeClr val="dk1"/>
+              </a:buClr>
+              <a:buSzPts val="2100"/>
+              <a:buFont typeface="Times New Roman"/>
+              <a:buChar char="»"/>
+              <a:defRPr sz="2100" b="0" i="0" u="none" strike="noStrike" cap="none">
+                <a:solidFill>
+                  <a:schemeClr val="dk1"/>
+                </a:solidFill>
+                <a:latin typeface="Times New Roman"/>
+                <a:ea typeface="Times New Roman"/>
+                <a:cs typeface="Times New Roman"/>
+                <a:sym typeface="Times New Roman"/>
+              </a:defRPr>
+            </a:lvl6pPr>
+            <a:lvl7pPr marL="3200400" marR="0" lvl="6" indent="-361950" algn="l" rtl="0">
+              <a:lnSpc>
+                <a:spcPct val="100000"/>
+              </a:lnSpc>
+              <a:spcBef>
+                <a:spcPts val="420"/>
+              </a:spcBef>
+              <a:spcAft>
+                <a:spcPts val="0"/>
+              </a:spcAft>
+              <a:buClr>
+                <a:schemeClr val="dk1"/>
+              </a:buClr>
+              <a:buSzPts val="2100"/>
+              <a:buFont typeface="Times New Roman"/>
+              <a:buChar char="»"/>
+              <a:defRPr sz="2100" b="0" i="0" u="none" strike="noStrike" cap="none">
+                <a:solidFill>
+                  <a:schemeClr val="dk1"/>
+                </a:solidFill>
+                <a:latin typeface="Times New Roman"/>
+                <a:ea typeface="Times New Roman"/>
+                <a:cs typeface="Times New Roman"/>
+                <a:sym typeface="Times New Roman"/>
+              </a:defRPr>
+            </a:lvl7pPr>
+            <a:lvl8pPr marL="3657600" marR="0" lvl="7" indent="-361950" algn="l" rtl="0">
+              <a:lnSpc>
+                <a:spcPct val="100000"/>
+              </a:lnSpc>
+              <a:spcBef>
+                <a:spcPts val="420"/>
+              </a:spcBef>
+              <a:spcAft>
+                <a:spcPts val="0"/>
+              </a:spcAft>
+              <a:buClr>
+                <a:schemeClr val="dk1"/>
+              </a:buClr>
+              <a:buSzPts val="2100"/>
+              <a:buFont typeface="Times New Roman"/>
+              <a:buChar char="»"/>
+              <a:defRPr sz="2100" b="0" i="0" u="none" strike="noStrike" cap="none">
+                <a:solidFill>
+                  <a:schemeClr val="dk1"/>
+                </a:solidFill>
+                <a:latin typeface="Times New Roman"/>
+                <a:ea typeface="Times New Roman"/>
+                <a:cs typeface="Times New Roman"/>
+                <a:sym typeface="Times New Roman"/>
+              </a:defRPr>
+            </a:lvl8pPr>
+            <a:lvl9pPr marL="4114800" marR="0" lvl="8" indent="-361950" algn="l" rtl="0">
+              <a:lnSpc>
+                <a:spcPct val="100000"/>
+              </a:lnSpc>
+              <a:spcBef>
+                <a:spcPts val="420"/>
+              </a:spcBef>
+              <a:spcAft>
+                <a:spcPts val="0"/>
+              </a:spcAft>
+              <a:buClr>
+                <a:schemeClr val="dk1"/>
+              </a:buClr>
+              <a:buSzPts val="2100"/>
+              <a:buFont typeface="Times New Roman"/>
+              <a:buChar char="»"/>
+              <a:defRPr sz="2100" b="0" i="0" u="none" strike="noStrike" cap="none">
+                <a:solidFill>
+                  <a:schemeClr val="dk1"/>
+                </a:solidFill>
+                <a:latin typeface="Times New Roman"/>
+                <a:ea typeface="Times New Roman"/>
+                <a:cs typeface="Times New Roman"/>
+                <a:sym typeface="Times New Roman"/>
+              </a:defRPr>
+            </a:lvl9pPr>
+          </a:lstStyle>
+          <a:p>
+            <a:pPr marL="12700" indent="0">
+              <a:buFont typeface="Arial"/>
+              <a:buNone/>
+            </a:pPr>
+            <a:r>
+              <a:rPr lang="en-US" sz="1000" dirty="0">
+                <a:latin typeface="Consolas" panose="020B0609020204030204" pitchFamily="49" charset="0"/>
+              </a:rPr>
+              <a:t>Properties </a:t>
+            </a:r>
+            <a:r>
+              <a:rPr lang="en-US" sz="1000" dirty="0" err="1">
+                <a:latin typeface="Consolas" panose="020B0609020204030204" pitchFamily="49" charset="0"/>
+              </a:rPr>
+              <a:t>properties</a:t>
+            </a:r>
+            <a:r>
+              <a:rPr lang="en-US" sz="1000" dirty="0">
+                <a:latin typeface="Consolas" panose="020B0609020204030204" pitchFamily="49" charset="0"/>
+              </a:rPr>
+              <a:t> = new Properties();</a:t>
+            </a:r>
+          </a:p>
+          <a:p>
+            <a:pPr marL="12700" indent="0">
+              <a:buFont typeface="Arial"/>
+              <a:buNone/>
+            </a:pPr>
+            <a:r>
+              <a:rPr lang="en-US" sz="1000" dirty="0" err="1">
+                <a:latin typeface="Consolas" panose="020B0609020204030204" pitchFamily="49" charset="0"/>
+              </a:rPr>
+              <a:t>properties.put</a:t>
+            </a:r>
+            <a:r>
+              <a:rPr lang="en-US" sz="1000" dirty="0">
+                <a:latin typeface="Consolas" panose="020B0609020204030204" pitchFamily="49" charset="0"/>
+              </a:rPr>
+              <a:t>(</a:t>
+            </a:r>
+            <a:r>
+              <a:rPr lang="en-US" sz="1000" dirty="0" err="1">
+                <a:latin typeface="Consolas" panose="020B0609020204030204" pitchFamily="49" charset="0"/>
+              </a:rPr>
+              <a:t>ProducerConfig.BOOTSTRAP_SERVERS_CONFIG</a:t>
+            </a:r>
+            <a:r>
+              <a:rPr lang="en-US" sz="1000" dirty="0">
+                <a:latin typeface="Consolas" panose="020B0609020204030204" pitchFamily="49" charset="0"/>
+              </a:rPr>
+              <a:t>, "localhost:9092");</a:t>
+            </a:r>
+          </a:p>
+          <a:p>
+            <a:pPr marL="12700" indent="0">
+              <a:buFont typeface="Arial"/>
+              <a:buNone/>
+            </a:pPr>
+            <a:r>
+              <a:rPr lang="en-US" sz="1000" dirty="0" err="1">
+                <a:latin typeface="Consolas" panose="020B0609020204030204" pitchFamily="49" charset="0"/>
+              </a:rPr>
+              <a:t>properties.put</a:t>
+            </a:r>
+            <a:r>
+              <a:rPr lang="en-US" sz="1000" dirty="0">
+                <a:latin typeface="Consolas" panose="020B0609020204030204" pitchFamily="49" charset="0"/>
+              </a:rPr>
+              <a:t>(</a:t>
+            </a:r>
+            <a:r>
+              <a:rPr lang="en-US" sz="1000" dirty="0" err="1">
+                <a:latin typeface="Consolas" panose="020B0609020204030204" pitchFamily="49" charset="0"/>
+              </a:rPr>
+              <a:t>ConsumerConfig.GROUP_ID_CONFIG</a:t>
+            </a:r>
+            <a:r>
+              <a:rPr lang="en-US" sz="1000" dirty="0">
+                <a:latin typeface="Consolas" panose="020B0609020204030204" pitchFamily="49" charset="0"/>
+              </a:rPr>
+              <a:t>, "generic-</a:t>
+            </a:r>
+            <a:r>
+              <a:rPr lang="en-US" sz="1000" dirty="0" err="1">
+                <a:latin typeface="Consolas" panose="020B0609020204030204" pitchFamily="49" charset="0"/>
+              </a:rPr>
+              <a:t>protobuf</a:t>
+            </a:r>
+            <a:r>
+              <a:rPr lang="en-US" sz="1000" dirty="0">
+                <a:latin typeface="Consolas" panose="020B0609020204030204" pitchFamily="49" charset="0"/>
+              </a:rPr>
+              <a:t>-consumer-group");      </a:t>
+            </a:r>
+          </a:p>
+          <a:p>
+            <a:pPr marL="12700" indent="0">
+              <a:buFont typeface="Arial"/>
+              <a:buNone/>
+            </a:pPr>
+            <a:r>
+              <a:rPr lang="en-US" sz="1000" dirty="0" err="1">
+                <a:latin typeface="Consolas" panose="020B0609020204030204" pitchFamily="49" charset="0"/>
+              </a:rPr>
+              <a:t>properties.put</a:t>
+            </a:r>
+            <a:r>
+              <a:rPr lang="en-US" sz="1000" dirty="0">
+                <a:latin typeface="Consolas" panose="020B0609020204030204" pitchFamily="49" charset="0"/>
+              </a:rPr>
+              <a:t>(</a:t>
+            </a:r>
+            <a:r>
+              <a:rPr lang="en-US" sz="1000" dirty="0" err="1">
+                <a:latin typeface="Consolas" panose="020B0609020204030204" pitchFamily="49" charset="0"/>
+              </a:rPr>
+              <a:t>ConsumerConfig.AUTO_OFFSET_RESET_CONFIG</a:t>
+            </a:r>
+            <a:r>
+              <a:rPr lang="en-US" sz="1000" dirty="0">
+                <a:latin typeface="Consolas" panose="020B0609020204030204" pitchFamily="49" charset="0"/>
+              </a:rPr>
+              <a:t>, "earliest");</a:t>
+            </a:r>
+          </a:p>
+          <a:p>
+            <a:pPr marL="12700" indent="0">
+              <a:buFont typeface="Arial"/>
+              <a:buNone/>
+            </a:pPr>
+            <a:r>
+              <a:rPr lang="en-US" sz="1000" dirty="0" err="1">
+                <a:latin typeface="Consolas" panose="020B0609020204030204" pitchFamily="49" charset="0"/>
+              </a:rPr>
+              <a:t>properties.put</a:t>
+            </a:r>
+            <a:r>
+              <a:rPr lang="en-US" sz="1000" dirty="0">
+                <a:latin typeface="Consolas" panose="020B0609020204030204" pitchFamily="49" charset="0"/>
+              </a:rPr>
+              <a:t>(</a:t>
+            </a:r>
+            <a:r>
+              <a:rPr lang="en-US" sz="1000" dirty="0" err="1">
+                <a:latin typeface="Consolas" panose="020B0609020204030204" pitchFamily="49" charset="0"/>
+              </a:rPr>
+              <a:t>ConsumerConfig.ENABLE_AUTO_COMMIT_CONFIG</a:t>
+            </a:r>
+            <a:r>
+              <a:rPr lang="en-US" sz="1000" dirty="0">
+                <a:latin typeface="Consolas" panose="020B0609020204030204" pitchFamily="49" charset="0"/>
+              </a:rPr>
+              <a:t>, false);</a:t>
+            </a:r>
+          </a:p>
+          <a:p>
+            <a:pPr marL="12700" indent="0">
+              <a:buFont typeface="Arial"/>
+              <a:buNone/>
+            </a:pPr>
+            <a:r>
+              <a:rPr lang="en-US" sz="1000" dirty="0" err="1">
+                <a:latin typeface="Consolas" panose="020B0609020204030204" pitchFamily="49" charset="0"/>
+              </a:rPr>
+              <a:t>properties.put</a:t>
+            </a:r>
+            <a:r>
+              <a:rPr lang="en-US" sz="1000" dirty="0">
+                <a:latin typeface="Consolas" panose="020B0609020204030204" pitchFamily="49" charset="0"/>
+              </a:rPr>
+              <a:t>(</a:t>
+            </a:r>
+            <a:r>
+              <a:rPr lang="en-US" sz="1000" dirty="0" err="1">
+                <a:latin typeface="Consolas" panose="020B0609020204030204" pitchFamily="49" charset="0"/>
+              </a:rPr>
+              <a:t>ConsumerConfig.KEY_DESERIALIZER_CLASS_CONFIG</a:t>
+            </a:r>
+            <a:r>
+              <a:rPr lang="en-US" sz="1000" dirty="0">
+                <a:latin typeface="Consolas" panose="020B0609020204030204" pitchFamily="49" charset="0"/>
+              </a:rPr>
+              <a:t>, </a:t>
+            </a:r>
+            <a:r>
+              <a:rPr lang="en-US" sz="1000" dirty="0" err="1">
+                <a:latin typeface="Consolas" panose="020B0609020204030204" pitchFamily="49" charset="0"/>
+              </a:rPr>
+              <a:t>StringDeserializer.class</a:t>
+            </a:r>
+            <a:r>
+              <a:rPr lang="en-US" sz="1000" dirty="0">
+                <a:latin typeface="Consolas" panose="020B0609020204030204" pitchFamily="49" charset="0"/>
+              </a:rPr>
+              <a:t>);</a:t>
+            </a:r>
+          </a:p>
+          <a:p>
+            <a:pPr marL="12700" indent="0">
+              <a:buFont typeface="Arial"/>
+              <a:buNone/>
+            </a:pPr>
+            <a:r>
+              <a:rPr lang="en-US" sz="1000" b="1" dirty="0" err="1">
+                <a:latin typeface="Consolas" panose="020B0609020204030204" pitchFamily="49" charset="0"/>
+              </a:rPr>
+              <a:t>properties.put</a:t>
+            </a:r>
+            <a:r>
+              <a:rPr lang="en-US" sz="1000" b="1" dirty="0">
+                <a:latin typeface="Consolas" panose="020B0609020204030204" pitchFamily="49" charset="0"/>
+              </a:rPr>
+              <a:t>(</a:t>
+            </a:r>
+            <a:r>
+              <a:rPr lang="en-US" sz="1000" b="1" dirty="0" err="1">
+                <a:latin typeface="Consolas" panose="020B0609020204030204" pitchFamily="49" charset="0"/>
+              </a:rPr>
+              <a:t>ConsumerConfig.VALUE_DESERIALIZER_CLASS_CONFIG</a:t>
+            </a:r>
+            <a:r>
+              <a:rPr lang="en-US" sz="1000" b="1" dirty="0">
+                <a:latin typeface="Consolas" panose="020B0609020204030204" pitchFamily="49" charset="0"/>
+              </a:rPr>
+              <a:t>, </a:t>
+            </a:r>
+            <a:r>
+              <a:rPr lang="en-US" sz="1000" b="1" dirty="0" err="1">
+                <a:latin typeface="Consolas" panose="020B0609020204030204" pitchFamily="49" charset="0"/>
+              </a:rPr>
+              <a:t>KafkaProtobufDeserializer.class</a:t>
+            </a:r>
+            <a:r>
+              <a:rPr lang="en-US" sz="1000" b="1" dirty="0">
+                <a:latin typeface="Consolas" panose="020B0609020204030204" pitchFamily="49" charset="0"/>
+              </a:rPr>
+              <a:t>);</a:t>
+            </a:r>
+          </a:p>
+          <a:p>
+            <a:pPr marL="12700" indent="0">
+              <a:buFont typeface="Arial"/>
+              <a:buNone/>
+            </a:pPr>
+            <a:r>
+              <a:rPr lang="en-US" sz="1000" b="1" dirty="0" err="1">
+                <a:latin typeface="Consolas" panose="020B0609020204030204" pitchFamily="49" charset="0"/>
+              </a:rPr>
+              <a:t>properties.put</a:t>
+            </a:r>
+            <a:r>
+              <a:rPr lang="en-US" sz="1000" b="1" dirty="0">
+                <a:latin typeface="Consolas" panose="020B0609020204030204" pitchFamily="49" charset="0"/>
+              </a:rPr>
+              <a:t>(</a:t>
+            </a:r>
+            <a:r>
+              <a:rPr lang="en-US" sz="1000" b="1" dirty="0" err="1">
+                <a:latin typeface="Consolas" panose="020B0609020204030204" pitchFamily="49" charset="0"/>
+              </a:rPr>
+              <a:t>KafkaProtobufDeserializerConfig.SCHEMA_REGISTRY_URL_CONFIG</a:t>
+            </a:r>
+            <a:r>
+              <a:rPr lang="en-US" sz="1000" b="1" dirty="0">
+                <a:latin typeface="Consolas" panose="020B0609020204030204" pitchFamily="49" charset="0"/>
+              </a:rPr>
+              <a:t>, "http://localhost:8081");</a:t>
+            </a:r>
+          </a:p>
+          <a:p>
+            <a:pPr marL="12700" indent="0">
+              <a:buFont typeface="Arial"/>
+              <a:buNone/>
+            </a:pPr>
+            <a:endParaRPr lang="en-US" sz="1000" dirty="0">
+              <a:latin typeface="Consolas" panose="020B0609020204030204" pitchFamily="49" charset="0"/>
+            </a:endParaRPr>
+          </a:p>
+          <a:p>
+            <a:pPr marL="12700" indent="0">
+              <a:buFont typeface="Arial"/>
+              <a:buNone/>
+            </a:pPr>
+            <a:r>
+              <a:rPr lang="en-US" sz="1000" dirty="0" err="1">
+                <a:latin typeface="Consolas" panose="020B0609020204030204" pitchFamily="49" charset="0"/>
+              </a:rPr>
+              <a:t>KafkaConsumer</a:t>
+            </a:r>
+            <a:r>
+              <a:rPr lang="en-US" sz="1000" dirty="0">
+                <a:latin typeface="Consolas" panose="020B0609020204030204" pitchFamily="49" charset="0"/>
+              </a:rPr>
+              <a:t>&lt;String, </a:t>
+            </a:r>
+            <a:r>
+              <a:rPr lang="en-US" sz="1000" dirty="0" err="1">
+                <a:latin typeface="Consolas" panose="020B0609020204030204" pitchFamily="49" charset="0"/>
+              </a:rPr>
+              <a:t>SimpleMessage</a:t>
+            </a:r>
+            <a:r>
+              <a:rPr lang="en-US" sz="1000" dirty="0">
+                <a:latin typeface="Consolas" panose="020B0609020204030204" pitchFamily="49" charset="0"/>
+              </a:rPr>
+              <a:t>&gt; consumer = new </a:t>
+            </a:r>
+            <a:r>
+              <a:rPr lang="en-US" sz="1000" dirty="0" err="1">
+                <a:latin typeface="Consolas" panose="020B0609020204030204" pitchFamily="49" charset="0"/>
+              </a:rPr>
+              <a:t>KafkaConsumer</a:t>
+            </a:r>
+            <a:r>
+              <a:rPr lang="en-US" sz="1000" dirty="0">
+                <a:latin typeface="Consolas" panose="020B0609020204030204" pitchFamily="49" charset="0"/>
+              </a:rPr>
+              <a:t>&lt;&gt;(properties);</a:t>
+            </a:r>
+          </a:p>
+          <a:p>
+            <a:pPr marL="12700" indent="0">
+              <a:buFont typeface="Arial"/>
+              <a:buNone/>
+            </a:pPr>
+            <a:r>
+              <a:rPr lang="en-US" sz="1000" dirty="0" err="1">
+                <a:latin typeface="Consolas" panose="020B0609020204030204" pitchFamily="49" charset="0"/>
+              </a:rPr>
+              <a:t>consumer.subscribe</a:t>
+            </a:r>
+            <a:r>
+              <a:rPr lang="en-US" sz="1000" dirty="0">
+                <a:latin typeface="Consolas" panose="020B0609020204030204" pitchFamily="49" charset="0"/>
+              </a:rPr>
+              <a:t>(</a:t>
+            </a:r>
+            <a:r>
+              <a:rPr lang="en-US" sz="1000" dirty="0" err="1">
+                <a:latin typeface="Consolas" panose="020B0609020204030204" pitchFamily="49" charset="0"/>
+              </a:rPr>
+              <a:t>Collections.singleton</a:t>
+            </a:r>
+            <a:r>
+              <a:rPr lang="en-US" sz="1000" dirty="0">
+                <a:latin typeface="Consolas" panose="020B0609020204030204" pitchFamily="49" charset="0"/>
+              </a:rPr>
+              <a:t>("</a:t>
+            </a:r>
+            <a:r>
+              <a:rPr lang="en-US" sz="1000" dirty="0" err="1">
+                <a:latin typeface="Consolas" panose="020B0609020204030204" pitchFamily="49" charset="0"/>
+              </a:rPr>
+              <a:t>protobuf</a:t>
+            </a:r>
+            <a:r>
+              <a:rPr lang="en-US" sz="1000" dirty="0">
+                <a:latin typeface="Consolas" panose="020B0609020204030204" pitchFamily="49" charset="0"/>
+              </a:rPr>
+              <a:t>-topic"));</a:t>
+            </a:r>
+          </a:p>
+          <a:p>
+            <a:pPr marL="12700" indent="0">
+              <a:buFont typeface="Arial"/>
+              <a:buNone/>
+            </a:pPr>
+            <a:endParaRPr lang="en-US" sz="1000" dirty="0">
+              <a:latin typeface="Consolas" panose="020B0609020204030204" pitchFamily="49" charset="0"/>
+            </a:endParaRPr>
+          </a:p>
+          <a:p>
+            <a:pPr marL="12700" indent="0">
+              <a:buFont typeface="Arial"/>
+              <a:buNone/>
+            </a:pPr>
+            <a:r>
+              <a:rPr lang="en-US" sz="1000" dirty="0">
+                <a:latin typeface="Consolas" panose="020B0609020204030204" pitchFamily="49" charset="0"/>
+              </a:rPr>
+              <a:t>while (true) {</a:t>
+            </a:r>
+          </a:p>
+          <a:p>
+            <a:pPr marL="12700" indent="0">
+              <a:buFont typeface="Arial"/>
+              <a:buNone/>
+            </a:pPr>
+            <a:r>
+              <a:rPr lang="en-US" sz="1000" dirty="0">
+                <a:latin typeface="Consolas" panose="020B0609020204030204" pitchFamily="49" charset="0"/>
+              </a:rPr>
+              <a:t>    </a:t>
+            </a:r>
+            <a:r>
+              <a:rPr lang="en-US" sz="1000" dirty="0" err="1">
+                <a:latin typeface="Consolas" panose="020B0609020204030204" pitchFamily="49" charset="0"/>
+              </a:rPr>
+              <a:t>ConsumerRecords</a:t>
+            </a:r>
+            <a:r>
+              <a:rPr lang="en-US" sz="1000" dirty="0">
+                <a:latin typeface="Consolas" panose="020B0609020204030204" pitchFamily="49" charset="0"/>
+              </a:rPr>
+              <a:t>&lt;String, </a:t>
+            </a:r>
+            <a:r>
+              <a:rPr lang="en-US" sz="1000" b="1" dirty="0" err="1">
+                <a:latin typeface="Consolas" panose="020B0609020204030204" pitchFamily="49" charset="0"/>
+              </a:rPr>
+              <a:t>DynamicMessage</a:t>
+            </a:r>
+            <a:r>
+              <a:rPr lang="en-US" sz="1000" dirty="0">
+                <a:latin typeface="Consolas" panose="020B0609020204030204" pitchFamily="49" charset="0"/>
+              </a:rPr>
+              <a:t>&gt; records = </a:t>
+            </a:r>
+            <a:r>
+              <a:rPr lang="en-US" sz="1000" dirty="0" err="1">
+                <a:latin typeface="Consolas" panose="020B0609020204030204" pitchFamily="49" charset="0"/>
+              </a:rPr>
+              <a:t>consumer.poll</a:t>
+            </a:r>
+            <a:r>
+              <a:rPr lang="en-US" sz="1000" dirty="0">
+                <a:latin typeface="Consolas" panose="020B0609020204030204" pitchFamily="49" charset="0"/>
+              </a:rPr>
+              <a:t>(</a:t>
+            </a:r>
+            <a:r>
+              <a:rPr lang="en-US" sz="1000" dirty="0" err="1">
+                <a:latin typeface="Consolas" panose="020B0609020204030204" pitchFamily="49" charset="0"/>
+              </a:rPr>
+              <a:t>Duration.ofMillis</a:t>
+            </a:r>
+            <a:r>
+              <a:rPr lang="en-US" sz="1000" dirty="0">
+                <a:latin typeface="Consolas" panose="020B0609020204030204" pitchFamily="49" charset="0"/>
+              </a:rPr>
+              <a:t>(100));</a:t>
+            </a:r>
+          </a:p>
+          <a:p>
+            <a:pPr marL="12700" indent="0">
+              <a:buFont typeface="Arial"/>
+              <a:buNone/>
+            </a:pPr>
+            <a:r>
+              <a:rPr lang="en-US" sz="1000" dirty="0">
+                <a:latin typeface="Consolas" panose="020B0609020204030204" pitchFamily="49" charset="0"/>
+              </a:rPr>
+              <a:t>    for (</a:t>
+            </a:r>
+            <a:r>
+              <a:rPr lang="en-US" sz="1000" dirty="0" err="1">
+                <a:latin typeface="Consolas" panose="020B0609020204030204" pitchFamily="49" charset="0"/>
+              </a:rPr>
+              <a:t>ConsumerRecord</a:t>
+            </a:r>
+            <a:r>
+              <a:rPr lang="en-US" sz="1000" dirty="0">
+                <a:latin typeface="Consolas" panose="020B0609020204030204" pitchFamily="49" charset="0"/>
+              </a:rPr>
+              <a:t>&lt;String, </a:t>
+            </a:r>
+            <a:r>
+              <a:rPr lang="en-US" sz="1000" b="1" dirty="0" err="1">
+                <a:latin typeface="Consolas" panose="020B0609020204030204" pitchFamily="49" charset="0"/>
+              </a:rPr>
+              <a:t>DynamicMessage</a:t>
+            </a:r>
+            <a:r>
+              <a:rPr lang="en-US" sz="1000" dirty="0">
+                <a:latin typeface="Consolas" panose="020B0609020204030204" pitchFamily="49" charset="0"/>
+              </a:rPr>
+              <a:t>&gt; record : records) {</a:t>
+            </a:r>
+          </a:p>
+          <a:p>
+            <a:pPr marL="12700" indent="0">
+              <a:buFont typeface="Arial"/>
+              <a:buNone/>
+            </a:pPr>
+            <a:r>
+              <a:rPr lang="en-US" sz="1000" dirty="0">
+                <a:latin typeface="Consolas" panose="020B0609020204030204" pitchFamily="49" charset="0"/>
+              </a:rPr>
+              <a:t>        for (</a:t>
+            </a:r>
+            <a:r>
+              <a:rPr lang="en-US" sz="1000" dirty="0" err="1">
+                <a:latin typeface="Consolas" panose="020B0609020204030204" pitchFamily="49" charset="0"/>
+              </a:rPr>
+              <a:t>FieldDescriptor</a:t>
+            </a:r>
+            <a:r>
+              <a:rPr lang="en-US" sz="1000" dirty="0">
+                <a:latin typeface="Consolas" panose="020B0609020204030204" pitchFamily="49" charset="0"/>
+              </a:rPr>
+              <a:t> field : </a:t>
+            </a:r>
+            <a:r>
+              <a:rPr lang="en-US" sz="1000" dirty="0" err="1">
+                <a:latin typeface="Consolas" panose="020B0609020204030204" pitchFamily="49" charset="0"/>
+              </a:rPr>
+              <a:t>record.value</a:t>
+            </a:r>
+            <a:r>
+              <a:rPr lang="en-US" sz="1000" dirty="0">
+                <a:latin typeface="Consolas" panose="020B0609020204030204" pitchFamily="49" charset="0"/>
+              </a:rPr>
+              <a:t>().</a:t>
+            </a:r>
+            <a:r>
+              <a:rPr lang="en-US" sz="1000" dirty="0" err="1">
+                <a:latin typeface="Consolas" panose="020B0609020204030204" pitchFamily="49" charset="0"/>
+              </a:rPr>
+              <a:t>getAllFields</a:t>
+            </a:r>
+            <a:r>
+              <a:rPr lang="en-US" sz="1000" dirty="0">
+                <a:latin typeface="Consolas" panose="020B0609020204030204" pitchFamily="49" charset="0"/>
+              </a:rPr>
+              <a:t>().</a:t>
+            </a:r>
+            <a:r>
+              <a:rPr lang="en-US" sz="1000" dirty="0" err="1">
+                <a:latin typeface="Consolas" panose="020B0609020204030204" pitchFamily="49" charset="0"/>
+              </a:rPr>
+              <a:t>keySet</a:t>
+            </a:r>
+            <a:r>
+              <a:rPr lang="en-US" sz="1000" dirty="0">
+                <a:latin typeface="Consolas" panose="020B0609020204030204" pitchFamily="49" charset="0"/>
+              </a:rPr>
+              <a:t>()) {</a:t>
+            </a:r>
+          </a:p>
+          <a:p>
+            <a:pPr marL="12700" indent="0">
+              <a:buFont typeface="Arial"/>
+              <a:buNone/>
+            </a:pPr>
+            <a:r>
+              <a:rPr lang="en-US" sz="1000" dirty="0">
+                <a:latin typeface="Consolas" panose="020B0609020204030204" pitchFamily="49" charset="0"/>
+              </a:rPr>
+              <a:t>            </a:t>
+            </a:r>
+            <a:r>
+              <a:rPr lang="en-US" sz="1000" dirty="0" err="1">
+                <a:latin typeface="Consolas" panose="020B0609020204030204" pitchFamily="49" charset="0"/>
+              </a:rPr>
+              <a:t>System.out.println</a:t>
+            </a:r>
+            <a:r>
+              <a:rPr lang="en-US" sz="1000" dirty="0">
+                <a:latin typeface="Consolas" panose="020B0609020204030204" pitchFamily="49" charset="0"/>
+              </a:rPr>
+              <a:t>(</a:t>
+            </a:r>
+            <a:r>
+              <a:rPr lang="en-US" sz="1000" dirty="0" err="1">
+                <a:latin typeface="Consolas" panose="020B0609020204030204" pitchFamily="49" charset="0"/>
+              </a:rPr>
+              <a:t>field.getName</a:t>
+            </a:r>
+            <a:r>
+              <a:rPr lang="en-US" sz="1000" dirty="0">
+                <a:latin typeface="Consolas" panose="020B0609020204030204" pitchFamily="49" charset="0"/>
+              </a:rPr>
+              <a:t>() + ": " + </a:t>
+            </a:r>
+            <a:r>
+              <a:rPr lang="en-US" sz="1000" dirty="0" err="1">
+                <a:latin typeface="Consolas" panose="020B0609020204030204" pitchFamily="49" charset="0"/>
+              </a:rPr>
+              <a:t>record.value</a:t>
+            </a:r>
+            <a:r>
+              <a:rPr lang="en-US" sz="1000" dirty="0">
+                <a:latin typeface="Consolas" panose="020B0609020204030204" pitchFamily="49" charset="0"/>
+              </a:rPr>
+              <a:t>().</a:t>
+            </a:r>
+            <a:r>
+              <a:rPr lang="en-US" sz="1000" dirty="0" err="1">
+                <a:latin typeface="Consolas" panose="020B0609020204030204" pitchFamily="49" charset="0"/>
+              </a:rPr>
+              <a:t>getField</a:t>
+            </a:r>
+            <a:r>
+              <a:rPr lang="en-US" sz="1000" dirty="0">
+                <a:latin typeface="Consolas" panose="020B0609020204030204" pitchFamily="49" charset="0"/>
+              </a:rPr>
+              <a:t>(field));</a:t>
+            </a:r>
+          </a:p>
+          <a:p>
+            <a:pPr marL="12700" indent="0">
+              <a:buFont typeface="Arial"/>
+              <a:buNone/>
+            </a:pPr>
+            <a:r>
+              <a:rPr lang="en-US" sz="1000" dirty="0">
+                <a:latin typeface="Consolas" panose="020B0609020204030204" pitchFamily="49" charset="0"/>
+              </a:rPr>
+              <a:t>        }</a:t>
+            </a:r>
+          </a:p>
+          <a:p>
+            <a:pPr marL="12700" indent="0">
+              <a:buFont typeface="Arial"/>
+              <a:buNone/>
+            </a:pPr>
+            <a:r>
+              <a:rPr lang="en-US" sz="1000" dirty="0">
+                <a:latin typeface="Consolas" panose="020B0609020204030204" pitchFamily="49" charset="0"/>
+              </a:rPr>
+              <a:t>    }</a:t>
+            </a:r>
+          </a:p>
+          <a:p>
+            <a:pPr marL="12700" indent="0">
+              <a:buFont typeface="Arial"/>
+              <a:buNone/>
+            </a:pPr>
+            <a:r>
+              <a:rPr lang="en-US" sz="1000" dirty="0">
+                <a:latin typeface="Consolas" panose="020B0609020204030204" pitchFamily="49" charset="0"/>
+              </a:rPr>
+              <a:t>    </a:t>
+            </a:r>
+            <a:r>
+              <a:rPr lang="en-US" sz="1000" dirty="0" err="1">
+                <a:latin typeface="Consolas" panose="020B0609020204030204" pitchFamily="49" charset="0"/>
+              </a:rPr>
+              <a:t>consumer.commitAsync</a:t>
+            </a:r>
+            <a:r>
+              <a:rPr lang="en-US" sz="1000" dirty="0">
+                <a:latin typeface="Consolas" panose="020B0609020204030204" pitchFamily="49" charset="0"/>
+              </a:rPr>
+              <a:t>();</a:t>
+            </a:r>
+          </a:p>
+          <a:p>
+            <a:pPr marL="12700" indent="0">
+              <a:buFont typeface="Arial"/>
+              <a:buNone/>
+            </a:pPr>
+            <a:r>
+              <a:rPr lang="en-US" sz="1000" dirty="0">
+                <a:latin typeface="Consolas" panose="020B0609020204030204" pitchFamily="49" charset="0"/>
+              </a:rPr>
+              <a:t>}</a:t>
+            </a:r>
+          </a:p>
+        </p:txBody>
+      </p:sp>
+      <p:sp>
+        <p:nvSpPr>
+          <p:cNvPr id="5" name="Pil: venstre 4">
+            <a:extLst>
+              <a:ext uri="{FF2B5EF4-FFF2-40B4-BE49-F238E27FC236}">
+                <a16:creationId xmlns:a16="http://schemas.microsoft.com/office/drawing/2014/main" id="{9FE73D92-ADEC-1A44-8C62-652B6925C33C}"/>
+              </a:ext>
+            </a:extLst>
+          </p:cNvPr>
+          <p:cNvSpPr/>
+          <p:nvPr/>
+        </p:nvSpPr>
+        <p:spPr>
+          <a:xfrm rot="2213185">
+            <a:off x="6110643" y="4000617"/>
+            <a:ext cx="3551826" cy="484632"/>
+          </a:xfrm>
+          <a:prstGeom prst="leftArrow">
+            <a:avLst/>
+          </a:prstGeom>
+        </p:spPr>
+        <p:style>
+          <a:lnRef idx="2">
+            <a:schemeClr val="accent1">
+              <a:shade val="15000"/>
+            </a:schemeClr>
+          </a:lnRef>
+          <a:fillRef idx="1">
+            <a:schemeClr val="accent1"/>
+          </a:fillRef>
+          <a:effectRef idx="0">
+            <a:schemeClr val="accent1"/>
+          </a:effectRef>
+          <a:fontRef idx="minor">
+            <a:schemeClr val="lt1"/>
+          </a:fontRef>
+        </p:style>
+        <p:txBody>
+          <a:bodyPr rtlCol="0" anchor="ctr"/>
+          <a:lstStyle/>
+          <a:p>
+            <a:pPr algn="ctr"/>
+            <a:r>
+              <a:rPr lang="da-DK" dirty="0" err="1"/>
+              <a:t>Deserializer</a:t>
+            </a:r>
+            <a:r>
+              <a:rPr lang="da-DK" dirty="0"/>
+              <a:t> and pointer to </a:t>
+            </a:r>
+            <a:r>
+              <a:rPr lang="da-DK" dirty="0" err="1"/>
+              <a:t>registry</a:t>
+            </a:r>
+            <a:endParaRPr lang="en-US" dirty="0"/>
+          </a:p>
+        </p:txBody>
+      </p:sp>
+      <p:sp>
+        <p:nvSpPr>
+          <p:cNvPr id="3" name="Pil: venstre 2">
+            <a:extLst>
+              <a:ext uri="{FF2B5EF4-FFF2-40B4-BE49-F238E27FC236}">
+                <a16:creationId xmlns:a16="http://schemas.microsoft.com/office/drawing/2014/main" id="{1F202CE3-37C0-20F5-5CDA-7027535038B3}"/>
+              </a:ext>
+            </a:extLst>
+          </p:cNvPr>
+          <p:cNvSpPr/>
+          <p:nvPr/>
+        </p:nvSpPr>
+        <p:spPr>
+          <a:xfrm rot="20415808">
+            <a:off x="3669945" y="3687780"/>
+            <a:ext cx="1945696" cy="484632"/>
+          </a:xfrm>
+          <a:prstGeom prst="leftArrow">
+            <a:avLst/>
+          </a:prstGeom>
+        </p:spPr>
+        <p:style>
+          <a:lnRef idx="2">
+            <a:schemeClr val="accent1">
+              <a:shade val="15000"/>
+            </a:schemeClr>
+          </a:lnRef>
+          <a:fillRef idx="1">
+            <a:schemeClr val="accent1"/>
+          </a:fillRef>
+          <a:effectRef idx="0">
+            <a:schemeClr val="accent1"/>
+          </a:effectRef>
+          <a:fontRef idx="minor">
+            <a:schemeClr val="lt1"/>
+          </a:fontRef>
+        </p:style>
+        <p:txBody>
+          <a:bodyPr rtlCol="0" anchor="ctr"/>
+          <a:lstStyle/>
+          <a:p>
+            <a:pPr algn="ctr"/>
+            <a:r>
+              <a:rPr lang="da-DK" dirty="0"/>
+              <a:t>Dynamic class</a:t>
+            </a:r>
+            <a:endParaRPr lang="en-US" dirty="0"/>
+          </a:p>
+        </p:txBody>
+      </p:sp>
+    </p:spTree>
+    <p:extLst>
+      <p:ext uri="{BB962C8B-B14F-4D97-AF65-F5344CB8AC3E}">
+        <p14:creationId xmlns:p14="http://schemas.microsoft.com/office/powerpoint/2010/main" val="172832385"/>
+      </p:ext>
+    </p:extLst>
+  </p:cSld>
+  <p:clrMapOvr>
+    <a:masterClrMapping/>
+  </p:clrMapOvr>
+</p:sld>
+</file>
+
+<file path=ppt/slides/slide9.xml><?xml version="1.0" encoding="utf-8"?>
+<p:sld xmlns:a="http://schemas.openxmlformats.org/drawingml/2006/main" xmlns:r="http://schemas.openxmlformats.org/officeDocument/2006/relationships" xmlns:p="http://schemas.openxmlformats.org/presentationml/2006/main">
+  <p:cSld>
+    <p:spTree>
+      <p:nvGrpSpPr>
+        <p:cNvPr id="1" name=""/>
+        <p:cNvGrpSpPr/>
+        <p:nvPr/>
+      </p:nvGrpSpPr>
+      <p:grpSpPr>
+        <a:xfrm>
+          <a:off x="0" y="0"/>
+          <a:ext cx="0" cy="0"/>
+          <a:chOff x="0" y="0"/>
+          <a:chExt cx="0" cy="0"/>
+        </a:xfrm>
+      </p:grpSpPr>
+      <p:sp>
+        <p:nvSpPr>
+          <p:cNvPr id="2" name="Titel 1">
+            <a:extLst>
+              <a:ext uri="{FF2B5EF4-FFF2-40B4-BE49-F238E27FC236}">
+                <a16:creationId xmlns:a16="http://schemas.microsoft.com/office/drawing/2014/main" id="{D921EA28-74D7-33B5-C555-50355A95DB0C}"/>
+              </a:ext>
+            </a:extLst>
+          </p:cNvPr>
+          <p:cNvSpPr>
+            <a:spLocks noGrp="1"/>
+          </p:cNvSpPr>
+          <p:nvPr>
+            <p:ph type="title"/>
+          </p:nvPr>
+        </p:nvSpPr>
+        <p:spPr/>
+        <p:txBody>
+          <a:bodyPr/>
+          <a:lstStyle/>
+          <a:p>
+            <a:r>
+              <a:rPr lang="da-DK" dirty="0" err="1"/>
+              <a:t>Interacting</a:t>
+            </a:r>
+            <a:r>
+              <a:rPr lang="da-DK" dirty="0"/>
+              <a:t> with </a:t>
+            </a:r>
+            <a:r>
+              <a:rPr lang="da-DK" dirty="0" err="1"/>
+              <a:t>schema</a:t>
+            </a:r>
+            <a:r>
+              <a:rPr lang="da-DK" dirty="0"/>
+              <a:t> </a:t>
+            </a:r>
+            <a:r>
+              <a:rPr lang="da-DK" dirty="0" err="1"/>
+              <a:t>registry</a:t>
+            </a:r>
+            <a:endParaRPr lang="en-US" dirty="0"/>
+          </a:p>
+        </p:txBody>
+      </p:sp>
+      <p:sp>
+        <p:nvSpPr>
+          <p:cNvPr id="6" name="Tekstfelt 5">
+            <a:extLst>
+              <a:ext uri="{FF2B5EF4-FFF2-40B4-BE49-F238E27FC236}">
+                <a16:creationId xmlns:a16="http://schemas.microsoft.com/office/drawing/2014/main" id="{D0025252-9E59-854C-875F-CAAFD5AE1C63}"/>
+              </a:ext>
+            </a:extLst>
+          </p:cNvPr>
+          <p:cNvSpPr txBox="1"/>
+          <p:nvPr/>
+        </p:nvSpPr>
+        <p:spPr>
+          <a:xfrm>
+            <a:off x="254371" y="1148385"/>
+            <a:ext cx="3166251" cy="1169551"/>
+          </a:xfrm>
+          <a:prstGeom prst="rect">
+            <a:avLst/>
+          </a:prstGeom>
+        </p:spPr>
+        <p:style>
+          <a:lnRef idx="1">
+            <a:schemeClr val="dk1"/>
+          </a:lnRef>
+          <a:fillRef idx="2">
+            <a:schemeClr val="dk1"/>
+          </a:fillRef>
+          <a:effectRef idx="1">
+            <a:schemeClr val="dk1"/>
+          </a:effectRef>
+          <a:fontRef idx="minor">
+            <a:schemeClr val="dk1"/>
+          </a:fontRef>
+        </p:style>
+        <p:txBody>
+          <a:bodyPr wrap="none" rtlCol="0">
+            <a:spAutoFit/>
+          </a:bodyPr>
+          <a:lstStyle/>
+          <a:p>
+            <a:r>
+              <a:rPr lang="en-US" b="1" dirty="0">
+                <a:latin typeface="Consolas" panose="020B0609020204030204" pitchFamily="49" charset="0"/>
+              </a:rPr>
+              <a:t>http://localhost:8085/subjects</a:t>
+            </a:r>
+          </a:p>
+          <a:p>
+            <a:endParaRPr lang="en-US" dirty="0">
+              <a:latin typeface="Consolas" panose="020B0609020204030204" pitchFamily="49" charset="0"/>
+            </a:endParaRPr>
+          </a:p>
+          <a:p>
+            <a:r>
+              <a:rPr lang="en-US" dirty="0">
+                <a:latin typeface="Consolas" panose="020B0609020204030204" pitchFamily="49" charset="0"/>
+              </a:rPr>
+              <a:t>[</a:t>
+            </a:r>
+          </a:p>
+          <a:p>
+            <a:r>
+              <a:rPr lang="en-US" dirty="0">
+                <a:latin typeface="Consolas" panose="020B0609020204030204" pitchFamily="49" charset="0"/>
+              </a:rPr>
+              <a:t>   “Hello-topic-value”</a:t>
+            </a:r>
+          </a:p>
+          <a:p>
+            <a:r>
+              <a:rPr lang="en-US" dirty="0">
+                <a:latin typeface="Consolas" panose="020B0609020204030204" pitchFamily="49" charset="0"/>
+              </a:rPr>
+              <a:t>]</a:t>
+            </a:r>
+          </a:p>
+        </p:txBody>
+      </p:sp>
+      <p:sp>
+        <p:nvSpPr>
+          <p:cNvPr id="7" name="Tekstfelt 6">
+            <a:extLst>
+              <a:ext uri="{FF2B5EF4-FFF2-40B4-BE49-F238E27FC236}">
+                <a16:creationId xmlns:a16="http://schemas.microsoft.com/office/drawing/2014/main" id="{C284F209-9260-BA1F-B4D9-9C9D8BA682EC}"/>
+              </a:ext>
+            </a:extLst>
+          </p:cNvPr>
+          <p:cNvSpPr txBox="1"/>
+          <p:nvPr/>
+        </p:nvSpPr>
+        <p:spPr>
+          <a:xfrm>
+            <a:off x="3955312" y="1249594"/>
+            <a:ext cx="5932967" cy="1384995"/>
+          </a:xfrm>
+          <a:prstGeom prst="rect">
+            <a:avLst/>
+          </a:prstGeom>
+        </p:spPr>
+        <p:style>
+          <a:lnRef idx="1">
+            <a:schemeClr val="dk1"/>
+          </a:lnRef>
+          <a:fillRef idx="2">
+            <a:schemeClr val="dk1"/>
+          </a:fillRef>
+          <a:effectRef idx="1">
+            <a:schemeClr val="dk1"/>
+          </a:effectRef>
+          <a:fontRef idx="minor">
+            <a:schemeClr val="dk1"/>
+          </a:fontRef>
+        </p:style>
+        <p:txBody>
+          <a:bodyPr wrap="square" rtlCol="0">
+            <a:spAutoFit/>
+          </a:bodyPr>
+          <a:lstStyle/>
+          <a:p>
+            <a:r>
+              <a:rPr lang="en-US" b="1" dirty="0">
+                <a:latin typeface="Consolas" panose="020B0609020204030204" pitchFamily="49" charset="0"/>
+              </a:rPr>
+              <a:t>http://localhost:8085/subjects/Hello-topic-value/versions</a:t>
+            </a:r>
+          </a:p>
+          <a:p>
+            <a:endParaRPr lang="en-US" dirty="0">
+              <a:latin typeface="Consolas" panose="020B0609020204030204" pitchFamily="49" charset="0"/>
+            </a:endParaRPr>
+          </a:p>
+          <a:p>
+            <a:r>
+              <a:rPr lang="en-US" dirty="0">
+                <a:latin typeface="Consolas" panose="020B0609020204030204" pitchFamily="49" charset="0"/>
+              </a:rPr>
+              <a:t>[</a:t>
+            </a:r>
+          </a:p>
+          <a:p>
+            <a:r>
+              <a:rPr lang="en-US" dirty="0">
+                <a:latin typeface="Consolas" panose="020B0609020204030204" pitchFamily="49" charset="0"/>
+              </a:rPr>
+              <a:t>   1,</a:t>
+            </a:r>
+          </a:p>
+          <a:p>
+            <a:r>
+              <a:rPr lang="en-US" dirty="0">
+                <a:latin typeface="Consolas" panose="020B0609020204030204" pitchFamily="49" charset="0"/>
+              </a:rPr>
+              <a:t>   2</a:t>
+            </a:r>
+          </a:p>
+          <a:p>
+            <a:r>
+              <a:rPr lang="en-US" dirty="0">
+                <a:latin typeface="Consolas" panose="020B0609020204030204" pitchFamily="49" charset="0"/>
+              </a:rPr>
+              <a:t>]</a:t>
+            </a:r>
+          </a:p>
+        </p:txBody>
+      </p:sp>
+      <p:sp>
+        <p:nvSpPr>
+          <p:cNvPr id="8" name="Tekstfelt 7">
+            <a:extLst>
+              <a:ext uri="{FF2B5EF4-FFF2-40B4-BE49-F238E27FC236}">
+                <a16:creationId xmlns:a16="http://schemas.microsoft.com/office/drawing/2014/main" id="{EFD47E22-2202-E0C5-2CB1-45BEFEF3F9BD}"/>
+              </a:ext>
+            </a:extLst>
+          </p:cNvPr>
+          <p:cNvSpPr txBox="1"/>
+          <p:nvPr/>
+        </p:nvSpPr>
+        <p:spPr>
+          <a:xfrm>
+            <a:off x="273769" y="3848860"/>
+            <a:ext cx="8982385" cy="2462213"/>
+          </a:xfrm>
+          <a:prstGeom prst="rect">
+            <a:avLst/>
+          </a:prstGeom>
+        </p:spPr>
+        <p:style>
+          <a:lnRef idx="1">
+            <a:schemeClr val="dk1"/>
+          </a:lnRef>
+          <a:fillRef idx="2">
+            <a:schemeClr val="dk1"/>
+          </a:fillRef>
+          <a:effectRef idx="1">
+            <a:schemeClr val="dk1"/>
+          </a:effectRef>
+          <a:fontRef idx="minor">
+            <a:schemeClr val="dk1"/>
+          </a:fontRef>
+        </p:style>
+        <p:txBody>
+          <a:bodyPr wrap="square" rtlCol="0">
+            <a:spAutoFit/>
+          </a:bodyPr>
+          <a:lstStyle/>
+          <a:p>
+            <a:r>
+              <a:rPr lang="en-US" b="1" dirty="0">
+                <a:latin typeface="Consolas" panose="020B0609020204030204" pitchFamily="49" charset="0"/>
+              </a:rPr>
+              <a:t>http://localhost:8085/subjects/Hello-topic-value/versions/1</a:t>
+            </a:r>
+          </a:p>
+          <a:p>
+            <a:endParaRPr lang="en-US" dirty="0">
+              <a:latin typeface="Consolas" panose="020B0609020204030204" pitchFamily="49" charset="0"/>
+            </a:endParaRPr>
+          </a:p>
+          <a:p>
+            <a:r>
+              <a:rPr lang="en-US" dirty="0">
+                <a:latin typeface="Consolas" panose="020B0609020204030204" pitchFamily="49" charset="0"/>
+              </a:rPr>
+              <a:t>{</a:t>
+            </a:r>
+          </a:p>
+          <a:p>
+            <a:r>
+              <a:rPr lang="en-US" dirty="0">
+                <a:latin typeface="Consolas" panose="020B0609020204030204" pitchFamily="49" charset="0"/>
+              </a:rPr>
+              <a:t>"subject": "hello-topic-value",</a:t>
+            </a:r>
+          </a:p>
+          <a:p>
+            <a:r>
+              <a:rPr lang="en-US" dirty="0">
+                <a:latin typeface="Consolas" panose="020B0609020204030204" pitchFamily="49" charset="0"/>
+              </a:rPr>
+              <a:t>"version": 1,</a:t>
+            </a:r>
+          </a:p>
+          <a:p>
+            <a:r>
+              <a:rPr lang="en-US" dirty="0">
+                <a:latin typeface="Consolas" panose="020B0609020204030204" pitchFamily="49" charset="0"/>
+              </a:rPr>
+              <a:t>"id": 1,</a:t>
+            </a:r>
+          </a:p>
+          <a:p>
+            <a:r>
+              <a:rPr lang="en-US" dirty="0">
+                <a:latin typeface="Consolas" panose="020B0609020204030204" pitchFamily="49" charset="0"/>
+              </a:rPr>
+              <a:t>"</a:t>
+            </a:r>
+            <a:r>
+              <a:rPr lang="en-US" dirty="0" err="1">
+                <a:latin typeface="Consolas" panose="020B0609020204030204" pitchFamily="49" charset="0"/>
+              </a:rPr>
+              <a:t>schemaType</a:t>
+            </a:r>
+            <a:r>
+              <a:rPr lang="en-US" dirty="0">
+                <a:latin typeface="Consolas" panose="020B0609020204030204" pitchFamily="49" charset="0"/>
+              </a:rPr>
+              <a:t>": "PROTOBUF",</a:t>
+            </a:r>
+          </a:p>
+          <a:p>
+            <a:r>
+              <a:rPr lang="en-US" dirty="0">
+                <a:latin typeface="Consolas" panose="020B0609020204030204" pitchFamily="49" charset="0"/>
+              </a:rPr>
+              <a:t>"schema": "syntax = \"proto3\";\n\</a:t>
+            </a:r>
+            <a:r>
+              <a:rPr lang="en-US" dirty="0" err="1">
+                <a:latin typeface="Consolas" panose="020B0609020204030204" pitchFamily="49" charset="0"/>
+              </a:rPr>
+              <a:t>noption</a:t>
+            </a:r>
+            <a:r>
+              <a:rPr lang="en-US" dirty="0">
+                <a:latin typeface="Consolas" panose="020B0609020204030204" pitchFamily="49" charset="0"/>
+              </a:rPr>
+              <a:t> </a:t>
+            </a:r>
+            <a:r>
+              <a:rPr lang="en-US" dirty="0" err="1">
+                <a:latin typeface="Consolas" panose="020B0609020204030204" pitchFamily="49" charset="0"/>
+              </a:rPr>
+              <a:t>java_package</a:t>
+            </a:r>
+            <a:r>
+              <a:rPr lang="en-US" dirty="0">
+                <a:latin typeface="Consolas" panose="020B0609020204030204" pitchFamily="49" charset="0"/>
+              </a:rPr>
+              <a:t> = \"</a:t>
+            </a:r>
+            <a:r>
+              <a:rPr lang="en-US" dirty="0" err="1">
+                <a:latin typeface="Consolas" panose="020B0609020204030204" pitchFamily="49" charset="0"/>
+              </a:rPr>
+              <a:t>com.example.tutorial.protos</a:t>
+            </a:r>
+            <a:r>
+              <a:rPr lang="en-US" dirty="0">
+                <a:latin typeface="Consolas" panose="020B0609020204030204" pitchFamily="49" charset="0"/>
+              </a:rPr>
+              <a:t>\";\n\</a:t>
+            </a:r>
+            <a:r>
+              <a:rPr lang="en-US" dirty="0" err="1">
+                <a:latin typeface="Consolas" panose="020B0609020204030204" pitchFamily="49" charset="0"/>
+              </a:rPr>
+              <a:t>nmessage</a:t>
+            </a:r>
+            <a:r>
+              <a:rPr lang="en-US" dirty="0">
+                <a:latin typeface="Consolas" panose="020B0609020204030204" pitchFamily="49" charset="0"/>
+              </a:rPr>
+              <a:t> HelloWorld {\n  string message = 1;\n  string message_1 = 2;\n}\n"</a:t>
+            </a:r>
+          </a:p>
+          <a:p>
+            <a:r>
+              <a:rPr lang="en-US" dirty="0">
+                <a:latin typeface="Consolas" panose="020B0609020204030204" pitchFamily="49" charset="0"/>
+              </a:rPr>
+              <a:t>}</a:t>
+            </a:r>
+          </a:p>
+        </p:txBody>
+      </p:sp>
+      <p:sp>
+        <p:nvSpPr>
+          <p:cNvPr id="9" name="Tekstfelt 8">
+            <a:extLst>
+              <a:ext uri="{FF2B5EF4-FFF2-40B4-BE49-F238E27FC236}">
+                <a16:creationId xmlns:a16="http://schemas.microsoft.com/office/drawing/2014/main" id="{4BEA47A3-EFD8-BD7F-FCE7-C78641F66F11}"/>
+              </a:ext>
+            </a:extLst>
+          </p:cNvPr>
+          <p:cNvSpPr txBox="1"/>
+          <p:nvPr/>
+        </p:nvSpPr>
+        <p:spPr>
+          <a:xfrm rot="1827459">
+            <a:off x="6523255" y="3293937"/>
+            <a:ext cx="3365024" cy="1169551"/>
+          </a:xfrm>
+          <a:prstGeom prst="rect">
+            <a:avLst/>
+          </a:prstGeom>
+        </p:spPr>
+        <p:style>
+          <a:lnRef idx="1">
+            <a:schemeClr val="dk1"/>
+          </a:lnRef>
+          <a:fillRef idx="2">
+            <a:schemeClr val="dk1"/>
+          </a:fillRef>
+          <a:effectRef idx="1">
+            <a:schemeClr val="dk1"/>
+          </a:effectRef>
+          <a:fontRef idx="minor">
+            <a:schemeClr val="dk1"/>
+          </a:fontRef>
+        </p:style>
+        <p:txBody>
+          <a:bodyPr wrap="none" rtlCol="0">
+            <a:spAutoFit/>
+          </a:bodyPr>
+          <a:lstStyle/>
+          <a:p>
+            <a:r>
+              <a:rPr lang="en-US" b="1" dirty="0">
+                <a:latin typeface="Consolas" panose="020B0609020204030204" pitchFamily="49" charset="0"/>
+              </a:rPr>
+              <a:t>http://localhost:8085/config</a:t>
+            </a:r>
+          </a:p>
+          <a:p>
+            <a:endParaRPr lang="en-US" dirty="0">
+              <a:latin typeface="Consolas" panose="020B0609020204030204" pitchFamily="49" charset="0"/>
+            </a:endParaRPr>
+          </a:p>
+          <a:p>
+            <a:r>
+              <a:rPr lang="en-US" dirty="0">
+                <a:latin typeface="Consolas" panose="020B0609020204030204" pitchFamily="49" charset="0"/>
+              </a:rPr>
+              <a:t>{</a:t>
+            </a:r>
+          </a:p>
+          <a:p>
+            <a:r>
+              <a:rPr lang="en-US" dirty="0">
+                <a:latin typeface="Consolas" panose="020B0609020204030204" pitchFamily="49" charset="0"/>
+              </a:rPr>
+              <a:t>"</a:t>
+            </a:r>
+            <a:r>
+              <a:rPr lang="en-US" dirty="0" err="1">
+                <a:latin typeface="Consolas" panose="020B0609020204030204" pitchFamily="49" charset="0"/>
+              </a:rPr>
+              <a:t>compatibilityLevel</a:t>
+            </a:r>
+            <a:r>
+              <a:rPr lang="en-US" dirty="0">
+                <a:latin typeface="Consolas" panose="020B0609020204030204" pitchFamily="49" charset="0"/>
+              </a:rPr>
+              <a:t>": "BACKWARD"</a:t>
+            </a:r>
+          </a:p>
+          <a:p>
+            <a:r>
+              <a:rPr lang="en-US" dirty="0">
+                <a:latin typeface="Consolas" panose="020B0609020204030204" pitchFamily="49" charset="0"/>
+              </a:rPr>
+              <a:t>}</a:t>
+            </a:r>
+          </a:p>
+        </p:txBody>
+      </p:sp>
+      <p:sp>
+        <p:nvSpPr>
+          <p:cNvPr id="11" name="Tekstfelt 10">
+            <a:extLst>
+              <a:ext uri="{FF2B5EF4-FFF2-40B4-BE49-F238E27FC236}">
+                <a16:creationId xmlns:a16="http://schemas.microsoft.com/office/drawing/2014/main" id="{9AAD92B8-EF97-6D72-7BA2-A2334A294406}"/>
+              </a:ext>
+            </a:extLst>
+          </p:cNvPr>
+          <p:cNvSpPr txBox="1"/>
+          <p:nvPr/>
+        </p:nvSpPr>
+        <p:spPr>
+          <a:xfrm>
+            <a:off x="744279" y="2855251"/>
+            <a:ext cx="4527201" cy="523220"/>
+          </a:xfrm>
+          <a:prstGeom prst="rect">
+            <a:avLst/>
+          </a:prstGeom>
+          <a:gradFill flip="none" rotWithShape="1">
+            <a:gsLst>
+              <a:gs pos="0">
+                <a:schemeClr val="dk1">
+                  <a:lumMod val="67000"/>
+                </a:schemeClr>
+              </a:gs>
+              <a:gs pos="48000">
+                <a:schemeClr val="dk1">
+                  <a:lumMod val="97000"/>
+                  <a:lumOff val="3000"/>
+                </a:schemeClr>
+              </a:gs>
+              <a:gs pos="100000">
+                <a:schemeClr val="dk1">
+                  <a:lumMod val="60000"/>
+                  <a:lumOff val="40000"/>
+                </a:schemeClr>
+              </a:gs>
+            </a:gsLst>
+            <a:lin ang="16200000" scaled="1"/>
+            <a:tileRect/>
+          </a:gradFill>
+          <a:ln>
+            <a:noFill/>
+          </a:ln>
+        </p:spPr>
+        <p:style>
+          <a:lnRef idx="0">
+            <a:scrgbClr r="0" g="0" b="0"/>
+          </a:lnRef>
+          <a:fillRef idx="0">
+            <a:scrgbClr r="0" g="0" b="0"/>
+          </a:fillRef>
+          <a:effectRef idx="0">
+            <a:scrgbClr r="0" g="0" b="0"/>
+          </a:effectRef>
+          <a:fontRef idx="minor">
+            <a:schemeClr val="lt1"/>
+          </a:fontRef>
+        </p:style>
+        <p:txBody>
+          <a:bodyPr wrap="none" rtlCol="0">
+            <a:spAutoFit/>
+          </a:bodyPr>
+          <a:lstStyle/>
+          <a:p>
+            <a:r>
+              <a:rPr lang="da-DK" dirty="0" err="1"/>
+              <a:t>Use</a:t>
+            </a:r>
+            <a:r>
+              <a:rPr lang="da-DK" dirty="0"/>
+              <a:t> POST + DELETE + PATCH operations to </a:t>
+            </a:r>
+            <a:r>
+              <a:rPr lang="da-DK" dirty="0" err="1"/>
+              <a:t>change</a:t>
+            </a:r>
+            <a:r>
+              <a:rPr lang="da-DK" dirty="0"/>
+              <a:t> </a:t>
+            </a:r>
+          </a:p>
+          <a:p>
+            <a:r>
+              <a:rPr lang="da-DK" dirty="0" err="1"/>
+              <a:t>configurations</a:t>
+            </a:r>
+            <a:r>
+              <a:rPr lang="da-DK" dirty="0"/>
+              <a:t> and </a:t>
+            </a:r>
+            <a:r>
+              <a:rPr lang="da-DK" dirty="0" err="1"/>
+              <a:t>create</a:t>
+            </a:r>
+            <a:r>
+              <a:rPr lang="da-DK" dirty="0"/>
+              <a:t>, </a:t>
+            </a:r>
+            <a:r>
+              <a:rPr lang="da-DK" dirty="0" err="1"/>
+              <a:t>update</a:t>
+            </a:r>
+            <a:r>
+              <a:rPr lang="da-DK" dirty="0"/>
+              <a:t> and delete </a:t>
+            </a:r>
+            <a:r>
+              <a:rPr lang="da-DK" dirty="0" err="1"/>
+              <a:t>schemas</a:t>
+            </a:r>
+            <a:endParaRPr lang="en-US" dirty="0"/>
+          </a:p>
+        </p:txBody>
+      </p:sp>
+      <p:sp>
+        <p:nvSpPr>
+          <p:cNvPr id="12" name="Pil: højre 11">
+            <a:extLst>
+              <a:ext uri="{FF2B5EF4-FFF2-40B4-BE49-F238E27FC236}">
+                <a16:creationId xmlns:a16="http://schemas.microsoft.com/office/drawing/2014/main" id="{8349AACE-0A3F-4ECC-1705-5F6F77A41D32}"/>
+              </a:ext>
+            </a:extLst>
+          </p:cNvPr>
+          <p:cNvSpPr/>
+          <p:nvPr/>
+        </p:nvSpPr>
+        <p:spPr>
+          <a:xfrm>
+            <a:off x="6371029" y="4376361"/>
+            <a:ext cx="2054423" cy="484632"/>
+          </a:xfrm>
+          <a:prstGeom prst="rightArrow">
+            <a:avLst/>
+          </a:prstGeom>
+        </p:spPr>
+        <p:style>
+          <a:lnRef idx="2">
+            <a:schemeClr val="accent1">
+              <a:shade val="15000"/>
+            </a:schemeClr>
+          </a:lnRef>
+          <a:fillRef idx="1">
+            <a:schemeClr val="accent1"/>
+          </a:fillRef>
+          <a:effectRef idx="0">
+            <a:schemeClr val="accent1"/>
+          </a:effectRef>
+          <a:fontRef idx="minor">
+            <a:schemeClr val="lt1"/>
+          </a:fontRef>
+        </p:style>
+        <p:txBody>
+          <a:bodyPr rtlCol="0" anchor="ctr"/>
+          <a:lstStyle/>
+          <a:p>
+            <a:pPr algn="ctr"/>
+            <a:r>
+              <a:rPr lang="da-DK" dirty="0"/>
+              <a:t>Default </a:t>
+            </a:r>
+            <a:r>
+              <a:rPr lang="da-DK" dirty="0" err="1"/>
+              <a:t>compatibility</a:t>
+            </a:r>
+            <a:endParaRPr lang="en-US" dirty="0"/>
+          </a:p>
+        </p:txBody>
+      </p:sp>
+    </p:spTree>
+    <p:extLst>
+      <p:ext uri="{BB962C8B-B14F-4D97-AF65-F5344CB8AC3E}">
+        <p14:creationId xmlns:p14="http://schemas.microsoft.com/office/powerpoint/2010/main" val="942320509"/>
       </p:ext>
     </p:extLst>
   </p:cSld>

--- a/slides/12 - Schema registry.pptx
+++ b/slides/12 - Schema registry.pptx
@@ -6,10 +6,10 @@
     <p:sldMasterId id="2147483657" r:id="rId2"/>
   </p:sldMasterIdLst>
   <p:notesMasterIdLst>
-    <p:notesMasterId r:id="rId14"/>
+    <p:notesMasterId r:id="rId15"/>
   </p:notesMasterIdLst>
   <p:handoutMasterIdLst>
-    <p:handoutMasterId r:id="rId15"/>
+    <p:handoutMasterId r:id="rId16"/>
   </p:handoutMasterIdLst>
   <p:sldIdLst>
     <p:sldId id="260" r:id="rId3"/>
@@ -23,23 +23,24 @@
     <p:sldId id="323" r:id="rId11"/>
     <p:sldId id="321" r:id="rId12"/>
     <p:sldId id="322" r:id="rId13"/>
+    <p:sldId id="329" r:id="rId14"/>
   </p:sldIdLst>
   <p:sldSz cx="10080625" cy="6858000"/>
   <p:notesSz cx="6888163" cy="10020300"/>
   <p:embeddedFontLst>
     <p:embeddedFont>
       <p:font typeface="Arial Narrow" panose="020B0606020202030204" pitchFamily="34" charset="0"/>
-      <p:regular r:id="rId16"/>
-      <p:bold r:id="rId17"/>
-      <p:italic r:id="rId18"/>
-      <p:boldItalic r:id="rId19"/>
+      <p:regular r:id="rId17"/>
+      <p:bold r:id="rId18"/>
+      <p:italic r:id="rId19"/>
+      <p:boldItalic r:id="rId20"/>
     </p:embeddedFont>
     <p:embeddedFont>
       <p:font typeface="Consolas" panose="020B0609020204030204" pitchFamily="49" charset="0"/>
-      <p:regular r:id="rId20"/>
-      <p:bold r:id="rId21"/>
-      <p:italic r:id="rId22"/>
-      <p:boldItalic r:id="rId23"/>
+      <p:regular r:id="rId21"/>
+      <p:bold r:id="rId22"/>
+      <p:italic r:id="rId23"/>
+      <p:boldItalic r:id="rId24"/>
     </p:embeddedFont>
   </p:embeddedFontLst>
   <p:defaultTextStyle>
@@ -406,7 +407,7 @@
           <a:p>
             <a:fld id="{2FBFE939-5EC3-4D08-AE9D-032279A81FC9}" type="datetimeFigureOut">
               <a:rPr lang="da-DK" smtClean="0"/>
-              <a:t>06-04-2024</a:t>
+              <a:t>08-04-2024</a:t>
             </a:fld>
             <a:endParaRPr lang="da-DK"/>
           </a:p>
@@ -4593,6 +4594,101 @@
     <p:extLst>
       <p:ext uri="{BB962C8B-B14F-4D97-AF65-F5344CB8AC3E}">
         <p14:creationId xmlns:p14="http://schemas.microsoft.com/office/powerpoint/2010/main" val="100181980"/>
+      </p:ext>
+    </p:extLst>
+  </p:cSld>
+  <p:clrMapOvr>
+    <a:masterClrMapping/>
+  </p:clrMapOvr>
+</p:sld>
+</file>
+
+<file path=ppt/slides/slide12.xml><?xml version="1.0" encoding="utf-8"?>
+<p:sld xmlns:a="http://schemas.openxmlformats.org/drawingml/2006/main" xmlns:r="http://schemas.openxmlformats.org/officeDocument/2006/relationships" xmlns:p="http://schemas.openxmlformats.org/presentationml/2006/main">
+  <p:cSld>
+    <p:spTree>
+      <p:nvGrpSpPr>
+        <p:cNvPr id="1" name=""/>
+        <p:cNvGrpSpPr/>
+        <p:nvPr/>
+      </p:nvGrpSpPr>
+      <p:grpSpPr>
+        <a:xfrm>
+          <a:off x="0" y="0"/>
+          <a:ext cx="0" cy="0"/>
+          <a:chOff x="0" y="0"/>
+          <a:chExt cx="0" cy="0"/>
+        </a:xfrm>
+      </p:grpSpPr>
+      <p:sp>
+        <p:nvSpPr>
+          <p:cNvPr id="2" name="Titel 1">
+            <a:extLst>
+              <a:ext uri="{FF2B5EF4-FFF2-40B4-BE49-F238E27FC236}">
+                <a16:creationId xmlns:a16="http://schemas.microsoft.com/office/drawing/2014/main" id="{D921EA28-74D7-33B5-C555-50355A95DB0C}"/>
+              </a:ext>
+            </a:extLst>
+          </p:cNvPr>
+          <p:cNvSpPr>
+            <a:spLocks noGrp="1"/>
+          </p:cNvSpPr>
+          <p:nvPr>
+            <p:ph type="title"/>
+          </p:nvPr>
+        </p:nvSpPr>
+        <p:spPr/>
+        <p:txBody>
+          <a:bodyPr/>
+          <a:lstStyle/>
+          <a:p>
+            <a:r>
+              <a:rPr lang="da-DK" dirty="0" err="1"/>
+              <a:t>Example</a:t>
+            </a:r>
+            <a:endParaRPr lang="en-US" dirty="0"/>
+          </a:p>
+        </p:txBody>
+      </p:sp>
+      <p:pic>
+        <p:nvPicPr>
+          <p:cNvPr id="5" name="Grafik 4">
+            <a:extLst>
+              <a:ext uri="{FF2B5EF4-FFF2-40B4-BE49-F238E27FC236}">
+                <a16:creationId xmlns:a16="http://schemas.microsoft.com/office/drawing/2014/main" id="{1FC9DA2B-4ABE-822A-468D-AFC28B08A56C}"/>
+              </a:ext>
+            </a:extLst>
+          </p:cNvPr>
+          <p:cNvPicPr>
+            <a:picLocks noChangeAspect="1"/>
+          </p:cNvPicPr>
+          <p:nvPr/>
+        </p:nvPicPr>
+        <p:blipFill>
+          <a:blip r:embed="rId2">
+            <a:extLst>
+              <a:ext uri="{96DAC541-7B7A-43D3-8B79-37D633B846F1}">
+                <asvg:svgBlip xmlns:asvg="http://schemas.microsoft.com/office/drawing/2016/SVG/main" r:embed="rId3"/>
+              </a:ext>
+            </a:extLst>
+          </a:blip>
+          <a:stretch>
+            <a:fillRect/>
+          </a:stretch>
+        </p:blipFill>
+        <p:spPr>
+          <a:xfrm>
+            <a:off x="1525587" y="1829529"/>
+            <a:ext cx="7029450" cy="3057525"/>
+          </a:xfrm>
+          <a:prstGeom prst="rect">
+            <a:avLst/>
+          </a:prstGeom>
+        </p:spPr>
+      </p:pic>
+    </p:spTree>
+    <p:extLst>
+      <p:ext uri="{BB962C8B-B14F-4D97-AF65-F5344CB8AC3E}">
+        <p14:creationId xmlns:p14="http://schemas.microsoft.com/office/powerpoint/2010/main" val="777249425"/>
       </p:ext>
     </p:extLst>
   </p:cSld>
@@ -12393,7 +12489,7 @@
 
 <file path=ppt/webextensions/taskpanes.xml><?xml version="1.0" encoding="utf-8"?>
 <wetp:taskpanes xmlns:wetp="http://schemas.microsoft.com/office/webextensions/taskpanes/2010/11">
-  <wetp:taskpane dockstate="right" visibility="0" width="350" row="7">
+  <wetp:taskpane dockstate="right" visibility="0" width="700" row="3">
     <wetp:webextensionref xmlns:r="http://schemas.openxmlformats.org/officeDocument/2006/relationships" r:id="rId1"/>
   </wetp:taskpane>
 </wetp:taskpanes>
